--- a/Ch04_Song_and_Dance.pptx
+++ b/Ch04_Song_and_Dance.pptx
@@ -2275,7 +2275,7 @@
               <a:buNone/>
             </a:pPr>
             <a:r>
-              <a:rPr lang="en-US" sz="1100" spc="300" kern="0" dirty="0">
+              <a:rPr lang="en-US" sz="1400" spc="300" kern="0" dirty="0">
                 <a:solidFill>
                   <a:srgbClr val="E8D8A8"/>
                 </a:solidFill>
@@ -2285,7 +2285,7 @@
               </a:rPr>
               <a:t>A HISTORY OF WESTERN MUSIC · TENTH EDITION</a:t>
             </a:r>
-            <a:endParaRPr lang="en-US" sz="1100" dirty="0"/>
+            <a:endParaRPr lang="en-US" sz="1400" dirty="0"/>
           </a:p>
         </p:txBody>
       </p:sp>
@@ -2461,14 +2461,14 @@
           <a:ln/>
         </p:spPr>
         <p:txBody>
-          <a:bodyPr wrap="square" rtlCol="0" anchor="ctr"/>
+          <a:bodyPr wrap="square" rtlCol="0" anchor="t"/>
           <a:lstStyle/>
           <a:p>
             <a:pPr algn="ctr" indent="0" marL="0">
               <a:buNone/>
             </a:pPr>
             <a:r>
-              <a:rPr lang="en-US" sz="1100" dirty="0">
+              <a:rPr lang="en-US" sz="1400" dirty="0">
                 <a:solidFill>
                   <a:srgbClr val="C8A020"/>
                 </a:solidFill>
@@ -2478,7 +2478,7 @@
               </a:rPr>
               <a:t>Textbook pp. 63–79</a:t>
             </a:r>
-            <a:endParaRPr lang="en-US" sz="1100" dirty="0"/>
+            <a:endParaRPr lang="en-US" sz="1400" dirty="0"/>
           </a:p>
         </p:txBody>
       </p:sp>
@@ -2611,14 +2611,14 @@
           <a:ln/>
         </p:spPr>
         <p:txBody>
-          <a:bodyPr wrap="square" lIns="0" tIns="0" rIns="0" bIns="0" rtlCol="0" anchor="ctr"/>
-          <a:lstStyle/>
-          <a:p>
-            <a:pPr indent="0" marL="0">
-              <a:buNone/>
-            </a:pPr>
-            <a:r>
-              <a:rPr lang="en-US" sz="1100" i="1" dirty="0">
+          <a:bodyPr wrap="square" lIns="0" tIns="0" rIns="0" bIns="0" rtlCol="0" anchor="t"/>
+          <a:lstStyle/>
+          <a:p>
+            <a:pPr indent="0" marL="0">
+              <a:buNone/>
+            </a:pPr>
+            <a:r>
+              <a:rPr lang="en-US" sz="1400" i="1" dirty="0">
                 <a:solidFill>
                   <a:srgbClr val="5C3A28"/>
                 </a:solidFill>
@@ -2628,7 +2628,7 @@
               </a:rPr>
               <a:t>弦、木管、銅管、打擊、管風琴——中世紀樂師已有豐富的音色調色盤</a:t>
             </a:r>
-            <a:endParaRPr lang="en-US" sz="1100" dirty="0"/>
+            <a:endParaRPr lang="en-US" sz="1400" dirty="0"/>
           </a:p>
         </p:txBody>
       </p:sp>
@@ -2697,7 +2697,7 @@
               <a:buNone/>
             </a:pPr>
             <a:r>
-              <a:rPr lang="en-US" sz="1300" b="1" dirty="0">
+              <a:rPr lang="en-US" sz="1400" b="1" dirty="0">
                 <a:solidFill>
                   <a:srgbClr val="C8A020"/>
                 </a:solidFill>
@@ -2705,9 +2705,9 @@
                 <a:ea typeface="Georgia" pitchFamily="34" charset="-122"/>
                 <a:cs typeface="Georgia" pitchFamily="34" charset="-120"/>
               </a:rPr>
-              <a:t>🎻 弦樂器 Strings</a:t>
-            </a:r>
-            <a:endParaRPr lang="en-US" sz="1300" dirty="0"/>
+              <a:t>■ 弦樂器 Strings</a:t>
+            </a:r>
+            <a:endParaRPr lang="en-US" sz="1400" dirty="0"/>
           </a:p>
         </p:txBody>
       </p:sp>
@@ -2760,7 +2760,7 @@
               <a:buChar char="•"/>
             </a:pPr>
             <a:r>
-              <a:rPr lang="en-US" sz="950" dirty="0">
+              <a:rPr lang="en-US" sz="1400" dirty="0">
                 <a:solidFill>
                   <a:srgbClr val="FBF5E6"/>
                 </a:solidFill>
@@ -2770,7 +2770,7 @@
               </a:rPr>
               <a:t>Vielle 費德爾：五弦、四度與五度調音，可由空弦作持續音——中世紀主要拉弦樂器，小提琴的前身</a:t>
             </a:r>
-            <a:endParaRPr lang="en-US" sz="950" dirty="0"/>
+            <a:endParaRPr lang="en-US" sz="1400" dirty="0"/>
           </a:p>
           <a:p>
             <a:pPr marL="342900" indent="-342900">
@@ -2781,7 +2781,7 @@
               <a:buChar char="•"/>
             </a:pPr>
             <a:r>
-              <a:rPr lang="en-US" sz="950" dirty="0">
+              <a:rPr lang="en-US" sz="1400" dirty="0">
                 <a:solidFill>
                   <a:srgbClr val="FBF5E6"/>
                 </a:solidFill>
@@ -2791,7 +2791,7 @@
               </a:rPr>
               <a:t>Hurdy-gurdy 搖弦琴：三弦 vielle，旋轉輪擦弦發聲；另一弦作持續音；類似風笛音響</a:t>
             </a:r>
-            <a:endParaRPr lang="en-US" sz="950" dirty="0"/>
+            <a:endParaRPr lang="en-US" sz="1400" dirty="0"/>
           </a:p>
           <a:p>
             <a:pPr marL="342900" indent="-342900">
@@ -2802,7 +2802,7 @@
               <a:buChar char="•"/>
             </a:pPr>
             <a:r>
-              <a:rPr lang="en-US" sz="950" dirty="0">
+              <a:rPr lang="en-US" sz="1400" dirty="0">
                 <a:solidFill>
                   <a:srgbClr val="FBF5E6"/>
                 </a:solidFill>
@@ -2812,7 +2812,7 @@
               </a:rPr>
               <a:t>Harp 豎琴：此類型可能源自不列顛群島</a:t>
             </a:r>
-            <a:endParaRPr lang="en-US" sz="950" dirty="0"/>
+            <a:endParaRPr lang="en-US" sz="1400" dirty="0"/>
           </a:p>
           <a:p>
             <a:pPr marL="342900" indent="-342900">
@@ -2823,7 +2823,7 @@
               <a:buChar char="•"/>
             </a:pPr>
             <a:r>
-              <a:rPr lang="en-US" sz="950" dirty="0">
+              <a:rPr lang="en-US" sz="1400" dirty="0">
                 <a:solidFill>
                   <a:srgbClr val="FBF5E6"/>
                 </a:solidFill>
@@ -2833,7 +2833,7 @@
               </a:rPr>
               <a:t>Psaltery 詩琴：撥弦樂器，彈撥木框上的弦——大鍵琴與鋼琴的遠祖</a:t>
             </a:r>
-            <a:endParaRPr lang="en-US" sz="950" dirty="0"/>
+            <a:endParaRPr lang="en-US" sz="1400" dirty="0"/>
           </a:p>
           <a:p>
             <a:pPr marL="342900" indent="-342900">
@@ -2844,7 +2844,7 @@
               <a:buChar char="•"/>
             </a:pPr>
             <a:r>
-              <a:rPr lang="en-US" sz="950" dirty="0">
+              <a:rPr lang="en-US" sz="1400" dirty="0">
                 <a:solidFill>
                   <a:srgbClr val="FBF5E6"/>
                 </a:solidFill>
@@ -2854,7 +2854,7 @@
               </a:rPr>
               <a:t>Lute 魯特琴（後來由阿拉伯傳入歐洲）</a:t>
             </a:r>
-            <a:endParaRPr lang="en-US" sz="950" dirty="0"/>
+            <a:endParaRPr lang="en-US" sz="1400" dirty="0"/>
           </a:p>
         </p:txBody>
       </p:sp>
@@ -2903,7 +2903,7 @@
               <a:buNone/>
             </a:pPr>
             <a:r>
-              <a:rPr lang="en-US" sz="1300" b="1" dirty="0">
+              <a:rPr lang="en-US" sz="1400" b="1" dirty="0">
                 <a:solidFill>
                   <a:srgbClr val="C8A020"/>
                 </a:solidFill>
@@ -2911,9 +2911,9 @@
                 <a:ea typeface="Georgia" pitchFamily="34" charset="-122"/>
                 <a:cs typeface="Georgia" pitchFamily="34" charset="-120"/>
               </a:rPr>
-              <a:t>🌬 管樂 · 打擊 Winds &amp; Percussion</a:t>
-            </a:r>
-            <a:endParaRPr lang="en-US" sz="1300" dirty="0"/>
+              <a:t>■ 管樂 · 打擊 Winds &amp; Percussion</a:t>
+            </a:r>
+            <a:endParaRPr lang="en-US" sz="1400" dirty="0"/>
           </a:p>
         </p:txBody>
       </p:sp>
@@ -2966,7 +2966,7 @@
               <a:buChar char="•"/>
             </a:pPr>
             <a:r>
-              <a:rPr lang="en-US" sz="950" dirty="0">
+              <a:rPr lang="en-US" sz="1400" dirty="0">
                 <a:solidFill>
                   <a:srgbClr val="FBF5E6"/>
                 </a:solidFill>
@@ -2976,7 +2976,7 @@
               </a:rPr>
               <a:t>Transverse flute 橫笛：木製或象牙，無按鍵</a:t>
             </a:r>
-            <a:endParaRPr lang="en-US" sz="950" dirty="0"/>
+            <a:endParaRPr lang="en-US" sz="1400" dirty="0"/>
           </a:p>
           <a:p>
             <a:pPr marL="342900" indent="-342900">
@@ -2987,7 +2987,7 @@
               <a:buChar char="•"/>
             </a:pPr>
             <a:r>
-              <a:rPr lang="en-US" sz="950" dirty="0">
+              <a:rPr lang="en-US" sz="1400" dirty="0">
                 <a:solidFill>
                   <a:srgbClr val="FBF5E6"/>
                 </a:solidFill>
@@ -2997,7 +2997,7 @@
               </a:rPr>
               <a:t>Shawm 蕭姆管：雙簧樂器，雙簧管前身</a:t>
             </a:r>
-            <a:endParaRPr lang="en-US" sz="950" dirty="0"/>
+            <a:endParaRPr lang="en-US" sz="1400" dirty="0"/>
           </a:p>
           <a:p>
             <a:pPr marL="342900" indent="-342900">
@@ -3008,7 +3008,7 @@
               <a:buChar char="•"/>
             </a:pPr>
             <a:r>
-              <a:rPr lang="en-US" sz="950" dirty="0">
+              <a:rPr lang="en-US" sz="1400" dirty="0">
                 <a:solidFill>
                   <a:srgbClr val="FBF5E6"/>
                 </a:solidFill>
@@ -3018,7 +3018,7 @@
               </a:rPr>
               <a:t>Trumpet 號角：直管無活塞，僅能吹奏泛音列</a:t>
             </a:r>
-            <a:endParaRPr lang="en-US" sz="950" dirty="0"/>
+            <a:endParaRPr lang="en-US" sz="1400" dirty="0"/>
           </a:p>
           <a:p>
             <a:pPr marL="342900" indent="-342900">
@@ -3029,7 +3029,7 @@
               <a:buChar char="•"/>
             </a:pPr>
             <a:r>
-              <a:rPr lang="en-US" sz="950" dirty="0">
+              <a:rPr lang="en-US" sz="1400" dirty="0">
                 <a:solidFill>
                   <a:srgbClr val="FBF5E6"/>
                 </a:solidFill>
@@ -3039,7 +3039,7 @@
               </a:rPr>
               <a:t>Pipe and tabor：左手持高音哨笛，右手敲小鼓——單人可演奏舞曲</a:t>
             </a:r>
-            <a:endParaRPr lang="en-US" sz="950" dirty="0"/>
+            <a:endParaRPr lang="en-US" sz="1400" dirty="0"/>
           </a:p>
           <a:p>
             <a:pPr marL="342900" indent="-342900">
@@ -3050,7 +3050,7 @@
               <a:buChar char="•"/>
             </a:pPr>
             <a:r>
-              <a:rPr lang="en-US" sz="950" dirty="0">
+              <a:rPr lang="en-US" sz="1400" dirty="0">
                 <a:solidFill>
                   <a:srgbClr val="FBF5E6"/>
                 </a:solidFill>
@@ -3060,7 +3060,7 @@
               </a:rPr>
               <a:t>Bagpipe 風笛：遍布歐洲的民間樂器</a:t>
             </a:r>
-            <a:endParaRPr lang="en-US" sz="950" dirty="0"/>
+            <a:endParaRPr lang="en-US" sz="1400" dirty="0"/>
           </a:p>
           <a:p>
             <a:pPr marL="342900" indent="-342900">
@@ -3071,7 +3071,7 @@
               <a:buChar char="•"/>
             </a:pPr>
             <a:r>
-              <a:rPr lang="en-US" sz="950" dirty="0">
+              <a:rPr lang="en-US" sz="1400" dirty="0">
                 <a:solidFill>
                   <a:srgbClr val="FBF5E6"/>
                 </a:solidFill>
@@ -3081,7 +3081,7 @@
               </a:rPr>
               <a:t>Bells 鐘 · Organs 管風琴（portative 可攜式 / positive 小型桌上型）</a:t>
             </a:r>
-            <a:endParaRPr lang="en-US" sz="950" dirty="0"/>
+            <a:endParaRPr lang="en-US" sz="1400" dirty="0"/>
           </a:p>
         </p:txBody>
       </p:sp>
@@ -3308,7 +3308,7 @@
                 <a:ea typeface="Georgia" pitchFamily="34" charset="-122"/>
                 <a:cs typeface="Georgia" pitchFamily="34" charset="-120"/>
               </a:rPr>
-              <a:t>💃 Carole 圓舞</a:t>
+              <a:t>■ Carole 圓舞</a:t>
             </a:r>
             <a:endParaRPr lang="en-US" sz="1400" dirty="0"/>
           </a:p>
@@ -3332,14 +3332,14 @@
           <a:ln/>
         </p:spPr>
         <p:txBody>
-          <a:bodyPr wrap="square" rtlCol="0" anchor="ctr"/>
-          <a:lstStyle/>
-          <a:p>
-            <a:pPr indent="0" marL="0">
-              <a:buNone/>
-            </a:pPr>
-            <a:r>
-              <a:rPr lang="en-US" sz="1050" dirty="0">
+          <a:bodyPr wrap="square" rtlCol="0" anchor="t"/>
+          <a:lstStyle/>
+          <a:p>
+            <a:pPr indent="0" marL="0">
+              <a:buNone/>
+            </a:pPr>
+            <a:r>
+              <a:rPr lang="en-US" sz="1400" dirty="0">
                 <a:solidFill>
                   <a:srgbClr val="E8D8A8"/>
                 </a:solidFill>
@@ -3349,14 +3349,14 @@
               </a:rPr>
               <a:t>12–14 世紀法國最流行的社交舞 · 圓圈舞蹈 · 通常由其中一位或多位舞者歌唱伴奏</a:t>
             </a:r>
-            <a:endParaRPr lang="en-US" sz="1050" dirty="0"/>
-          </a:p>
-          <a:p>
-            <a:pPr indent="0" marL="0">
-              <a:buNone/>
-            </a:pPr>
-            <a:r>
-              <a:rPr lang="en-US" sz="1050" dirty="0">
+            <a:endParaRPr lang="en-US" sz="1400" dirty="0"/>
+          </a:p>
+          <a:p>
+            <a:pPr indent="0" marL="0">
+              <a:buNone/>
+            </a:pPr>
+            <a:r>
+              <a:rPr lang="en-US" sz="1400" dirty="0">
                 <a:solidFill>
                   <a:srgbClr val="E8D8A8"/>
                 </a:solidFill>
@@ -3366,14 +3366,14 @@
               </a:rPr>
               <a:t>The most popular social dance in France, 12th–14th c.; circle dance usually led by singing dancers</a:t>
             </a:r>
-            <a:endParaRPr lang="en-US" sz="1050" dirty="0"/>
-          </a:p>
-          <a:p>
-            <a:pPr indent="0" marL="0">
-              <a:buNone/>
-            </a:pPr>
-            <a:r>
-              <a:rPr lang="en-US" sz="1050" dirty="0">
+            <a:endParaRPr lang="en-US" sz="1400" dirty="0"/>
+          </a:p>
+          <a:p>
+            <a:pPr indent="0" marL="0">
+              <a:buNone/>
+            </a:pPr>
+            <a:r>
+              <a:rPr lang="en-US" sz="1400" dirty="0">
                 <a:solidFill>
                   <a:srgbClr val="E8D8A8"/>
                 </a:solidFill>
@@ -3383,14 +3383,14 @@
               </a:rPr>
               <a:t>• 可加入樂師伴奏（如《玫瑰傳奇》中所描述）</a:t>
             </a:r>
-            <a:endParaRPr lang="en-US" sz="1050" dirty="0"/>
-          </a:p>
-          <a:p>
-            <a:pPr indent="0" marL="0">
-              <a:buNone/>
-            </a:pPr>
-            <a:r>
-              <a:rPr lang="en-US" sz="1050" dirty="0">
+            <a:endParaRPr lang="en-US" sz="1400" dirty="0"/>
+          </a:p>
+          <a:p>
+            <a:pPr indent="0" marL="0">
+              <a:buNone/>
+            </a:pPr>
+            <a:r>
+              <a:rPr lang="en-US" sz="1400" dirty="0">
                 <a:solidFill>
                   <a:srgbClr val="E8D8A8"/>
                 </a:solidFill>
@@ -3400,7 +3400,7 @@
               </a:rPr>
               <a:t>• 儘管流行，現存旋律僅約 24 首——多靠口傳心授，極少寫下</a:t>
             </a:r>
-            <a:endParaRPr lang="en-US" sz="1050" dirty="0"/>
+            <a:endParaRPr lang="en-US" sz="1400" dirty="0"/>
           </a:p>
         </p:txBody>
       </p:sp>
@@ -3457,7 +3457,7 @@
                 <a:ea typeface="Georgia" pitchFamily="34" charset="-122"/>
                 <a:cs typeface="Georgia" pitchFamily="34" charset="-120"/>
               </a:rPr>
-              <a:t>🎺 Estampie 埃斯坦皮舞曲</a:t>
+              <a:t>■ Estampie 埃斯坦皮舞曲</a:t>
             </a:r>
             <a:endParaRPr lang="en-US" sz="1400" dirty="0"/>
           </a:p>
@@ -3481,14 +3481,14 @@
           <a:ln/>
         </p:spPr>
         <p:txBody>
-          <a:bodyPr wrap="square" rtlCol="0" anchor="ctr"/>
-          <a:lstStyle/>
-          <a:p>
-            <a:pPr indent="0" marL="0">
-              <a:buNone/>
-            </a:pPr>
-            <a:r>
-              <a:rPr lang="en-US" sz="1000" dirty="0">
+          <a:bodyPr wrap="square" rtlCol="0" anchor="t"/>
+          <a:lstStyle/>
+          <a:p>
+            <a:pPr indent="0" marL="0">
+              <a:buNone/>
+            </a:pPr>
+            <a:r>
+              <a:rPr lang="en-US" sz="1400" dirty="0">
                 <a:solidFill>
                   <a:srgbClr val="E8D8A8"/>
                 </a:solidFill>
@@ -3498,14 +3498,14 @@
               </a:rPr>
               <a:t>現存最常見的中世紀器樂舞曲形式 · 13–14 世紀 · 約 50 首現存（多為單音，少數有鍵盤複音設定）</a:t>
             </a:r>
-            <a:endParaRPr lang="en-US" sz="1000" dirty="0"/>
-          </a:p>
-          <a:p>
-            <a:pPr indent="0" marL="0">
-              <a:buNone/>
-            </a:pPr>
-            <a:r>
-              <a:rPr lang="en-US" sz="1000" dirty="0">
+            <a:endParaRPr lang="en-US" sz="1400" dirty="0"/>
+          </a:p>
+          <a:p>
+            <a:pPr indent="0" marL="0">
+              <a:buNone/>
+            </a:pPr>
+            <a:r>
+              <a:rPr lang="en-US" sz="1400" dirty="0">
                 <a:solidFill>
                   <a:srgbClr val="E8D8A8"/>
                 </a:solidFill>
@@ -3515,20 +3515,20 @@
               </a:rPr>
               <a:t>The most common surviving medieval dance; ca. 50 extant tunes (mostly monophonic)</a:t>
             </a:r>
-            <a:endParaRPr lang="en-US" sz="1000" dirty="0"/>
-          </a:p>
-          <a:p>
-            <a:pPr indent="0" marL="0">
-              <a:buNone/>
-            </a:pPr>
-            <a:endParaRPr lang="en-US" sz="1000" dirty="0"/>
-          </a:p>
-          <a:p>
-            <a:pPr indent="0" marL="0">
-              <a:buNone/>
-            </a:pPr>
-            <a:r>
-              <a:rPr lang="en-US" sz="1000" dirty="0">
+            <a:endParaRPr lang="en-US" sz="1400" dirty="0"/>
+          </a:p>
+          <a:p>
+            <a:pPr indent="0" marL="0">
+              <a:buNone/>
+            </a:pPr>
+            <a:endParaRPr lang="en-US" sz="1400" dirty="0"/>
+          </a:p>
+          <a:p>
+            <a:pPr indent="0" marL="0">
+              <a:buNone/>
+            </a:pPr>
+            <a:r>
+              <a:rPr lang="en-US" sz="1400" dirty="0">
                 <a:solidFill>
                   <a:srgbClr val="E8D8A8"/>
                 </a:solidFill>
@@ -3538,14 +3538,14 @@
               </a:rPr>
               <a:t>• 結構：數個樂段，每段演奏兩次，使用兩種不同結尾：</a:t>
             </a:r>
-            <a:endParaRPr lang="en-US" sz="1000" dirty="0"/>
-          </a:p>
-          <a:p>
-            <a:pPr indent="0" marL="0">
-              <a:buNone/>
-            </a:pPr>
-            <a:r>
-              <a:rPr lang="en-US" sz="1000" dirty="0">
+            <a:endParaRPr lang="en-US" sz="1400" dirty="0"/>
+          </a:p>
+          <a:p>
+            <a:pPr indent="0" marL="0">
+              <a:buNone/>
+            </a:pPr>
+            <a:r>
+              <a:rPr lang="en-US" sz="1400" dirty="0">
                 <a:solidFill>
                   <a:srgbClr val="E8D8A8"/>
                 </a:solidFill>
@@ -3555,14 +3555,14 @@
               </a:rPr>
               <a:t>  ① Ouvert 開放結尾（半終止）</a:t>
             </a:r>
-            <a:endParaRPr lang="en-US" sz="1000" dirty="0"/>
-          </a:p>
-          <a:p>
-            <a:pPr indent="0" marL="0">
-              <a:buNone/>
-            </a:pPr>
-            <a:r>
-              <a:rPr lang="en-US" sz="1000" dirty="0">
+            <a:endParaRPr lang="en-US" sz="1400" dirty="0"/>
+          </a:p>
+          <a:p>
+            <a:pPr indent="0" marL="0">
+              <a:buNone/>
+            </a:pPr>
+            <a:r>
+              <a:rPr lang="en-US" sz="1400" dirty="0">
                 <a:solidFill>
                   <a:srgbClr val="E8D8A8"/>
                 </a:solidFill>
@@ -3572,14 +3572,14 @@
               </a:rPr>
               <a:t>  ② Clos 封閉結尾（完全終止）</a:t>
             </a:r>
-            <a:endParaRPr lang="en-US" sz="1000" dirty="0"/>
-          </a:p>
-          <a:p>
-            <a:pPr indent="0" marL="0">
-              <a:buNone/>
-            </a:pPr>
-            <a:r>
-              <a:rPr lang="en-US" sz="1000" dirty="0">
+            <a:endParaRPr lang="en-US" sz="1400" dirty="0"/>
+          </a:p>
+          <a:p>
+            <a:pPr indent="0" marL="0">
+              <a:buNone/>
+            </a:pPr>
+            <a:r>
+              <a:rPr lang="en-US" sz="1400" dirty="0">
                 <a:solidFill>
                   <a:srgbClr val="E8D8A8"/>
                 </a:solidFill>
@@ -3589,14 +3589,14 @@
               </a:rPr>
               <a:t>  Each section played twice: open (ouvert) + closed (clos) endings</a:t>
             </a:r>
-            <a:endParaRPr lang="en-US" sz="1000" dirty="0"/>
-          </a:p>
-          <a:p>
-            <a:pPr indent="0" marL="0">
-              <a:buNone/>
-            </a:pPr>
-            <a:r>
-              <a:rPr lang="en-US" sz="1000" dirty="0">
+            <a:endParaRPr lang="en-US" sz="1400" dirty="0"/>
+          </a:p>
+          <a:p>
+            <a:pPr indent="0" marL="0">
+              <a:buNone/>
+            </a:pPr>
+            <a:r>
+              <a:rPr lang="en-US" sz="1400" dirty="0">
                 <a:solidFill>
                   <a:srgbClr val="E8D8A8"/>
                 </a:solidFill>
@@ -3606,14 +3606,14 @@
               </a:rPr>
               <a:t>• 法國 estampie 全部為三拍子 · 義大利 istampita 用二拍或複合拍，段落較長</a:t>
             </a:r>
-            <a:endParaRPr lang="en-US" sz="1000" dirty="0"/>
-          </a:p>
-          <a:p>
-            <a:pPr indent="0" marL="0">
-              <a:buNone/>
-            </a:pPr>
-            <a:r>
-              <a:rPr lang="en-US" sz="1000" dirty="0">
+            <a:endParaRPr lang="en-US" sz="1400" dirty="0"/>
+          </a:p>
+          <a:p>
+            <a:pPr indent="0" marL="0">
+              <a:buNone/>
+            </a:pPr>
+            <a:r>
+              <a:rPr lang="en-US" sz="1400" dirty="0">
                 <a:solidFill>
                   <a:srgbClr val="E8D8A8"/>
                 </a:solidFill>
@@ -3623,7 +3623,7 @@
               </a:rPr>
               <a:t>• 範例：Le manuscrit du roi（國王手稿）中的八首「皇家 estampies」（NAWM 13 為第四首）</a:t>
             </a:r>
-            <a:endParaRPr lang="en-US" sz="1000" dirty="0"/>
+            <a:endParaRPr lang="en-US" sz="1400" dirty="0"/>
           </a:p>
         </p:txBody>
       </p:sp>
@@ -3808,7 +3808,7 @@
                   <a:srgbClr val="000000"/>
                 </a:solidFill>
               </a:rPr>
-              <a:t>👑</a:t>
+              <a:t>■</a:t>
             </a:r>
             <a:endParaRPr lang="en-US" sz="1800" dirty="0"/>
           </a:p>
@@ -3839,7 +3839,7 @@
               <a:buNone/>
             </a:pPr>
             <a:r>
-              <a:rPr lang="en-US" sz="1100" b="1" dirty="0">
+              <a:rPr lang="en-US" sz="1400" b="1" dirty="0">
                 <a:solidFill>
                   <a:srgbClr val="C8A020"/>
                 </a:solidFill>
@@ -3849,7 +3849,7 @@
               </a:rPr>
               <a:t>Guillaume IX</a:t>
             </a:r>
-            <a:endParaRPr lang="en-US" sz="1100" dirty="0"/>
+            <a:endParaRPr lang="en-US" sz="1400" dirty="0"/>
           </a:p>
         </p:txBody>
       </p:sp>
@@ -3871,14 +3871,14 @@
           <a:ln/>
         </p:spPr>
         <p:txBody>
-          <a:bodyPr wrap="square" lIns="0" tIns="0" rIns="0" bIns="0" rtlCol="0" anchor="ctr"/>
-          <a:lstStyle/>
-          <a:p>
-            <a:pPr indent="0" marL="0">
-              <a:buNone/>
-            </a:pPr>
-            <a:r>
-              <a:rPr lang="en-US" sz="850" i="1" dirty="0">
+          <a:bodyPr wrap="square" lIns="0" tIns="0" rIns="0" bIns="0" rtlCol="0" anchor="t"/>
+          <a:lstStyle/>
+          <a:p>
+            <a:pPr indent="0" marL="0">
+              <a:buNone/>
+            </a:pPr>
+            <a:r>
+              <a:rPr lang="en-US" sz="1400" i="1" dirty="0">
                 <a:solidFill>
                   <a:srgbClr val="E8D8A8"/>
                 </a:solidFill>
@@ -3888,7 +3888,7 @@
               </a:rPr>
               <a:t>1071–1126</a:t>
             </a:r>
-            <a:endParaRPr lang="en-US" sz="850" dirty="0"/>
+            <a:endParaRPr lang="en-US" sz="1400" dirty="0"/>
           </a:p>
         </p:txBody>
       </p:sp>
@@ -3930,14 +3930,14 @@
           <a:ln/>
         </p:spPr>
         <p:txBody>
-          <a:bodyPr wrap="square" lIns="0" tIns="0" rIns="0" bIns="0" rtlCol="0" anchor="ctr"/>
-          <a:lstStyle/>
-          <a:p>
-            <a:pPr indent="0" marL="0">
-              <a:buNone/>
-            </a:pPr>
-            <a:r>
-              <a:rPr lang="en-US" sz="850" dirty="0">
+          <a:bodyPr wrap="square" lIns="0" tIns="0" rIns="0" bIns="0" rtlCol="0" anchor="t"/>
+          <a:lstStyle/>
+          <a:p>
+            <a:pPr indent="0" marL="0">
+              <a:buNone/>
+            </a:pPr>
+            <a:r>
+              <a:rPr lang="en-US" sz="1400" dirty="0">
                 <a:solidFill>
                   <a:srgbClr val="FBF5E6"/>
                 </a:solidFill>
@@ -3947,7 +3947,7 @@
               </a:rPr>
               <a:t>亞奎丹公爵、普瓦提埃伯爵；現存最早留名的 troubadour。貴族出身顯示這一藝術深植於上流社會。</a:t>
             </a:r>
-            <a:endParaRPr lang="en-US" sz="850" dirty="0"/>
+            <a:endParaRPr lang="en-US" sz="1400" dirty="0"/>
           </a:p>
         </p:txBody>
       </p:sp>
@@ -4001,7 +4001,7 @@
                   <a:srgbClr val="000000"/>
                 </a:solidFill>
               </a:rPr>
-              <a:t>🎵</a:t>
+              <a:t>■</a:t>
             </a:r>
             <a:endParaRPr lang="en-US" sz="1800" dirty="0"/>
           </a:p>
@@ -4032,7 +4032,7 @@
               <a:buNone/>
             </a:pPr>
             <a:r>
-              <a:rPr lang="en-US" sz="1100" b="1" dirty="0">
+              <a:rPr lang="en-US" sz="1400" b="1" dirty="0">
                 <a:solidFill>
                   <a:srgbClr val="C8A020"/>
                 </a:solidFill>
@@ -4042,7 +4042,7 @@
               </a:rPr>
               <a:t>Bernart de Ventadorn</a:t>
             </a:r>
-            <a:endParaRPr lang="en-US" sz="1100" dirty="0"/>
+            <a:endParaRPr lang="en-US" sz="1400" dirty="0"/>
           </a:p>
         </p:txBody>
       </p:sp>
@@ -4064,14 +4064,14 @@
           <a:ln/>
         </p:spPr>
         <p:txBody>
-          <a:bodyPr wrap="square" lIns="0" tIns="0" rIns="0" bIns="0" rtlCol="0" anchor="ctr"/>
-          <a:lstStyle/>
-          <a:p>
-            <a:pPr indent="0" marL="0">
-              <a:buNone/>
-            </a:pPr>
-            <a:r>
-              <a:rPr lang="en-US" sz="850" i="1" dirty="0">
+          <a:bodyPr wrap="square" lIns="0" tIns="0" rIns="0" bIns="0" rtlCol="0" anchor="t"/>
+          <a:lstStyle/>
+          <a:p>
+            <a:pPr indent="0" marL="0">
+              <a:buNone/>
+            </a:pPr>
+            <a:r>
+              <a:rPr lang="en-US" sz="1400" i="1" dirty="0">
                 <a:solidFill>
                   <a:srgbClr val="E8D8A8"/>
                 </a:solidFill>
@@ -4081,7 +4081,7 @@
               </a:rPr>
               <a:t>?ca. 1130–?ca. 1200</a:t>
             </a:r>
-            <a:endParaRPr lang="en-US" sz="850" dirty="0"/>
+            <a:endParaRPr lang="en-US" sz="1400" dirty="0"/>
           </a:p>
         </p:txBody>
       </p:sp>
@@ -4123,14 +4123,14 @@
           <a:ln/>
         </p:spPr>
         <p:txBody>
-          <a:bodyPr wrap="square" lIns="0" tIns="0" rIns="0" bIns="0" rtlCol="0" anchor="ctr"/>
-          <a:lstStyle/>
-          <a:p>
-            <a:pPr indent="0" marL="0">
-              <a:buNone/>
-            </a:pPr>
-            <a:r>
-              <a:rPr lang="en-US" sz="850" dirty="0">
+          <a:bodyPr wrap="square" lIns="0" tIns="0" rIns="0" bIns="0" rtlCol="0" anchor="t"/>
+          <a:lstStyle/>
+          <a:p>
+            <a:pPr indent="0" marL="0">
+              <a:buNone/>
+            </a:pPr>
+            <a:r>
+              <a:rPr lang="en-US" sz="1400" dirty="0">
                 <a:solidFill>
                   <a:srgbClr val="FBF5E6"/>
                 </a:solidFill>
@@ -4140,7 +4140,7 @@
               </a:rPr>
               <a:t>最具影響力的 troubadour 之一；Ventadorn 城堡麵包師/僕役之子；後為 Eleanor of Aquitaine 服務，把 troubadour 傳統帶入北法，催生 trouvère 運動。代表作《Can vei la lauzeta mover》</a:t>
             </a:r>
-            <a:endParaRPr lang="en-US" sz="850" dirty="0"/>
+            <a:endParaRPr lang="en-US" sz="1400" dirty="0"/>
           </a:p>
         </p:txBody>
       </p:sp>
@@ -4194,7 +4194,7 @@
                   <a:srgbClr val="000000"/>
                 </a:solidFill>
               </a:rPr>
-              <a:t>👸</a:t>
+              <a:t>■</a:t>
             </a:r>
             <a:endParaRPr lang="en-US" sz="1800" dirty="0"/>
           </a:p>
@@ -4225,7 +4225,7 @@
               <a:buNone/>
             </a:pPr>
             <a:r>
-              <a:rPr lang="en-US" sz="1100" b="1" dirty="0">
+              <a:rPr lang="en-US" sz="1400" b="1" dirty="0">
                 <a:solidFill>
                   <a:srgbClr val="C8A020"/>
                 </a:solidFill>
@@ -4235,7 +4235,7 @@
               </a:rPr>
               <a:t>Comtessa de Dia</a:t>
             </a:r>
-            <a:endParaRPr lang="en-US" sz="1100" dirty="0"/>
+            <a:endParaRPr lang="en-US" sz="1400" dirty="0"/>
           </a:p>
         </p:txBody>
       </p:sp>
@@ -4257,14 +4257,14 @@
           <a:ln/>
         </p:spPr>
         <p:txBody>
-          <a:bodyPr wrap="square" lIns="0" tIns="0" rIns="0" bIns="0" rtlCol="0" anchor="ctr"/>
-          <a:lstStyle/>
-          <a:p>
-            <a:pPr indent="0" marL="0">
-              <a:buNone/>
-            </a:pPr>
-            <a:r>
-              <a:rPr lang="en-US" sz="850" i="1" dirty="0">
+          <a:bodyPr wrap="square" lIns="0" tIns="0" rIns="0" bIns="0" rtlCol="0" anchor="t"/>
+          <a:lstStyle/>
+          <a:p>
+            <a:pPr indent="0" marL="0">
+              <a:buNone/>
+            </a:pPr>
+            <a:r>
+              <a:rPr lang="en-US" sz="1400" i="1" dirty="0">
                 <a:solidFill>
                   <a:srgbClr val="E8D8A8"/>
                 </a:solidFill>
@@ -4274,7 +4274,7 @@
               </a:rPr>
               <a:t>fl. late 12th – early 13th c.</a:t>
             </a:r>
-            <a:endParaRPr lang="en-US" sz="850" dirty="0"/>
+            <a:endParaRPr lang="en-US" sz="1400" dirty="0"/>
           </a:p>
         </p:txBody>
       </p:sp>
@@ -4316,14 +4316,14 @@
           <a:ln/>
         </p:spPr>
         <p:txBody>
-          <a:bodyPr wrap="square" lIns="0" tIns="0" rIns="0" bIns="0" rtlCol="0" anchor="ctr"/>
-          <a:lstStyle/>
-          <a:p>
-            <a:pPr indent="0" marL="0">
-              <a:buNone/>
-            </a:pPr>
-            <a:r>
-              <a:rPr lang="en-US" sz="850" dirty="0">
+          <a:bodyPr wrap="square" lIns="0" tIns="0" rIns="0" bIns="0" rtlCol="0" anchor="t"/>
+          <a:lstStyle/>
+          <a:p>
+            <a:pPr indent="0" marL="0">
+              <a:buNone/>
+            </a:pPr>
+            <a:r>
+              <a:rPr lang="en-US" sz="1400" dirty="0">
                 <a:solidFill>
                   <a:srgbClr val="FBF5E6"/>
                 </a:solidFill>
@@ -4333,7 +4333,7 @@
               </a:rPr>
               <a:t>極少數留下音樂作品的 trobairitz（女性遊唱詩人）。《A chantar》是唯一有旋律保存下來的 trobairitz 歌曲（AAB 形式、mode 1）</a:t>
             </a:r>
-            <a:endParaRPr lang="en-US" sz="850" dirty="0"/>
+            <a:endParaRPr lang="en-US" sz="1400" dirty="0"/>
           </a:p>
         </p:txBody>
       </p:sp>
@@ -4387,7 +4387,7 @@
                   <a:srgbClr val="000000"/>
                 </a:solidFill>
               </a:rPr>
-              <a:t>🛡</a:t>
+              <a:t>■</a:t>
             </a:r>
             <a:endParaRPr lang="en-US" sz="1800" dirty="0"/>
           </a:p>
@@ -4418,7 +4418,7 @@
               <a:buNone/>
             </a:pPr>
             <a:r>
-              <a:rPr lang="en-US" sz="1100" b="1" dirty="0">
+              <a:rPr lang="en-US" sz="1400" b="1" dirty="0">
                 <a:solidFill>
                   <a:srgbClr val="C8A020"/>
                 </a:solidFill>
@@ -4428,7 +4428,7 @@
               </a:rPr>
               <a:t>Walther von der Vogelweide</a:t>
             </a:r>
-            <a:endParaRPr lang="en-US" sz="1100" dirty="0"/>
+            <a:endParaRPr lang="en-US" sz="1400" dirty="0"/>
           </a:p>
         </p:txBody>
       </p:sp>
@@ -4450,14 +4450,14 @@
           <a:ln/>
         </p:spPr>
         <p:txBody>
-          <a:bodyPr wrap="square" lIns="0" tIns="0" rIns="0" bIns="0" rtlCol="0" anchor="ctr"/>
-          <a:lstStyle/>
-          <a:p>
-            <a:pPr indent="0" marL="0">
-              <a:buNone/>
-            </a:pPr>
-            <a:r>
-              <a:rPr lang="en-US" sz="850" i="1" dirty="0">
+          <a:bodyPr wrap="square" lIns="0" tIns="0" rIns="0" bIns="0" rtlCol="0" anchor="t"/>
+          <a:lstStyle/>
+          <a:p>
+            <a:pPr indent="0" marL="0">
+              <a:buNone/>
+            </a:pPr>
+            <a:r>
+              <a:rPr lang="en-US" sz="1400" i="1" dirty="0">
                 <a:solidFill>
                   <a:srgbClr val="E8D8A8"/>
                 </a:solidFill>
@@ -4467,7 +4467,7 @@
               </a:rPr>
               <a:t>?ca. 1170–?ca. 1230</a:t>
             </a:r>
-            <a:endParaRPr lang="en-US" sz="850" dirty="0"/>
+            <a:endParaRPr lang="en-US" sz="1400" dirty="0"/>
           </a:p>
         </p:txBody>
       </p:sp>
@@ -4509,14 +4509,14 @@
           <a:ln/>
         </p:spPr>
         <p:txBody>
-          <a:bodyPr wrap="square" lIns="0" tIns="0" rIns="0" bIns="0" rtlCol="0" anchor="ctr"/>
-          <a:lstStyle/>
-          <a:p>
-            <a:pPr indent="0" marL="0">
-              <a:buNone/>
-            </a:pPr>
-            <a:r>
-              <a:rPr lang="en-US" sz="850" dirty="0">
+          <a:bodyPr wrap="square" lIns="0" tIns="0" rIns="0" bIns="0" rtlCol="0" anchor="t"/>
+          <a:lstStyle/>
+          <a:p>
+            <a:pPr indent="0" marL="0">
+              <a:buNone/>
+            </a:pPr>
+            <a:r>
+              <a:rPr lang="en-US" sz="1400" dirty="0">
                 <a:solidFill>
                   <a:srgbClr val="FBF5E6"/>
                 </a:solidFill>
@@ -4526,7 +4526,7 @@
               </a:rPr>
               <a:t>最著名的 Minnesinger；以宮廷詩歌與政治詩聞名；代表作《Palästinalied》（十字軍歌）仍被當代「中世紀搖滾」樂團改編演奏</a:t>
             </a:r>
-            <a:endParaRPr lang="en-US" sz="850" dirty="0"/>
+            <a:endParaRPr lang="en-US" sz="1400" dirty="0"/>
           </a:p>
         </p:txBody>
       </p:sp>
@@ -4580,7 +4580,7 @@
                   <a:srgbClr val="000000"/>
                 </a:solidFill>
               </a:rPr>
-              <a:t>🎭</a:t>
+              <a:t>■</a:t>
             </a:r>
             <a:endParaRPr lang="en-US" sz="1800" dirty="0"/>
           </a:p>
@@ -4611,7 +4611,7 @@
               <a:buNone/>
             </a:pPr>
             <a:r>
-              <a:rPr lang="en-US" sz="1100" b="1" dirty="0">
+              <a:rPr lang="en-US" sz="1400" b="1" dirty="0">
                 <a:solidFill>
                   <a:srgbClr val="C8A020"/>
                 </a:solidFill>
@@ -4621,7 +4621,7 @@
               </a:rPr>
               <a:t>Adam de la Halle</a:t>
             </a:r>
-            <a:endParaRPr lang="en-US" sz="1100" dirty="0"/>
+            <a:endParaRPr lang="en-US" sz="1400" dirty="0"/>
           </a:p>
         </p:txBody>
       </p:sp>
@@ -4643,14 +4643,14 @@
           <a:ln/>
         </p:spPr>
         <p:txBody>
-          <a:bodyPr wrap="square" lIns="0" tIns="0" rIns="0" bIns="0" rtlCol="0" anchor="ctr"/>
-          <a:lstStyle/>
-          <a:p>
-            <a:pPr indent="0" marL="0">
-              <a:buNone/>
-            </a:pPr>
-            <a:r>
-              <a:rPr lang="en-US" sz="850" i="1" dirty="0">
+          <a:bodyPr wrap="square" lIns="0" tIns="0" rIns="0" bIns="0" rtlCol="0" anchor="t"/>
+          <a:lstStyle/>
+          <a:p>
+            <a:pPr indent="0" marL="0">
+              <a:buNone/>
+            </a:pPr>
+            <a:r>
+              <a:rPr lang="en-US" sz="1400" i="1" dirty="0">
                 <a:solidFill>
                   <a:srgbClr val="E8D8A8"/>
                 </a:solidFill>
@@ -4660,7 +4660,7 @@
               </a:rPr>
               <a:t>ca. 1240–?1288</a:t>
             </a:r>
-            <a:endParaRPr lang="en-US" sz="850" dirty="0"/>
+            <a:endParaRPr lang="en-US" sz="1400" dirty="0"/>
           </a:p>
         </p:txBody>
       </p:sp>
@@ -4702,14 +4702,14 @@
           <a:ln/>
         </p:spPr>
         <p:txBody>
-          <a:bodyPr wrap="square" lIns="0" tIns="0" rIns="0" bIns="0" rtlCol="0" anchor="ctr"/>
-          <a:lstStyle/>
-          <a:p>
-            <a:pPr indent="0" marL="0">
-              <a:buNone/>
-            </a:pPr>
-            <a:r>
-              <a:rPr lang="en-US" sz="850" dirty="0">
+          <a:bodyPr wrap="square" lIns="0" tIns="0" rIns="0" bIns="0" rtlCol="0" anchor="t"/>
+          <a:lstStyle/>
+          <a:p>
+            <a:pPr indent="0" marL="0">
+              <a:buNone/>
+            </a:pPr>
+            <a:r>
+              <a:rPr lang="en-US" sz="1400" dirty="0">
                 <a:solidFill>
                   <a:srgbClr val="FBF5E6"/>
                 </a:solidFill>
@@ -4719,7 +4719,7 @@
               </a:rPr>
               <a:t>Arras 的 trouvère；第一位完整作品被集結為手稿的方言詩人；《Jeu de Robin et de Marion》（ca. 1284）是最早的世俗音樂劇之一；《Robins m'aime》為 rondeau 形式</a:t>
             </a:r>
-            <a:endParaRPr lang="en-US" sz="850" dirty="0"/>
+            <a:endParaRPr lang="en-US" sz="1400" dirty="0"/>
           </a:p>
         </p:txBody>
       </p:sp>
@@ -4773,7 +4773,7 @@
                   <a:srgbClr val="000000"/>
                 </a:solidFill>
               </a:rPr>
-              <a:t>📚</a:t>
+              <a:t>■</a:t>
             </a:r>
             <a:endParaRPr lang="en-US" sz="1800" dirty="0"/>
           </a:p>
@@ -4804,7 +4804,7 @@
               <a:buNone/>
             </a:pPr>
             <a:r>
-              <a:rPr lang="en-US" sz="1100" b="1" dirty="0">
+              <a:rPr lang="en-US" sz="1400" b="1" dirty="0">
                 <a:solidFill>
                   <a:srgbClr val="C8A020"/>
                 </a:solidFill>
@@ -4814,7 +4814,7 @@
               </a:rPr>
               <a:t>Alfonso X el Sabio</a:t>
             </a:r>
-            <a:endParaRPr lang="en-US" sz="1100" dirty="0"/>
+            <a:endParaRPr lang="en-US" sz="1400" dirty="0"/>
           </a:p>
         </p:txBody>
       </p:sp>
@@ -4836,14 +4836,14 @@
           <a:ln/>
         </p:spPr>
         <p:txBody>
-          <a:bodyPr wrap="square" lIns="0" tIns="0" rIns="0" bIns="0" rtlCol="0" anchor="ctr"/>
-          <a:lstStyle/>
-          <a:p>
-            <a:pPr indent="0" marL="0">
-              <a:buNone/>
-            </a:pPr>
-            <a:r>
-              <a:rPr lang="en-US" sz="850" i="1" dirty="0">
+          <a:bodyPr wrap="square" lIns="0" tIns="0" rIns="0" bIns="0" rtlCol="0" anchor="t"/>
+          <a:lstStyle/>
+          <a:p>
+            <a:pPr indent="0" marL="0">
+              <a:buNone/>
+            </a:pPr>
+            <a:r>
+              <a:rPr lang="en-US" sz="1400" i="1" dirty="0">
                 <a:solidFill>
                   <a:srgbClr val="E8D8A8"/>
                 </a:solidFill>
@@ -4853,7 +4853,7 @@
               </a:rPr>
               <a:t>King of Castile 1252–1284</a:t>
             </a:r>
-            <a:endParaRPr lang="en-US" sz="850" dirty="0"/>
+            <a:endParaRPr lang="en-US" sz="1400" dirty="0"/>
           </a:p>
         </p:txBody>
       </p:sp>
@@ -4895,14 +4895,14 @@
           <a:ln/>
         </p:spPr>
         <p:txBody>
-          <a:bodyPr wrap="square" lIns="0" tIns="0" rIns="0" bIns="0" rtlCol="0" anchor="ctr"/>
-          <a:lstStyle/>
-          <a:p>
-            <a:pPr indent="0" marL="0">
-              <a:buNone/>
-            </a:pPr>
-            <a:r>
-              <a:rPr lang="en-US" sz="850" dirty="0">
+          <a:bodyPr wrap="square" lIns="0" tIns="0" rIns="0" bIns="0" rtlCol="0" anchor="t"/>
+          <a:lstStyle/>
+          <a:p>
+            <a:pPr indent="0" marL="0">
+              <a:buNone/>
+            </a:pPr>
+            <a:r>
+              <a:rPr lang="en-US" sz="1400" dirty="0">
                 <a:solidFill>
                   <a:srgbClr val="FBF5E6"/>
                 </a:solidFill>
@@ -4912,7 +4912,7 @@
               </a:rPr>
               <a:t>卡斯提爾與萊昂國王「智者阿方索」；監督編纂《Cantigas de Santa María》——400+ 首讚美聖母的歌，收錄於四部華麗的插圖手稿中</a:t>
             </a:r>
-            <a:endParaRPr lang="en-US" sz="850" dirty="0"/>
+            <a:endParaRPr lang="en-US" sz="1400" dirty="0"/>
           </a:p>
         </p:txBody>
       </p:sp>
@@ -5085,14 +5085,14 @@
           <a:ln/>
         </p:spPr>
         <p:txBody>
-          <a:bodyPr wrap="square" lIns="0" tIns="0" rIns="0" bIns="0" rtlCol="0" anchor="ctr"/>
+          <a:bodyPr wrap="square" lIns="0" tIns="0" rIns="0" bIns="0" rtlCol="0" anchor="t"/>
           <a:lstStyle/>
           <a:p>
             <a:pPr algn="r" indent="0" marL="0">
               <a:buNone/>
             </a:pPr>
             <a:r>
-              <a:rPr lang="en-US" sz="850" dirty="0">
+              <a:rPr lang="en-US" sz="1400" dirty="0">
                 <a:solidFill>
                   <a:srgbClr val="E8D8A8"/>
                 </a:solidFill>
@@ -5102,7 +5102,7 @@
               </a:rPr>
               <a:t>8th c.</a:t>
             </a:r>
-            <a:endParaRPr lang="en-US" sz="850" dirty="0"/>
+            <a:endParaRPr lang="en-US" sz="1400" dirty="0"/>
           </a:p>
         </p:txBody>
       </p:sp>
@@ -5124,14 +5124,14 @@
           <a:ln/>
         </p:spPr>
         <p:txBody>
-          <a:bodyPr wrap="square" lIns="0" tIns="0" rIns="0" bIns="0" rtlCol="0" anchor="ctr"/>
-          <a:lstStyle/>
-          <a:p>
-            <a:pPr indent="0" marL="0">
-              <a:buNone/>
-            </a:pPr>
-            <a:r>
-              <a:rPr lang="en-US" sz="850" dirty="0">
+          <a:bodyPr wrap="square" lIns="0" tIns="0" rIns="0" bIns="0" rtlCol="0" anchor="t"/>
+          <a:lstStyle/>
+          <a:p>
+            <a:pPr indent="0" marL="0">
+              <a:buNone/>
+            </a:pPr>
+            <a:r>
+              <a:rPr lang="en-US" sz="1400" dirty="0">
                 <a:solidFill>
                   <a:srgbClr val="FBF5E6"/>
                 </a:solidFill>
@@ -5141,7 +5141,7 @@
               </a:rPr>
               <a:t>Beowulf（古英文史詩）· Beowulf (Old English epic)</a:t>
             </a:r>
-            <a:endParaRPr lang="en-US" sz="850" dirty="0"/>
+            <a:endParaRPr lang="en-US" sz="1400" dirty="0"/>
           </a:p>
         </p:txBody>
       </p:sp>
@@ -5183,14 +5183,14 @@
           <a:ln/>
         </p:spPr>
         <p:txBody>
-          <a:bodyPr wrap="square" lIns="0" tIns="0" rIns="0" bIns="0" rtlCol="0" anchor="ctr"/>
+          <a:bodyPr wrap="square" lIns="0" tIns="0" rIns="0" bIns="0" rtlCol="0" anchor="t"/>
           <a:lstStyle/>
           <a:p>
             <a:pPr algn="r" indent="0" marL="0">
               <a:buNone/>
             </a:pPr>
             <a:r>
-              <a:rPr lang="en-US" sz="850" dirty="0">
+              <a:rPr lang="en-US" sz="1400" dirty="0">
                 <a:solidFill>
                   <a:srgbClr val="E8D8A8"/>
                 </a:solidFill>
@@ -5200,7 +5200,7 @@
               </a:rPr>
               <a:t>800 CE</a:t>
             </a:r>
-            <a:endParaRPr lang="en-US" sz="850" dirty="0"/>
+            <a:endParaRPr lang="en-US" sz="1400" dirty="0"/>
           </a:p>
         </p:txBody>
       </p:sp>
@@ -5222,14 +5222,14 @@
           <a:ln/>
         </p:spPr>
         <p:txBody>
-          <a:bodyPr wrap="square" lIns="0" tIns="0" rIns="0" bIns="0" rtlCol="0" anchor="ctr"/>
-          <a:lstStyle/>
-          <a:p>
-            <a:pPr indent="0" marL="0">
-              <a:buNone/>
-            </a:pPr>
-            <a:r>
-              <a:rPr lang="en-US" sz="850" dirty="0">
+          <a:bodyPr wrap="square" lIns="0" tIns="0" rIns="0" bIns="0" rtlCol="0" anchor="t"/>
+          <a:lstStyle/>
+          <a:p>
+            <a:pPr indent="0" marL="0">
+              <a:buNone/>
+            </a:pPr>
+            <a:r>
+              <a:rPr lang="en-US" sz="1400" dirty="0">
                 <a:solidFill>
                   <a:srgbClr val="FBF5E6"/>
                 </a:solidFill>
@@ -5239,7 +5239,7 @@
               </a:rPr>
               <a:t>查理曼加冕為羅馬皇帝 · Charlemagne crowned emperor in Rome</a:t>
             </a:r>
-            <a:endParaRPr lang="en-US" sz="850" dirty="0"/>
+            <a:endParaRPr lang="en-US" sz="1400" dirty="0"/>
           </a:p>
         </p:txBody>
       </p:sp>
@@ -5281,14 +5281,14 @@
           <a:ln/>
         </p:spPr>
         <p:txBody>
-          <a:bodyPr wrap="square" lIns="0" tIns="0" rIns="0" bIns="0" rtlCol="0" anchor="ctr"/>
+          <a:bodyPr wrap="square" lIns="0" tIns="0" rIns="0" bIns="0" rtlCol="0" anchor="t"/>
           <a:lstStyle/>
           <a:p>
             <a:pPr algn="r" indent="0" marL="0">
               <a:buNone/>
             </a:pPr>
             <a:r>
-              <a:rPr lang="en-US" sz="850" dirty="0">
+              <a:rPr lang="en-US" sz="1400" dirty="0">
                 <a:solidFill>
                   <a:srgbClr val="E8D8A8"/>
                 </a:solidFill>
@@ -5298,7 +5298,7 @@
               </a:rPr>
               <a:t>834 CE</a:t>
             </a:r>
-            <a:endParaRPr lang="en-US" sz="850" dirty="0"/>
+            <a:endParaRPr lang="en-US" sz="1400" dirty="0"/>
           </a:p>
         </p:txBody>
       </p:sp>
@@ -5320,14 +5320,14 @@
           <a:ln/>
         </p:spPr>
         <p:txBody>
-          <a:bodyPr wrap="square" lIns="0" tIns="0" rIns="0" bIns="0" rtlCol="0" anchor="ctr"/>
-          <a:lstStyle/>
-          <a:p>
-            <a:pPr indent="0" marL="0">
-              <a:buNone/>
-            </a:pPr>
-            <a:r>
-              <a:rPr lang="en-US" sz="850" dirty="0">
+          <a:bodyPr wrap="square" lIns="0" tIns="0" rIns="0" bIns="0" rtlCol="0" anchor="t"/>
+          <a:lstStyle/>
+          <a:p>
+            <a:pPr indent="0" marL="0">
+              <a:buNone/>
+            </a:pPr>
+            <a:r>
+              <a:rPr lang="en-US" sz="1400" dirty="0">
                 <a:solidFill>
                   <a:srgbClr val="FBF5E6"/>
                 </a:solidFill>
@@ -5337,7 +5337,7 @@
               </a:rPr>
               <a:t>路易一世逝世，查理曼帝國分裂 · Louis the Pious dies, empire divided</a:t>
             </a:r>
-            <a:endParaRPr lang="en-US" sz="850" dirty="0"/>
+            <a:endParaRPr lang="en-US" sz="1400" dirty="0"/>
           </a:p>
         </p:txBody>
       </p:sp>
@@ -5379,14 +5379,14 @@
           <a:ln/>
         </p:spPr>
         <p:txBody>
-          <a:bodyPr wrap="square" lIns="0" tIns="0" rIns="0" bIns="0" rtlCol="0" anchor="ctr"/>
+          <a:bodyPr wrap="square" lIns="0" tIns="0" rIns="0" bIns="0" rtlCol="0" anchor="t"/>
           <a:lstStyle/>
           <a:p>
             <a:pPr algn="r" indent="0" marL="0">
               <a:buNone/>
             </a:pPr>
             <a:r>
-              <a:rPr lang="en-US" sz="850" dirty="0">
+              <a:rPr lang="en-US" sz="1400" dirty="0">
                 <a:solidFill>
                   <a:srgbClr val="E8D8A8"/>
                 </a:solidFill>
@@ -5396,7 +5396,7 @@
               </a:rPr>
               <a:t>1000–1300</a:t>
             </a:r>
-            <a:endParaRPr lang="en-US" sz="850" dirty="0"/>
+            <a:endParaRPr lang="en-US" sz="1400" dirty="0"/>
           </a:p>
         </p:txBody>
       </p:sp>
@@ -5418,14 +5418,14 @@
           <a:ln/>
         </p:spPr>
         <p:txBody>
-          <a:bodyPr wrap="square" lIns="0" tIns="0" rIns="0" bIns="0" rtlCol="0" anchor="ctr"/>
-          <a:lstStyle/>
-          <a:p>
-            <a:pPr indent="0" marL="0">
-              <a:buNone/>
-            </a:pPr>
-            <a:r>
-              <a:rPr lang="en-US" sz="850" dirty="0">
+          <a:bodyPr wrap="square" lIns="0" tIns="0" rIns="0" bIns="0" rtlCol="0" anchor="t"/>
+          <a:lstStyle/>
+          <a:p>
+            <a:pPr indent="0" marL="0">
+              <a:buNone/>
+            </a:pPr>
+            <a:r>
+              <a:rPr lang="en-US" sz="1400" dirty="0">
                 <a:solidFill>
                   <a:srgbClr val="FBF5E6"/>
                 </a:solidFill>
@@ -5435,7 +5435,7 @@
               </a:rPr>
               <a:t>歐洲人口成長三倍 · European population triples</a:t>
             </a:r>
-            <a:endParaRPr lang="en-US" sz="850" dirty="0"/>
+            <a:endParaRPr lang="en-US" sz="1400" dirty="0"/>
           </a:p>
         </p:txBody>
       </p:sp>
@@ -5477,14 +5477,14 @@
           <a:ln/>
         </p:spPr>
         <p:txBody>
-          <a:bodyPr wrap="square" lIns="0" tIns="0" rIns="0" bIns="0" rtlCol="0" anchor="ctr"/>
+          <a:bodyPr wrap="square" lIns="0" tIns="0" rIns="0" bIns="0" rtlCol="0" anchor="t"/>
           <a:lstStyle/>
           <a:p>
             <a:pPr algn="r" indent="0" marL="0">
               <a:buNone/>
             </a:pPr>
             <a:r>
-              <a:rPr lang="en-US" sz="850" dirty="0">
+              <a:rPr lang="en-US" sz="1400" dirty="0">
                 <a:solidFill>
                   <a:srgbClr val="E8D8A8"/>
                 </a:solidFill>
@@ -5494,7 +5494,7 @@
               </a:rPr>
               <a:t>ca. 1050</a:t>
             </a:r>
-            <a:endParaRPr lang="en-US" sz="850" dirty="0"/>
+            <a:endParaRPr lang="en-US" sz="1400" dirty="0"/>
           </a:p>
         </p:txBody>
       </p:sp>
@@ -5516,14 +5516,14 @@
           <a:ln/>
         </p:spPr>
         <p:txBody>
-          <a:bodyPr wrap="square" lIns="0" tIns="0" rIns="0" bIns="0" rtlCol="0" anchor="ctr"/>
-          <a:lstStyle/>
-          <a:p>
-            <a:pPr indent="0" marL="0">
-              <a:buNone/>
-            </a:pPr>
-            <a:r>
-              <a:rPr lang="en-US" sz="850" dirty="0">
+          <a:bodyPr wrap="square" lIns="0" tIns="0" rIns="0" bIns="0" rtlCol="0" anchor="t"/>
+          <a:lstStyle/>
+          <a:p>
+            <a:pPr indent="0" marL="0">
+              <a:buNone/>
+            </a:pPr>
+            <a:r>
+              <a:rPr lang="en-US" sz="1400" dirty="0">
                 <a:solidFill>
                   <a:srgbClr val="FBF5E6"/>
                 </a:solidFill>
@@ -5533,7 +5533,7 @@
               </a:rPr>
               <a:t>風車與水車普及 · Windmills and water mills spread</a:t>
             </a:r>
-            <a:endParaRPr lang="en-US" sz="850" dirty="0"/>
+            <a:endParaRPr lang="en-US" sz="1400" dirty="0"/>
           </a:p>
         </p:txBody>
       </p:sp>
@@ -5575,14 +5575,14 @@
           <a:ln/>
         </p:spPr>
         <p:txBody>
-          <a:bodyPr wrap="square" lIns="0" tIns="0" rIns="0" bIns="0" rtlCol="0" anchor="ctr"/>
+          <a:bodyPr wrap="square" lIns="0" tIns="0" rIns="0" bIns="0" rtlCol="0" anchor="t"/>
           <a:lstStyle/>
           <a:p>
             <a:pPr algn="r" indent="0" marL="0">
               <a:buNone/>
             </a:pPr>
             <a:r>
-              <a:rPr lang="en-US" sz="850" dirty="0">
+              <a:rPr lang="en-US" sz="1400" dirty="0">
                 <a:solidFill>
                   <a:srgbClr val="E8D8A8"/>
                 </a:solidFill>
@@ -5592,7 +5592,7 @@
               </a:rPr>
               <a:t>1066 CE</a:t>
             </a:r>
-            <a:endParaRPr lang="en-US" sz="850" dirty="0"/>
+            <a:endParaRPr lang="en-US" sz="1400" dirty="0"/>
           </a:p>
         </p:txBody>
       </p:sp>
@@ -5614,14 +5614,14 @@
           <a:ln/>
         </p:spPr>
         <p:txBody>
-          <a:bodyPr wrap="square" lIns="0" tIns="0" rIns="0" bIns="0" rtlCol="0" anchor="ctr"/>
-          <a:lstStyle/>
-          <a:p>
-            <a:pPr indent="0" marL="0">
-              <a:buNone/>
-            </a:pPr>
-            <a:r>
-              <a:rPr lang="en-US" sz="850" dirty="0">
+          <a:bodyPr wrap="square" lIns="0" tIns="0" rIns="0" bIns="0" rtlCol="0" anchor="t"/>
+          <a:lstStyle/>
+          <a:p>
+            <a:pPr indent="0" marL="0">
+              <a:buNone/>
+            </a:pPr>
+            <a:r>
+              <a:rPr lang="en-US" sz="1400" dirty="0">
                 <a:solidFill>
                   <a:srgbClr val="FBF5E6"/>
                 </a:solidFill>
@@ -5631,7 +5631,7 @@
               </a:rPr>
               <a:t>諾曼征服英格蘭 · Normans conquer England</a:t>
             </a:r>
-            <a:endParaRPr lang="en-US" sz="850" dirty="0"/>
+            <a:endParaRPr lang="en-US" sz="1400" dirty="0"/>
           </a:p>
         </p:txBody>
       </p:sp>
@@ -5673,14 +5673,14 @@
           <a:ln/>
         </p:spPr>
         <p:txBody>
-          <a:bodyPr wrap="square" lIns="0" tIns="0" rIns="0" bIns="0" rtlCol="0" anchor="ctr"/>
+          <a:bodyPr wrap="square" lIns="0" tIns="0" rIns="0" bIns="0" rtlCol="0" anchor="t"/>
           <a:lstStyle/>
           <a:p>
             <a:pPr algn="r" indent="0" marL="0">
               <a:buNone/>
             </a:pPr>
             <a:r>
-              <a:rPr lang="en-US" sz="850" dirty="0">
+              <a:rPr lang="en-US" sz="1400" dirty="0">
                 <a:solidFill>
                   <a:srgbClr val="E8D8A8"/>
                 </a:solidFill>
@@ -5690,7 +5690,7 @@
               </a:rPr>
               <a:t>1071–1126</a:t>
             </a:r>
-            <a:endParaRPr lang="en-US" sz="850" dirty="0"/>
+            <a:endParaRPr lang="en-US" sz="1400" dirty="0"/>
           </a:p>
         </p:txBody>
       </p:sp>
@@ -5712,14 +5712,14 @@
           <a:ln/>
         </p:spPr>
         <p:txBody>
-          <a:bodyPr wrap="square" lIns="0" tIns="0" rIns="0" bIns="0" rtlCol="0" anchor="ctr"/>
-          <a:lstStyle/>
-          <a:p>
-            <a:pPr indent="0" marL="0">
-              <a:buNone/>
-            </a:pPr>
-            <a:r>
-              <a:rPr lang="en-US" sz="850" dirty="0">
+          <a:bodyPr wrap="square" lIns="0" tIns="0" rIns="0" bIns="0" rtlCol="0" anchor="t"/>
+          <a:lstStyle/>
+          <a:p>
+            <a:pPr indent="0" marL="0">
+              <a:buNone/>
+            </a:pPr>
+            <a:r>
+              <a:rPr lang="en-US" sz="1400" dirty="0">
                 <a:solidFill>
                   <a:srgbClr val="FBF5E6"/>
                 </a:solidFill>
@@ -5729,7 +5729,7 @@
               </a:rPr>
               <a:t>Guillaume IX（最早留名 troubadour）</a:t>
             </a:r>
-            <a:endParaRPr lang="en-US" sz="850" dirty="0"/>
+            <a:endParaRPr lang="en-US" sz="1400" dirty="0"/>
           </a:p>
         </p:txBody>
       </p:sp>
@@ -5771,14 +5771,14 @@
           <a:ln/>
         </p:spPr>
         <p:txBody>
-          <a:bodyPr wrap="square" lIns="0" tIns="0" rIns="0" bIns="0" rtlCol="0" anchor="ctr"/>
+          <a:bodyPr wrap="square" lIns="0" tIns="0" rIns="0" bIns="0" rtlCol="0" anchor="t"/>
           <a:lstStyle/>
           <a:p>
             <a:pPr algn="r" indent="0" marL="0">
               <a:buNone/>
             </a:pPr>
             <a:r>
-              <a:rPr lang="en-US" sz="850" dirty="0">
+              <a:rPr lang="en-US" sz="1400" dirty="0">
                 <a:solidFill>
                   <a:srgbClr val="E8D8A8"/>
                 </a:solidFill>
@@ -5788,7 +5788,7 @@
               </a:rPr>
               <a:t>1095–99</a:t>
             </a:r>
-            <a:endParaRPr lang="en-US" sz="850" dirty="0"/>
+            <a:endParaRPr lang="en-US" sz="1400" dirty="0"/>
           </a:p>
         </p:txBody>
       </p:sp>
@@ -5810,14 +5810,14 @@
           <a:ln/>
         </p:spPr>
         <p:txBody>
-          <a:bodyPr wrap="square" lIns="0" tIns="0" rIns="0" bIns="0" rtlCol="0" anchor="ctr"/>
-          <a:lstStyle/>
-          <a:p>
-            <a:pPr indent="0" marL="0">
-              <a:buNone/>
-            </a:pPr>
-            <a:r>
-              <a:rPr lang="en-US" sz="850" dirty="0">
+          <a:bodyPr wrap="square" lIns="0" tIns="0" rIns="0" bIns="0" rtlCol="0" anchor="t"/>
+          <a:lstStyle/>
+          <a:p>
+            <a:pPr indent="0" marL="0">
+              <a:buNone/>
+            </a:pPr>
+            <a:r>
+              <a:rPr lang="en-US" sz="1400" dirty="0">
                 <a:solidFill>
                   <a:srgbClr val="FBF5E6"/>
                 </a:solidFill>
@@ -5827,7 +5827,7 @@
               </a:rPr>
               <a:t>第一次十字軍東征 · First Crusade</a:t>
             </a:r>
-            <a:endParaRPr lang="en-US" sz="850" dirty="0"/>
+            <a:endParaRPr lang="en-US" sz="1400" dirty="0"/>
           </a:p>
         </p:txBody>
       </p:sp>
@@ -5869,14 +5869,14 @@
           <a:ln/>
         </p:spPr>
         <p:txBody>
-          <a:bodyPr wrap="square" lIns="0" tIns="0" rIns="0" bIns="0" rtlCol="0" anchor="ctr"/>
+          <a:bodyPr wrap="square" lIns="0" tIns="0" rIns="0" bIns="0" rtlCol="0" anchor="t"/>
           <a:lstStyle/>
           <a:p>
             <a:pPr algn="r" indent="0" marL="0">
               <a:buNone/>
             </a:pPr>
             <a:r>
-              <a:rPr lang="en-US" sz="850" dirty="0">
+              <a:rPr lang="en-US" sz="1400" dirty="0">
                 <a:solidFill>
                   <a:srgbClr val="E8D8A8"/>
                 </a:solidFill>
@@ -5886,7 +5886,7 @@
               </a:rPr>
               <a:t>ca. 1100</a:t>
             </a:r>
-            <a:endParaRPr lang="en-US" sz="850" dirty="0"/>
+            <a:endParaRPr lang="en-US" sz="1400" dirty="0"/>
           </a:p>
         </p:txBody>
       </p:sp>
@@ -5908,14 +5908,14 @@
           <a:ln/>
         </p:spPr>
         <p:txBody>
-          <a:bodyPr wrap="square" lIns="0" tIns="0" rIns="0" bIns="0" rtlCol="0" anchor="ctr"/>
-          <a:lstStyle/>
-          <a:p>
-            <a:pPr indent="0" marL="0">
-              <a:buNone/>
-            </a:pPr>
-            <a:r>
-              <a:rPr lang="en-US" sz="850" dirty="0">
+          <a:bodyPr wrap="square" lIns="0" tIns="0" rIns="0" bIns="0" rtlCol="0" anchor="t"/>
+          <a:lstStyle/>
+          <a:p>
+            <a:pPr indent="0" marL="0">
+              <a:buNone/>
+            </a:pPr>
+            <a:r>
+              <a:rPr lang="en-US" sz="1400" dirty="0">
                 <a:solidFill>
                   <a:srgbClr val="FBF5E6"/>
                 </a:solidFill>
@@ -5925,7 +5925,7 @@
               </a:rPr>
               <a:t>《羅蘭之歌》· Song of Roland</a:t>
             </a:r>
-            <a:endParaRPr lang="en-US" sz="850" dirty="0"/>
+            <a:endParaRPr lang="en-US" sz="1400" dirty="0"/>
           </a:p>
         </p:txBody>
       </p:sp>
@@ -5967,14 +5967,14 @@
           <a:ln/>
         </p:spPr>
         <p:txBody>
-          <a:bodyPr wrap="square" lIns="0" tIns="0" rIns="0" bIns="0" rtlCol="0" anchor="ctr"/>
+          <a:bodyPr wrap="square" lIns="0" tIns="0" rIns="0" bIns="0" rtlCol="0" anchor="t"/>
           <a:lstStyle/>
           <a:p>
             <a:pPr algn="r" indent="0" marL="0">
               <a:buNone/>
             </a:pPr>
             <a:r>
-              <a:rPr lang="en-US" sz="850" dirty="0">
+              <a:rPr lang="en-US" sz="1400" dirty="0">
                 <a:solidFill>
                   <a:srgbClr val="E8D8A8"/>
                 </a:solidFill>
@@ -5984,7 +5984,7 @@
               </a:rPr>
               <a:t>12th c.</a:t>
             </a:r>
-            <a:endParaRPr lang="en-US" sz="850" dirty="0"/>
+            <a:endParaRPr lang="en-US" sz="1400" dirty="0"/>
           </a:p>
         </p:txBody>
       </p:sp>
@@ -6006,14 +6006,14 @@
           <a:ln/>
         </p:spPr>
         <p:txBody>
-          <a:bodyPr wrap="square" lIns="0" tIns="0" rIns="0" bIns="0" rtlCol="0" anchor="ctr"/>
-          <a:lstStyle/>
-          <a:p>
-            <a:pPr indent="0" marL="0">
-              <a:buNone/>
-            </a:pPr>
-            <a:r>
-              <a:rPr lang="en-US" sz="850" dirty="0">
+          <a:bodyPr wrap="square" lIns="0" tIns="0" rIns="0" bIns="0" rtlCol="0" anchor="t"/>
+          <a:lstStyle/>
+          <a:p>
+            <a:pPr indent="0" marL="0">
+              <a:buNone/>
+            </a:pPr>
+            <a:r>
+              <a:rPr lang="en-US" sz="1400" dirty="0">
                 <a:solidFill>
                   <a:srgbClr val="FBF5E6"/>
                 </a:solidFill>
@@ -6023,7 +6023,7 @@
               </a:rPr>
               <a:t>聖母崇拜興盛；波隆那、巴黎、牛津大學成立</a:t>
             </a:r>
-            <a:endParaRPr lang="en-US" sz="850" dirty="0"/>
+            <a:endParaRPr lang="en-US" sz="1400" dirty="0"/>
           </a:p>
         </p:txBody>
       </p:sp>
@@ -6065,14 +6065,14 @@
           <a:ln/>
         </p:spPr>
         <p:txBody>
-          <a:bodyPr wrap="square" lIns="0" tIns="0" rIns="0" bIns="0" rtlCol="0" anchor="ctr"/>
+          <a:bodyPr wrap="square" lIns="0" tIns="0" rIns="0" bIns="0" rtlCol="0" anchor="t"/>
           <a:lstStyle/>
           <a:p>
             <a:pPr algn="r" indent="0" marL="0">
               <a:buNone/>
             </a:pPr>
             <a:r>
-              <a:rPr lang="en-US" sz="850" dirty="0">
+              <a:rPr lang="en-US" sz="1400" dirty="0">
                 <a:solidFill>
                   <a:srgbClr val="E8D8A8"/>
                 </a:solidFill>
@@ -6082,7 +6082,7 @@
               </a:rPr>
               <a:t>ca. 1170s</a:t>
             </a:r>
-            <a:endParaRPr lang="en-US" sz="850" dirty="0"/>
+            <a:endParaRPr lang="en-US" sz="1400" dirty="0"/>
           </a:p>
         </p:txBody>
       </p:sp>
@@ -6104,14 +6104,14 @@
           <a:ln/>
         </p:spPr>
         <p:txBody>
-          <a:bodyPr wrap="square" lIns="0" tIns="0" rIns="0" bIns="0" rtlCol="0" anchor="ctr"/>
-          <a:lstStyle/>
-          <a:p>
-            <a:pPr indent="0" marL="0">
-              <a:buNone/>
-            </a:pPr>
-            <a:r>
-              <a:rPr lang="en-US" sz="850" dirty="0">
+          <a:bodyPr wrap="square" lIns="0" tIns="0" rIns="0" bIns="0" rtlCol="0" anchor="t"/>
+          <a:lstStyle/>
+          <a:p>
+            <a:pPr indent="0" marL="0">
+              <a:buNone/>
+            </a:pPr>
+            <a:r>
+              <a:rPr lang="en-US" sz="1400" dirty="0">
                 <a:solidFill>
                   <a:srgbClr val="FBF5E6"/>
                 </a:solidFill>
@@ -6121,7 +6121,7 @@
               </a:rPr>
               <a:t>Bernart de Ventadorn, Can vei la lauzeta mover</a:t>
             </a:r>
-            <a:endParaRPr lang="en-US" sz="850" dirty="0"/>
+            <a:endParaRPr lang="en-US" sz="1400" dirty="0"/>
           </a:p>
         </p:txBody>
       </p:sp>
@@ -6163,14 +6163,14 @@
           <a:ln/>
         </p:spPr>
         <p:txBody>
-          <a:bodyPr wrap="square" lIns="0" tIns="0" rIns="0" bIns="0" rtlCol="0" anchor="ctr"/>
+          <a:bodyPr wrap="square" lIns="0" tIns="0" rIns="0" bIns="0" rtlCol="0" anchor="t"/>
           <a:lstStyle/>
           <a:p>
             <a:pPr algn="r" indent="0" marL="0">
               <a:buNone/>
             </a:pPr>
             <a:r>
-              <a:rPr lang="en-US" sz="850" dirty="0">
+              <a:rPr lang="en-US" sz="1400" dirty="0">
                 <a:solidFill>
                   <a:srgbClr val="E8D8A8"/>
                 </a:solidFill>
@@ -6180,7 +6180,7 @@
               </a:rPr>
               <a:t>ca. 1200</a:t>
             </a:r>
-            <a:endParaRPr lang="en-US" sz="850" dirty="0"/>
+            <a:endParaRPr lang="en-US" sz="1400" dirty="0"/>
           </a:p>
         </p:txBody>
       </p:sp>
@@ -6202,14 +6202,14 @@
           <a:ln/>
         </p:spPr>
         <p:txBody>
-          <a:bodyPr wrap="square" lIns="0" tIns="0" rIns="0" bIns="0" rtlCol="0" anchor="ctr"/>
-          <a:lstStyle/>
-          <a:p>
-            <a:pPr indent="0" marL="0">
-              <a:buNone/>
-            </a:pPr>
-            <a:r>
-              <a:rPr lang="en-US" sz="850" dirty="0">
+          <a:bodyPr wrap="square" lIns="0" tIns="0" rIns="0" bIns="0" rtlCol="0" anchor="t"/>
+          <a:lstStyle/>
+          <a:p>
+            <a:pPr indent="0" marL="0">
+              <a:buNone/>
+            </a:pPr>
+            <a:r>
+              <a:rPr lang="en-US" sz="1400" dirty="0">
                 <a:solidFill>
                   <a:srgbClr val="FBF5E6"/>
                 </a:solidFill>
@@ -6219,7 +6219,7 @@
               </a:rPr>
               <a:t>Comtessa de Dia, A chantar</a:t>
             </a:r>
-            <a:endParaRPr lang="en-US" sz="850" dirty="0"/>
+            <a:endParaRPr lang="en-US" sz="1400" dirty="0"/>
           </a:p>
         </p:txBody>
       </p:sp>
@@ -6261,14 +6261,14 @@
           <a:ln/>
         </p:spPr>
         <p:txBody>
-          <a:bodyPr wrap="square" lIns="0" tIns="0" rIns="0" bIns="0" rtlCol="0" anchor="ctr"/>
+          <a:bodyPr wrap="square" lIns="0" tIns="0" rIns="0" bIns="0" rtlCol="0" anchor="t"/>
           <a:lstStyle/>
           <a:p>
             <a:pPr algn="r" indent="0" marL="0">
               <a:buNone/>
             </a:pPr>
             <a:r>
-              <a:rPr lang="en-US" sz="850" dirty="0">
+              <a:rPr lang="en-US" sz="1400" dirty="0">
                 <a:solidFill>
                   <a:srgbClr val="E8D8A8"/>
                 </a:solidFill>
@@ -6278,7 +6278,7 @@
               </a:rPr>
               <a:t>1208 CE</a:t>
             </a:r>
-            <a:endParaRPr lang="en-US" sz="850" dirty="0"/>
+            <a:endParaRPr lang="en-US" sz="1400" dirty="0"/>
           </a:p>
         </p:txBody>
       </p:sp>
@@ -6300,14 +6300,14 @@
           <a:ln/>
         </p:spPr>
         <p:txBody>
-          <a:bodyPr wrap="square" lIns="0" tIns="0" rIns="0" bIns="0" rtlCol="0" anchor="ctr"/>
-          <a:lstStyle/>
-          <a:p>
-            <a:pPr indent="0" marL="0">
-              <a:buNone/>
-            </a:pPr>
-            <a:r>
-              <a:rPr lang="en-US" sz="850" dirty="0">
+          <a:bodyPr wrap="square" lIns="0" tIns="0" rIns="0" bIns="0" rtlCol="0" anchor="t"/>
+          <a:lstStyle/>
+          <a:p>
+            <a:pPr indent="0" marL="0">
+              <a:buNone/>
+            </a:pPr>
+            <a:r>
+              <a:rPr lang="en-US" sz="1400" dirty="0">
                 <a:solidFill>
                   <a:srgbClr val="FBF5E6"/>
                 </a:solidFill>
@@ -6317,7 +6317,7 @@
               </a:rPr>
               <a:t>教皇發動反 Albigensian 十字軍 · Crusade against Albigensians</a:t>
             </a:r>
-            <a:endParaRPr lang="en-US" sz="850" dirty="0"/>
+            <a:endParaRPr lang="en-US" sz="1400" dirty="0"/>
           </a:p>
         </p:txBody>
       </p:sp>
@@ -6359,14 +6359,14 @@
           <a:ln/>
         </p:spPr>
         <p:txBody>
-          <a:bodyPr wrap="square" lIns="0" tIns="0" rIns="0" bIns="0" rtlCol="0" anchor="ctr"/>
+          <a:bodyPr wrap="square" lIns="0" tIns="0" rIns="0" bIns="0" rtlCol="0" anchor="t"/>
           <a:lstStyle/>
           <a:p>
             <a:pPr algn="r" indent="0" marL="0">
               <a:buNone/>
             </a:pPr>
             <a:r>
-              <a:rPr lang="en-US" sz="850" dirty="0">
+              <a:rPr lang="en-US" sz="1400" dirty="0">
                 <a:solidFill>
                   <a:srgbClr val="E8D8A8"/>
                 </a:solidFill>
@@ -6376,7 +6376,7 @@
               </a:rPr>
               <a:t>1215 CE</a:t>
             </a:r>
-            <a:endParaRPr lang="en-US" sz="850" dirty="0"/>
+            <a:endParaRPr lang="en-US" sz="1400" dirty="0"/>
           </a:p>
         </p:txBody>
       </p:sp>
@@ -6398,14 +6398,14 @@
           <a:ln/>
         </p:spPr>
         <p:txBody>
-          <a:bodyPr wrap="square" lIns="0" tIns="0" rIns="0" bIns="0" rtlCol="0" anchor="ctr"/>
-          <a:lstStyle/>
-          <a:p>
-            <a:pPr indent="0" marL="0">
-              <a:buNone/>
-            </a:pPr>
-            <a:r>
-              <a:rPr lang="en-US" sz="850" dirty="0">
+          <a:bodyPr wrap="square" lIns="0" tIns="0" rIns="0" bIns="0" rtlCol="0" anchor="t"/>
+          <a:lstStyle/>
+          <a:p>
+            <a:pPr indent="0" marL="0">
+              <a:buNone/>
+            </a:pPr>
+            <a:r>
+              <a:rPr lang="en-US" sz="1400" dirty="0">
                 <a:solidFill>
                   <a:srgbClr val="FBF5E6"/>
                 </a:solidFill>
@@ -6415,7 +6415,7 @@
               </a:rPr>
               <a:t>《大憲章》簽署 · Magna Carta signed</a:t>
             </a:r>
-            <a:endParaRPr lang="en-US" sz="850" dirty="0"/>
+            <a:endParaRPr lang="en-US" sz="1400" dirty="0"/>
           </a:p>
         </p:txBody>
       </p:sp>
@@ -6457,14 +6457,14 @@
           <a:ln/>
         </p:spPr>
         <p:txBody>
-          <a:bodyPr wrap="square" lIns="0" tIns="0" rIns="0" bIns="0" rtlCol="0" anchor="ctr"/>
+          <a:bodyPr wrap="square" lIns="0" tIns="0" rIns="0" bIns="0" rtlCol="0" anchor="t"/>
           <a:lstStyle/>
           <a:p>
             <a:pPr algn="r" indent="0" marL="0">
               <a:buNone/>
             </a:pPr>
             <a:r>
-              <a:rPr lang="en-US" sz="850" dirty="0">
+              <a:rPr lang="en-US" sz="1400" dirty="0">
                 <a:solidFill>
                   <a:srgbClr val="E8D8A8"/>
                 </a:solidFill>
@@ -6474,7 +6474,7 @@
               </a:rPr>
               <a:t>ca. 1228</a:t>
             </a:r>
-            <a:endParaRPr lang="en-US" sz="850" dirty="0"/>
+            <a:endParaRPr lang="en-US" sz="1400" dirty="0"/>
           </a:p>
         </p:txBody>
       </p:sp>
@@ -6496,14 +6496,14 @@
           <a:ln/>
         </p:spPr>
         <p:txBody>
-          <a:bodyPr wrap="square" lIns="0" tIns="0" rIns="0" bIns="0" rtlCol="0" anchor="ctr"/>
-          <a:lstStyle/>
-          <a:p>
-            <a:pPr indent="0" marL="0">
-              <a:buNone/>
-            </a:pPr>
-            <a:r>
-              <a:rPr lang="en-US" sz="850" dirty="0">
+          <a:bodyPr wrap="square" lIns="0" tIns="0" rIns="0" bIns="0" rtlCol="0" anchor="t"/>
+          <a:lstStyle/>
+          <a:p>
+            <a:pPr indent="0" marL="0">
+              <a:buNone/>
+            </a:pPr>
+            <a:r>
+              <a:rPr lang="en-US" sz="1400" dirty="0">
                 <a:solidFill>
                   <a:srgbClr val="FBF5E6"/>
                 </a:solidFill>
@@ -6513,7 +6513,7 @@
               </a:rPr>
               <a:t>Walther von der Vogelweide, Palästinalied</a:t>
             </a:r>
-            <a:endParaRPr lang="en-US" sz="850" dirty="0"/>
+            <a:endParaRPr lang="en-US" sz="1400" dirty="0"/>
           </a:p>
         </p:txBody>
       </p:sp>
@@ -6555,14 +6555,14 @@
           <a:ln/>
         </p:spPr>
         <p:txBody>
-          <a:bodyPr wrap="square" lIns="0" tIns="0" rIns="0" bIns="0" rtlCol="0" anchor="ctr"/>
+          <a:bodyPr wrap="square" lIns="0" tIns="0" rIns="0" bIns="0" rtlCol="0" anchor="t"/>
           <a:lstStyle/>
           <a:p>
             <a:pPr algn="r" indent="0" marL="0">
               <a:buNone/>
             </a:pPr>
             <a:r>
-              <a:rPr lang="en-US" sz="850" dirty="0">
+              <a:rPr lang="en-US" sz="1400" dirty="0">
                 <a:solidFill>
                   <a:srgbClr val="E8D8A8"/>
                 </a:solidFill>
@@ -6572,7 +6572,7 @@
               </a:rPr>
               <a:t>ca. 1270–90</a:t>
             </a:r>
-            <a:endParaRPr lang="en-US" sz="850" dirty="0"/>
+            <a:endParaRPr lang="en-US" sz="1400" dirty="0"/>
           </a:p>
         </p:txBody>
       </p:sp>
@@ -6594,14 +6594,14 @@
           <a:ln/>
         </p:spPr>
         <p:txBody>
-          <a:bodyPr wrap="square" lIns="0" tIns="0" rIns="0" bIns="0" rtlCol="0" anchor="ctr"/>
-          <a:lstStyle/>
-          <a:p>
-            <a:pPr indent="0" marL="0">
-              <a:buNone/>
-            </a:pPr>
-            <a:r>
-              <a:rPr lang="en-US" sz="850" dirty="0">
+          <a:bodyPr wrap="square" lIns="0" tIns="0" rIns="0" bIns="0" rtlCol="0" anchor="t"/>
+          <a:lstStyle/>
+          <a:p>
+            <a:pPr indent="0" marL="0">
+              <a:buNone/>
+            </a:pPr>
+            <a:r>
+              <a:rPr lang="en-US" sz="1400" dirty="0">
                 <a:solidFill>
                   <a:srgbClr val="FBF5E6"/>
                 </a:solidFill>
@@ -6611,7 +6611,7 @@
               </a:rPr>
               <a:t>Cantigas de Santa María（阿方索十世監督編纂）</a:t>
             </a:r>
-            <a:endParaRPr lang="en-US" sz="850" dirty="0"/>
+            <a:endParaRPr lang="en-US" sz="1400" dirty="0"/>
           </a:p>
         </p:txBody>
       </p:sp>
@@ -6653,14 +6653,14 @@
           <a:ln/>
         </p:spPr>
         <p:txBody>
-          <a:bodyPr wrap="square" lIns="0" tIns="0" rIns="0" bIns="0" rtlCol="0" anchor="ctr"/>
+          <a:bodyPr wrap="square" lIns="0" tIns="0" rIns="0" bIns="0" rtlCol="0" anchor="t"/>
           <a:lstStyle/>
           <a:p>
             <a:pPr algn="r" indent="0" marL="0">
               <a:buNone/>
             </a:pPr>
             <a:r>
-              <a:rPr lang="en-US" sz="850" dirty="0">
+              <a:rPr lang="en-US" sz="1400" dirty="0">
                 <a:solidFill>
                   <a:srgbClr val="E8D8A8"/>
                 </a:solidFill>
@@ -6670,7 +6670,7 @@
               </a:rPr>
               <a:t>ca. 1284</a:t>
             </a:r>
-            <a:endParaRPr lang="en-US" sz="850" dirty="0"/>
+            <a:endParaRPr lang="en-US" sz="1400" dirty="0"/>
           </a:p>
         </p:txBody>
       </p:sp>
@@ -6692,14 +6692,14 @@
           <a:ln/>
         </p:spPr>
         <p:txBody>
-          <a:bodyPr wrap="square" lIns="0" tIns="0" rIns="0" bIns="0" rtlCol="0" anchor="ctr"/>
-          <a:lstStyle/>
-          <a:p>
-            <a:pPr indent="0" marL="0">
-              <a:buNone/>
-            </a:pPr>
-            <a:r>
-              <a:rPr lang="en-US" sz="850" dirty="0">
+          <a:bodyPr wrap="square" lIns="0" tIns="0" rIns="0" bIns="0" rtlCol="0" anchor="t"/>
+          <a:lstStyle/>
+          <a:p>
+            <a:pPr indent="0" marL="0">
+              <a:buNone/>
+            </a:pPr>
+            <a:r>
+              <a:rPr lang="en-US" sz="1400" dirty="0">
                 <a:solidFill>
                   <a:srgbClr val="FBF5E6"/>
                 </a:solidFill>
@@ -6709,7 +6709,7 @@
               </a:rPr>
               <a:t>Adam de la Halle, Jeu de Robin et de Marion</a:t>
             </a:r>
-            <a:endParaRPr lang="en-US" sz="850" dirty="0"/>
+            <a:endParaRPr lang="en-US" sz="1400" dirty="0"/>
           </a:p>
         </p:txBody>
       </p:sp>
@@ -6751,14 +6751,14 @@
           <a:ln/>
         </p:spPr>
         <p:txBody>
-          <a:bodyPr wrap="square" lIns="0" tIns="0" rIns="0" bIns="0" rtlCol="0" anchor="ctr"/>
+          <a:bodyPr wrap="square" lIns="0" tIns="0" rIns="0" bIns="0" rtlCol="0" anchor="t"/>
           <a:lstStyle/>
           <a:p>
             <a:pPr algn="r" indent="0" marL="0">
               <a:buNone/>
             </a:pPr>
             <a:r>
-              <a:rPr lang="en-US" sz="850" dirty="0">
+              <a:rPr lang="en-US" sz="1400" dirty="0">
                 <a:solidFill>
                   <a:srgbClr val="E8D8A8"/>
                 </a:solidFill>
@@ -6768,7 +6768,7 @@
               </a:rPr>
               <a:t>1321 CE</a:t>
             </a:r>
-            <a:endParaRPr lang="en-US" sz="850" dirty="0"/>
+            <a:endParaRPr lang="en-US" sz="1400" dirty="0"/>
           </a:p>
         </p:txBody>
       </p:sp>
@@ -6790,14 +6790,14 @@
           <a:ln/>
         </p:spPr>
         <p:txBody>
-          <a:bodyPr wrap="square" lIns="0" tIns="0" rIns="0" bIns="0" rtlCol="0" anchor="ctr"/>
-          <a:lstStyle/>
-          <a:p>
-            <a:pPr indent="0" marL="0">
-              <a:buNone/>
-            </a:pPr>
-            <a:r>
-              <a:rPr lang="en-US" sz="850" dirty="0">
+          <a:bodyPr wrap="square" lIns="0" tIns="0" rIns="0" bIns="0" rtlCol="0" anchor="t"/>
+          <a:lstStyle/>
+          <a:p>
+            <a:pPr indent="0" marL="0">
+              <a:buNone/>
+            </a:pPr>
+            <a:r>
+              <a:rPr lang="en-US" sz="1400" dirty="0">
                 <a:solidFill>
                   <a:srgbClr val="FBF5E6"/>
                 </a:solidFill>
@@ -6807,7 +6807,7 @@
               </a:rPr>
               <a:t>巴黎音樂家行會成立 · Paris minstrels' guild founded</a:t>
             </a:r>
-            <a:endParaRPr lang="en-US" sz="850" dirty="0"/>
+            <a:endParaRPr lang="en-US" sz="1400" dirty="0"/>
           </a:p>
         </p:txBody>
       </p:sp>
@@ -6947,7 +6947,7 @@
               <a:buNone/>
             </a:pPr>
             <a:r>
-              <a:rPr lang="en-US" sz="1200" i="1" dirty="0">
+              <a:rPr lang="en-US" sz="1400" i="1" dirty="0">
                 <a:solidFill>
                   <a:srgbClr val="5C3A28"/>
                 </a:solidFill>
@@ -6957,7 +6957,7 @@
               </a:rPr>
               <a:t>The Lover's Complaint · From Troubadours to Today</a:t>
             </a:r>
-            <a:endParaRPr lang="en-US" sz="1200" dirty="0"/>
+            <a:endParaRPr lang="en-US" sz="1400" dirty="0"/>
           </a:p>
         </p:txBody>
       </p:sp>
@@ -7026,7 +7026,7 @@
               <a:buNone/>
             </a:pPr>
             <a:r>
-              <a:rPr lang="en-US" sz="1300" b="1" dirty="0">
+              <a:rPr lang="en-US" sz="1400" b="1" dirty="0">
                 <a:solidFill>
                   <a:srgbClr val="C8A020"/>
                 </a:solidFill>
@@ -7034,9 +7034,9 @@
                 <a:ea typeface="Georgia" pitchFamily="34" charset="-122"/>
                 <a:cs typeface="Georgia" pitchFamily="34" charset="-120"/>
               </a:rPr>
-              <a:t>🎼 中世紀歌曲的共同特徵（至今仍是「典型西方歌曲」）</a:t>
-            </a:r>
-            <a:endParaRPr lang="en-US" sz="1300" dirty="0"/>
+              <a:t>中世紀歌曲的共同特徵（延續至今的西方歌曲原型）</a:t>
+            </a:r>
+            <a:endParaRPr lang="en-US" sz="1400" dirty="0"/>
           </a:p>
         </p:txBody>
       </p:sp>
@@ -7058,14 +7058,14 @@
           <a:ln/>
         </p:spPr>
         <p:txBody>
-          <a:bodyPr wrap="square" rtlCol="0" anchor="ctr"/>
-          <a:lstStyle/>
-          <a:p>
-            <a:pPr indent="0" marL="0">
-              <a:buNone/>
-            </a:pPr>
-            <a:r>
-              <a:rPr lang="en-US" sz="1050" dirty="0">
+          <a:bodyPr wrap="square" rtlCol="0" anchor="t"/>
+          <a:lstStyle/>
+          <a:p>
+            <a:pPr indent="0" marL="0">
+              <a:buNone/>
+            </a:pPr>
+            <a:r>
+              <a:rPr lang="en-US" sz="1400" dirty="0">
                 <a:solidFill>
                   <a:srgbClr val="FBF5E6"/>
                 </a:solidFill>
@@ -7075,14 +7075,14 @@
               </a:rPr>
               <a:t>• 分節歌式（strophic）· 自然音階（diatonic）· 主要音節式（syllabic）</a:t>
             </a:r>
-            <a:endParaRPr lang="en-US" sz="1050" dirty="0"/>
-          </a:p>
-          <a:p>
-            <a:pPr indent="0" marL="0">
-              <a:buNone/>
-            </a:pPr>
-            <a:r>
-              <a:rPr lang="en-US" sz="1050" dirty="0">
+            <a:endParaRPr lang="en-US" sz="1400" dirty="0"/>
+          </a:p>
+          <a:p>
+            <a:pPr indent="0" marL="0">
+              <a:buNone/>
+            </a:pPr>
+            <a:r>
+              <a:rPr lang="en-US" sz="1400" dirty="0">
                 <a:solidFill>
                   <a:srgbClr val="FBF5E6"/>
                 </a:solidFill>
@@ -7092,14 +7092,14 @@
               </a:rPr>
               <a:t>  Strophic · diatonic · primarily syllabic</a:t>
             </a:r>
-            <a:endParaRPr lang="en-US" sz="1050" dirty="0"/>
-          </a:p>
-          <a:p>
-            <a:pPr indent="0" marL="0">
-              <a:buNone/>
-            </a:pPr>
-            <a:r>
-              <a:rPr lang="en-US" sz="1050" dirty="0">
+            <a:endParaRPr lang="en-US" sz="1400" dirty="0"/>
+          </a:p>
+          <a:p>
+            <a:pPr indent="0" marL="0">
+              <a:buNone/>
+            </a:pPr>
+            <a:r>
+              <a:rPr lang="en-US" sz="1400" dirty="0">
                 <a:solidFill>
                   <a:srgbClr val="FBF5E6"/>
                 </a:solidFill>
@@ -7109,14 +7109,14 @@
               </a:rPr>
               <a:t>• 主要級進，音域約一個八度 · 清楚的音高中心</a:t>
             </a:r>
-            <a:endParaRPr lang="en-US" sz="1050" dirty="0"/>
-          </a:p>
-          <a:p>
-            <a:pPr indent="0" marL="0">
-              <a:buNone/>
-            </a:pPr>
-            <a:r>
-              <a:rPr lang="en-US" sz="1050" dirty="0">
+            <a:endParaRPr lang="en-US" sz="1400" dirty="0"/>
+          </a:p>
+          <a:p>
+            <a:pPr indent="0" marL="0">
+              <a:buNone/>
+            </a:pPr>
+            <a:r>
+              <a:rPr lang="en-US" sz="1400" dirty="0">
                 <a:solidFill>
                   <a:srgbClr val="FBF5E6"/>
                 </a:solidFill>
@@ -7126,14 +7126,14 @@
               </a:rPr>
               <a:t>  Mostly stepwise, range ~an octave, clear pitch center</a:t>
             </a:r>
-            <a:endParaRPr lang="en-US" sz="1050" dirty="0"/>
-          </a:p>
-          <a:p>
-            <a:pPr indent="0" marL="0">
-              <a:buNone/>
-            </a:pPr>
-            <a:r>
-              <a:rPr lang="en-US" sz="1050" dirty="0">
+            <a:endParaRPr lang="en-US" sz="1400" dirty="0"/>
+          </a:p>
+          <a:p>
+            <a:pPr indent="0" marL="0">
+              <a:buNone/>
+            </a:pPr>
+            <a:r>
+              <a:rPr lang="en-US" sz="1400" dirty="0">
                 <a:solidFill>
                   <a:srgbClr val="FBF5E6"/>
                 </a:solidFill>
@@ -7143,14 +7143,14 @@
               </a:rPr>
               <a:t>• 樂句短且大致等長，弧形起伏，回落至終止</a:t>
             </a:r>
-            <a:endParaRPr lang="en-US" sz="1050" dirty="0"/>
-          </a:p>
-          <a:p>
-            <a:pPr indent="0" marL="0">
-              <a:buNone/>
-            </a:pPr>
-            <a:r>
-              <a:rPr lang="en-US" sz="1050" dirty="0">
+            <a:endParaRPr lang="en-US" sz="1400" dirty="0"/>
+          </a:p>
+          <a:p>
+            <a:pPr indent="0" marL="0">
+              <a:buNone/>
+            </a:pPr>
+            <a:r>
+              <a:rPr lang="en-US" sz="1400" dirty="0">
                 <a:solidFill>
                   <a:srgbClr val="FBF5E6"/>
                 </a:solidFill>
@@ -7160,14 +7160,14 @@
               </a:rPr>
               <a:t>  Short musical phrases, roughly equal in size, arch-shaped</a:t>
             </a:r>
-            <a:endParaRPr lang="en-US" sz="1050" dirty="0"/>
-          </a:p>
-          <a:p>
-            <a:pPr indent="0" marL="0">
-              <a:buNone/>
-            </a:pPr>
-            <a:r>
-              <a:rPr lang="en-US" sz="1050" dirty="0">
+            <a:endParaRPr lang="en-US" sz="1400" dirty="0"/>
+          </a:p>
+          <a:p>
+            <a:pPr indent="0" marL="0">
+              <a:buNone/>
+            </a:pPr>
+            <a:r>
+              <a:rPr lang="en-US" sz="1400" dirty="0">
                 <a:solidFill>
                   <a:srgbClr val="FBF5E6"/>
                 </a:solidFill>
@@ -7177,14 +7177,14 @@
               </a:rPr>
               <a:t>• 常用副歌（refrain）· 主題多為「未能如願的純潔之愛」</a:t>
             </a:r>
-            <a:endParaRPr lang="en-US" sz="1050" dirty="0"/>
-          </a:p>
-          <a:p>
-            <a:pPr indent="0" marL="0">
-              <a:buNone/>
-            </a:pPr>
-            <a:r>
-              <a:rPr lang="en-US" sz="1050" dirty="0">
+            <a:endParaRPr lang="en-US" sz="1400" dirty="0"/>
+          </a:p>
+          <a:p>
+            <a:pPr indent="0" marL="0">
+              <a:buNone/>
+            </a:pPr>
+            <a:r>
+              <a:rPr lang="en-US" sz="1400" dirty="0">
                 <a:solidFill>
                   <a:srgbClr val="FBF5E6"/>
                 </a:solidFill>
@@ -7194,7 +7194,7 @@
               </a:rPr>
               <a:t>  Refrains common · theme of pure, unattainable love</a:t>
             </a:r>
-            <a:endParaRPr lang="en-US" sz="1050" dirty="0"/>
+            <a:endParaRPr lang="en-US" sz="1400" dirty="0"/>
           </a:p>
         </p:txBody>
       </p:sp>
@@ -7243,7 +7243,7 @@
               <a:buNone/>
             </a:pPr>
             <a:r>
-              <a:rPr lang="en-US" sz="1300" b="1" dirty="0">
+              <a:rPr lang="en-US" sz="1400" b="1" dirty="0">
                 <a:solidFill>
                   <a:srgbClr val="C8A020"/>
                 </a:solidFill>
@@ -7251,9 +7251,9 @@
                 <a:ea typeface="Georgia" pitchFamily="34" charset="-122"/>
                 <a:cs typeface="Georgia" pitchFamily="34" charset="-120"/>
               </a:rPr>
-              <a:t>🔄 後世的重新發現 Rediscovery</a:t>
-            </a:r>
-            <a:endParaRPr lang="en-US" sz="1300" dirty="0"/>
+              <a:t>■ 後世的重新發現 Rediscovery</a:t>
+            </a:r>
+            <a:endParaRPr lang="en-US" sz="1400" dirty="0"/>
           </a:p>
         </p:txBody>
       </p:sp>
@@ -7275,14 +7275,14 @@
           <a:ln/>
         </p:spPr>
         <p:txBody>
-          <a:bodyPr wrap="square" rtlCol="0" anchor="ctr"/>
-          <a:lstStyle/>
-          <a:p>
-            <a:pPr indent="0" marL="0">
-              <a:buNone/>
-            </a:pPr>
-            <a:r>
-              <a:rPr lang="en-US" sz="1000" dirty="0">
+          <a:bodyPr wrap="square" rtlCol="0" anchor="t"/>
+          <a:lstStyle/>
+          <a:p>
+            <a:pPr indent="0" marL="0">
+              <a:buNone/>
+            </a:pPr>
+            <a:r>
+              <a:rPr lang="en-US" sz="1400" dirty="0">
                 <a:solidFill>
                   <a:srgbClr val="FBF5E6"/>
                 </a:solidFill>
@@ -7292,14 +7292,14 @@
               </a:rPr>
               <a:t>• 18–19 世紀：民族文化復興 → 對中世紀的興趣重燃 · 收集整理 trouvère 歌曲配鋼琴伴奏出版</a:t>
             </a:r>
-            <a:endParaRPr lang="en-US" sz="1000" dirty="0"/>
-          </a:p>
-          <a:p>
-            <a:pPr indent="0" marL="0">
-              <a:buNone/>
-            </a:pPr>
-            <a:r>
-              <a:rPr lang="en-US" sz="1000" dirty="0">
+            <a:endParaRPr lang="en-US" sz="1400" dirty="0"/>
+          </a:p>
+          <a:p>
+            <a:pPr indent="0" marL="0">
+              <a:buNone/>
+            </a:pPr>
+            <a:r>
+              <a:rPr lang="en-US" sz="1400" dirty="0">
                 <a:solidFill>
                   <a:srgbClr val="FBF5E6"/>
                 </a:solidFill>
@@ -7309,14 +7309,14 @@
               </a:rPr>
               <a:t>  18th–19th c.: nationalism revives interest in the Middle Ages</a:t>
             </a:r>
-            <a:endParaRPr lang="en-US" sz="1000" dirty="0"/>
-          </a:p>
-          <a:p>
-            <a:pPr indent="0" marL="0">
-              <a:buNone/>
-            </a:pPr>
-            <a:r>
-              <a:rPr lang="en-US" sz="1000" dirty="0">
+            <a:endParaRPr lang="en-US" sz="1400" dirty="0"/>
+          </a:p>
+          <a:p>
+            <a:pPr indent="0" marL="0">
+              <a:buNone/>
+            </a:pPr>
+            <a:r>
+              <a:rPr lang="en-US" sz="1400" dirty="0">
                 <a:solidFill>
                   <a:srgbClr val="FBF5E6"/>
                 </a:solidFill>
@@ -7326,14 +7326,14 @@
               </a:rPr>
               <a:t>• 1872：Adam de la Halle 音樂作品被轉寫並出版</a:t>
             </a:r>
-            <a:endParaRPr lang="en-US" sz="1000" dirty="0"/>
-          </a:p>
-          <a:p>
-            <a:pPr indent="0" marL="0">
-              <a:buNone/>
-            </a:pPr>
-            <a:r>
-              <a:rPr lang="en-US" sz="1000" dirty="0">
+            <a:endParaRPr lang="en-US" sz="1400" dirty="0"/>
+          </a:p>
+          <a:p>
+            <a:pPr indent="0" marL="0">
+              <a:buNone/>
+            </a:pPr>
+            <a:r>
+              <a:rPr lang="en-US" sz="1400" dirty="0">
                 <a:solidFill>
                   <a:srgbClr val="FBF5E6"/>
                 </a:solidFill>
@@ -7343,14 +7343,14 @@
               </a:rPr>
               <a:t>  1872: Adam de la Halle's works transcribed and published</a:t>
             </a:r>
-            <a:endParaRPr lang="en-US" sz="1000" dirty="0"/>
-          </a:p>
-          <a:p>
-            <a:pPr indent="0" marL="0">
-              <a:buNone/>
-            </a:pPr>
-            <a:r>
-              <a:rPr lang="en-US" sz="1000" dirty="0">
+            <a:endParaRPr lang="en-US" sz="1400" dirty="0"/>
+          </a:p>
+          <a:p>
+            <a:pPr indent="0" marL="0">
+              <a:buNone/>
+            </a:pPr>
+            <a:r>
+              <a:rPr lang="en-US" sz="1400" dirty="0">
                 <a:solidFill>
                   <a:srgbClr val="FBF5E6"/>
                 </a:solidFill>
@@ -7360,14 +7360,14 @@
               </a:rPr>
               <a:t>• 20 世紀：更多中世紀曲目版本陸續問世</a:t>
             </a:r>
-            <a:endParaRPr lang="en-US" sz="1000" dirty="0"/>
-          </a:p>
-          <a:p>
-            <a:pPr indent="0" marL="0">
-              <a:buNone/>
-            </a:pPr>
-            <a:r>
-              <a:rPr lang="en-US" sz="1000" dirty="0">
+            <a:endParaRPr lang="en-US" sz="1400" dirty="0"/>
+          </a:p>
+          <a:p>
+            <a:pPr indent="0" marL="0">
+              <a:buNone/>
+            </a:pPr>
+            <a:r>
+              <a:rPr lang="en-US" sz="1400" dirty="0">
                 <a:solidFill>
                   <a:srgbClr val="FBF5E6"/>
                 </a:solidFill>
@@ -7377,14 +7377,14 @@
               </a:rPr>
               <a:t>• 近幾十年：中世紀世俗歌曲與器樂舞曲復興——音樂會與錄音</a:t>
             </a:r>
-            <a:endParaRPr lang="en-US" sz="1000" dirty="0"/>
-          </a:p>
-          <a:p>
-            <a:pPr indent="0" marL="0">
-              <a:buNone/>
-            </a:pPr>
-            <a:r>
-              <a:rPr lang="en-US" sz="1000" dirty="0">
+            <a:endParaRPr lang="en-US" sz="1400" dirty="0"/>
+          </a:p>
+          <a:p>
+            <a:pPr indent="0" marL="0">
+              <a:buNone/>
+            </a:pPr>
+            <a:r>
+              <a:rPr lang="en-US" sz="1400" dirty="0">
                 <a:solidFill>
                   <a:srgbClr val="FBF5E6"/>
                 </a:solidFill>
@@ -7394,14 +7394,14 @@
               </a:rPr>
               <a:t>  Recent decades: revival in concerts and recordings</a:t>
             </a:r>
-            <a:endParaRPr lang="en-US" sz="1000" dirty="0"/>
-          </a:p>
-          <a:p>
-            <a:pPr indent="0" marL="0">
-              <a:buNone/>
-            </a:pPr>
-            <a:r>
-              <a:rPr lang="en-US" sz="1000" dirty="0">
+            <a:endParaRPr lang="en-US" sz="1400" dirty="0"/>
+          </a:p>
+          <a:p>
+            <a:pPr indent="0" marL="0">
+              <a:buNone/>
+            </a:pPr>
+            <a:r>
+              <a:rPr lang="en-US" sz="1400" dirty="0">
                 <a:solidFill>
                   <a:srgbClr val="FBF5E6"/>
                 </a:solidFill>
@@ -7411,14 +7411,14 @@
               </a:rPr>
               <a:t>• 當代「中世紀搖滾」改編如 Walther von der Vogelweide《Palästinalied》（被多支歐洲樂團錄製）</a:t>
             </a:r>
-            <a:endParaRPr lang="en-US" sz="1000" dirty="0"/>
-          </a:p>
-          <a:p>
-            <a:pPr indent="0" marL="0">
-              <a:buNone/>
-            </a:pPr>
-            <a:r>
-              <a:rPr lang="en-US" sz="1000" dirty="0">
+            <a:endParaRPr lang="en-US" sz="1400" dirty="0"/>
+          </a:p>
+          <a:p>
+            <a:pPr indent="0" marL="0">
+              <a:buNone/>
+            </a:pPr>
+            <a:r>
+              <a:rPr lang="en-US" sz="1400" dirty="0">
                 <a:solidFill>
                   <a:srgbClr val="FBF5E6"/>
                 </a:solidFill>
@@ -7428,7 +7428,7 @@
               </a:rPr>
               <a:t>  Contemporary "medieval rock" arrangements</a:t>
             </a:r>
-            <a:endParaRPr lang="en-US" sz="1000" dirty="0"/>
+            <a:endParaRPr lang="en-US" sz="1400" dirty="0"/>
           </a:p>
         </p:txBody>
       </p:sp>
@@ -7613,7 +7613,7 @@
                   <a:srgbClr val="000000"/>
                 </a:solidFill>
               </a:rPr>
-              <a:t>🏰</a:t>
+              <a:t>■</a:t>
             </a:r>
             <a:endParaRPr lang="en-US" sz="2000" dirty="0"/>
           </a:p>
@@ -7637,14 +7637,14 @@
           <a:ln/>
         </p:spPr>
         <p:txBody>
-          <a:bodyPr wrap="square" lIns="0" tIns="0" rIns="0" bIns="0" rtlCol="0" anchor="ctr"/>
-          <a:lstStyle/>
-          <a:p>
-            <a:pPr indent="0" marL="0">
-              <a:buNone/>
-            </a:pPr>
-            <a:r>
-              <a:rPr lang="en-US" sz="1100" dirty="0">
+          <a:bodyPr wrap="square" lIns="0" tIns="0" rIns="0" bIns="0" rtlCol="0" anchor="t"/>
+          <a:lstStyle/>
+          <a:p>
+            <a:pPr indent="0" marL="0">
+              <a:buNone/>
+            </a:pPr>
+            <a:r>
+              <a:rPr lang="en-US" sz="1400" dirty="0">
                 <a:solidFill>
                   <a:srgbClr val="E8D8A8"/>
                 </a:solidFill>
@@ -7654,14 +7654,14 @@
               </a:rPr>
               <a:t>歐洲 800–1300 經歷人口倍增、城市崛起、大學成立；教會重心從修道院移至城市主教座堂</a:t>
             </a:r>
-            <a:endParaRPr lang="en-US" sz="1100" dirty="0"/>
-          </a:p>
-          <a:p>
-            <a:pPr indent="0" marL="0">
-              <a:buNone/>
-            </a:pPr>
-            <a:r>
-              <a:rPr lang="en-US" sz="1100" dirty="0">
+            <a:endParaRPr lang="en-US" sz="1400" dirty="0"/>
+          </a:p>
+          <a:p>
+            <a:pPr indent="0" marL="0">
+              <a:buNone/>
+            </a:pPr>
+            <a:r>
+              <a:rPr lang="en-US" sz="1400" dirty="0">
                 <a:solidFill>
                   <a:srgbClr val="E8D8A8"/>
                 </a:solidFill>
@@ -7671,7 +7671,7 @@
               </a:rPr>
               <a:t>Europe 800–1300: population growth, urban rise, universities; center shifts to urban cathedrals</a:t>
             </a:r>
-            <a:endParaRPr lang="en-US" sz="1100" dirty="0"/>
+            <a:endParaRPr lang="en-US" sz="1400" dirty="0"/>
           </a:p>
         </p:txBody>
       </p:sp>
@@ -7725,7 +7725,7 @@
                   <a:srgbClr val="000000"/>
                 </a:solidFill>
               </a:rPr>
-              <a:t>📜</a:t>
+              <a:t>■</a:t>
             </a:r>
             <a:endParaRPr lang="en-US" sz="2000" dirty="0"/>
           </a:p>
@@ -7749,14 +7749,14 @@
           <a:ln/>
         </p:spPr>
         <p:txBody>
-          <a:bodyPr wrap="square" lIns="0" tIns="0" rIns="0" bIns="0" rtlCol="0" anchor="ctr"/>
-          <a:lstStyle/>
-          <a:p>
-            <a:pPr indent="0" marL="0">
-              <a:buNone/>
-            </a:pPr>
-            <a:r>
-              <a:rPr lang="en-US" sz="1100" dirty="0">
+          <a:bodyPr wrap="square" lIns="0" tIns="0" rIns="0" bIns="0" rtlCol="0" anchor="t"/>
+          <a:lstStyle/>
+          <a:p>
+            <a:pPr indent="0" marL="0">
+              <a:buNone/>
+            </a:pPr>
+            <a:r>
+              <a:rPr lang="en-US" sz="1400" dirty="0">
                 <a:solidFill>
                   <a:srgbClr val="E8D8A8"/>
                 </a:solidFill>
@@ -7766,14 +7766,14 @@
               </a:rPr>
               <a:t>拉丁歌曲（versus、conductus、goliard）與方言史詩並存；多數世俗歌曲失傳因其口傳性質</a:t>
             </a:r>
-            <a:endParaRPr lang="en-US" sz="1100" dirty="0"/>
-          </a:p>
-          <a:p>
-            <a:pPr indent="0" marL="0">
-              <a:buNone/>
-            </a:pPr>
-            <a:r>
-              <a:rPr lang="en-US" sz="1100" dirty="0">
+            <a:endParaRPr lang="en-US" sz="1400" dirty="0"/>
+          </a:p>
+          <a:p>
+            <a:pPr indent="0" marL="0">
+              <a:buNone/>
+            </a:pPr>
+            <a:r>
+              <a:rPr lang="en-US" sz="1400" dirty="0">
                 <a:solidFill>
                   <a:srgbClr val="E8D8A8"/>
                 </a:solidFill>
@@ -7783,7 +7783,7 @@
               </a:rPr>
               <a:t>Latin songs coexist with vernacular epics; most secular songs are lost due to oral transmission</a:t>
             </a:r>
-            <a:endParaRPr lang="en-US" sz="1100" dirty="0"/>
+            <a:endParaRPr lang="en-US" sz="1400" dirty="0"/>
           </a:p>
         </p:txBody>
       </p:sp>
@@ -7837,7 +7837,7 @@
                   <a:srgbClr val="000000"/>
                 </a:solidFill>
               </a:rPr>
-              <a:t>🎤</a:t>
+              <a:t>■</a:t>
             </a:r>
             <a:endParaRPr lang="en-US" sz="2000" dirty="0"/>
           </a:p>
@@ -7861,14 +7861,14 @@
           <a:ln/>
         </p:spPr>
         <p:txBody>
-          <a:bodyPr wrap="square" lIns="0" tIns="0" rIns="0" bIns="0" rtlCol="0" anchor="ctr"/>
-          <a:lstStyle/>
-          <a:p>
-            <a:pPr indent="0" marL="0">
-              <a:buNone/>
-            </a:pPr>
-            <a:r>
-              <a:rPr lang="en-US" sz="1100" dirty="0">
+          <a:bodyPr wrap="square" lIns="0" tIns="0" rIns="0" bIns="0" rtlCol="0" anchor="t"/>
+          <a:lstStyle/>
+          <a:p>
+            <a:pPr indent="0" marL="0">
+              <a:buNone/>
+            </a:pPr>
+            <a:r>
+              <a:rPr lang="en-US" sz="1400" dirty="0">
                 <a:solidFill>
                   <a:srgbClr val="E8D8A8"/>
                 </a:solidFill>
@@ -7878,14 +7878,14 @@
               </a:rPr>
               <a:t>樂師從邊緣人物走向職業化：jongleurs → minstrels → guilds（1321 巴黎行會）</a:t>
             </a:r>
-            <a:endParaRPr lang="en-US" sz="1100" dirty="0"/>
-          </a:p>
-          <a:p>
-            <a:pPr indent="0" marL="0">
-              <a:buNone/>
-            </a:pPr>
-            <a:r>
-              <a:rPr lang="en-US" sz="1100" dirty="0">
+            <a:endParaRPr lang="en-US" sz="1400" dirty="0"/>
+          </a:p>
+          <a:p>
+            <a:pPr indent="0" marL="0">
+              <a:buNone/>
+            </a:pPr>
+            <a:r>
+              <a:rPr lang="en-US" sz="1400" dirty="0">
                 <a:solidFill>
                   <a:srgbClr val="E8D8A8"/>
                 </a:solidFill>
@@ -7895,7 +7895,7 @@
               </a:rPr>
               <a:t>Musicians professionalized: jongleurs → minstrels → guilds (Paris 1321)</a:t>
             </a:r>
-            <a:endParaRPr lang="en-US" sz="1100" dirty="0"/>
+            <a:endParaRPr lang="en-US" sz="1400" dirty="0"/>
           </a:p>
         </p:txBody>
       </p:sp>
@@ -7949,7 +7949,7 @@
                   <a:srgbClr val="000000"/>
                 </a:solidFill>
               </a:rPr>
-              <a:t>💘</a:t>
+              <a:t>■</a:t>
             </a:r>
             <a:endParaRPr lang="en-US" sz="2000" dirty="0"/>
           </a:p>
@@ -7973,14 +7973,14 @@
           <a:ln/>
         </p:spPr>
         <p:txBody>
-          <a:bodyPr wrap="square" lIns="0" tIns="0" rIns="0" bIns="0" rtlCol="0" anchor="ctr"/>
-          <a:lstStyle/>
-          <a:p>
-            <a:pPr indent="0" marL="0">
-              <a:buNone/>
-            </a:pPr>
-            <a:r>
-              <a:rPr lang="en-US" sz="1100" dirty="0">
+          <a:bodyPr wrap="square" lIns="0" tIns="0" rIns="0" bIns="0" rtlCol="0" anchor="t"/>
+          <a:lstStyle/>
+          <a:p>
+            <a:pPr indent="0" marL="0">
+              <a:buNone/>
+            </a:pPr>
+            <a:r>
+              <a:rPr lang="en-US" sz="1400" dirty="0">
                 <a:solidFill>
                   <a:srgbClr val="E8D8A8"/>
                 </a:solidFill>
@@ -7990,14 +7990,14 @@
               </a:rPr>
               <a:t>Troubadours（南法 Occitan）與 trouvères（北法古法語）以 fin' amors「精鍊之愛」為主題；AAB 形式盛行</a:t>
             </a:r>
-            <a:endParaRPr lang="en-US" sz="1100" dirty="0"/>
-          </a:p>
-          <a:p>
-            <a:pPr indent="0" marL="0">
-              <a:buNone/>
-            </a:pPr>
-            <a:r>
-              <a:rPr lang="en-US" sz="1100" dirty="0">
+            <a:endParaRPr lang="en-US" sz="1400" dirty="0"/>
+          </a:p>
+          <a:p>
+            <a:pPr indent="0" marL="0">
+              <a:buNone/>
+            </a:pPr>
+            <a:r>
+              <a:rPr lang="en-US" sz="1400" dirty="0">
                 <a:solidFill>
                   <a:srgbClr val="E8D8A8"/>
                 </a:solidFill>
@@ -8007,7 +8007,7 @@
               </a:rPr>
               <a:t>Troubadours and trouvères sing of fin' amors; AAB form predominates</a:t>
             </a:r>
-            <a:endParaRPr lang="en-US" sz="1100" dirty="0"/>
+            <a:endParaRPr lang="en-US" sz="1400" dirty="0"/>
           </a:p>
         </p:txBody>
       </p:sp>
@@ -8061,7 +8061,7 @@
                   <a:srgbClr val="000000"/>
                 </a:solidFill>
               </a:rPr>
-              <a:t>🌍</a:t>
+              <a:t>■</a:t>
             </a:r>
             <a:endParaRPr lang="en-US" sz="2000" dirty="0"/>
           </a:p>
@@ -8085,14 +8085,14 @@
           <a:ln/>
         </p:spPr>
         <p:txBody>
-          <a:bodyPr wrap="square" lIns="0" tIns="0" rIns="0" bIns="0" rtlCol="0" anchor="ctr"/>
-          <a:lstStyle/>
-          <a:p>
-            <a:pPr indent="0" marL="0">
-              <a:buNone/>
-            </a:pPr>
-            <a:r>
-              <a:rPr lang="en-US" sz="1100" dirty="0">
+          <a:bodyPr wrap="square" lIns="0" tIns="0" rIns="0" bIns="0" rtlCol="0" anchor="t"/>
+          <a:lstStyle/>
+          <a:p>
+            <a:pPr indent="0" marL="0">
+              <a:buNone/>
+            </a:pPr>
+            <a:r>
+              <a:rPr lang="en-US" sz="1400" dirty="0">
                 <a:solidFill>
                   <a:srgbClr val="E8D8A8"/>
                 </a:solidFill>
@@ -8102,14 +8102,14 @@
               </a:rPr>
               <a:t>傳統傳播：英國（法語為王室語言）、德國 Minnesinger（Bar Form）、義大利 lauda、西班牙 Cantigas</a:t>
             </a:r>
-            <a:endParaRPr lang="en-US" sz="1100" dirty="0"/>
-          </a:p>
-          <a:p>
-            <a:pPr indent="0" marL="0">
-              <a:buNone/>
-            </a:pPr>
-            <a:r>
-              <a:rPr lang="en-US" sz="1100" dirty="0">
+            <a:endParaRPr lang="en-US" sz="1400" dirty="0"/>
+          </a:p>
+          <a:p>
+            <a:pPr indent="0" marL="0">
+              <a:buNone/>
+            </a:pPr>
+            <a:r>
+              <a:rPr lang="en-US" sz="1400" dirty="0">
                 <a:solidFill>
                   <a:srgbClr val="E8D8A8"/>
                 </a:solidFill>
@@ -8119,7 +8119,7 @@
               </a:rPr>
               <a:t>Tradition spreads: England, German Minnesinger, Italian lauda, Spanish Cantigas</a:t>
             </a:r>
-            <a:endParaRPr lang="en-US" sz="1100" dirty="0"/>
+            <a:endParaRPr lang="en-US" sz="1400" dirty="0"/>
           </a:p>
         </p:txBody>
       </p:sp>
@@ -8173,7 +8173,7 @@
                   <a:srgbClr val="000000"/>
                 </a:solidFill>
               </a:rPr>
-              <a:t>💃</a:t>
+              <a:t>■</a:t>
             </a:r>
             <a:endParaRPr lang="en-US" sz="2000" dirty="0"/>
           </a:p>
@@ -8197,14 +8197,14 @@
           <a:ln/>
         </p:spPr>
         <p:txBody>
-          <a:bodyPr wrap="square" lIns="0" tIns="0" rIns="0" bIns="0" rtlCol="0" anchor="ctr"/>
-          <a:lstStyle/>
-          <a:p>
-            <a:pPr indent="0" marL="0">
-              <a:buNone/>
-            </a:pPr>
-            <a:r>
-              <a:rPr lang="en-US" sz="1100" dirty="0">
+          <a:bodyPr wrap="square" lIns="0" tIns="0" rIns="0" bIns="0" rtlCol="0" anchor="t"/>
+          <a:lstStyle/>
+          <a:p>
+            <a:pPr indent="0" marL="0">
+              <a:buNone/>
+            </a:pPr>
+            <a:r>
+              <a:rPr lang="en-US" sz="1400" dirty="0">
                 <a:solidFill>
                   <a:srgbClr val="E8D8A8"/>
                 </a:solidFill>
@@ -8214,14 +8214,14 @@
               </a:rPr>
               <a:t>中世紀樂器類別齊備（弦木管銅管打擊管風琴）；Estampie 為現存最早的西方記譜器樂舞曲</a:t>
             </a:r>
-            <a:endParaRPr lang="en-US" sz="1100" dirty="0"/>
-          </a:p>
-          <a:p>
-            <a:pPr indent="0" marL="0">
-              <a:buNone/>
-            </a:pPr>
-            <a:r>
-              <a:rPr lang="en-US" sz="1100" dirty="0">
+            <a:endParaRPr lang="en-US" sz="1400" dirty="0"/>
+          </a:p>
+          <a:p>
+            <a:pPr indent="0" marL="0">
+              <a:buNone/>
+            </a:pPr>
+            <a:r>
+              <a:rPr lang="en-US" sz="1400" dirty="0">
                 <a:solidFill>
                   <a:srgbClr val="E8D8A8"/>
                 </a:solidFill>
@@ -8231,7 +8231,7 @@
               </a:rPr>
               <a:t>Full medieval instrument palette; Estampie = earliest notated Western instrumental dance</a:t>
             </a:r>
-            <a:endParaRPr lang="en-US" sz="1100" dirty="0"/>
+            <a:endParaRPr lang="en-US" sz="1400" dirty="0"/>
           </a:p>
         </p:txBody>
       </p:sp>
@@ -8392,7 +8392,7 @@
         <p:spPr>
           <a:xfrm>
             <a:off x="365760" y="960120"/>
-            <a:ext cx="3931920" cy="2286000"/>
+            <a:ext cx="8412480" cy="1874520"/>
           </a:xfrm>
           <a:prstGeom prst="rect">
             <a:avLst/>
@@ -8411,17 +8411,17 @@
         </p:nvSpPr>
         <p:spPr>
           <a:xfrm>
-            <a:off x="502920" y="1024128"/>
-            <a:ext cx="3657600" cy="365760"/>
-          </a:xfrm>
-          <a:prstGeom prst="rect">
-            <a:avLst/>
-          </a:prstGeom>
-          <a:noFill/>
-          <a:ln/>
-        </p:spPr>
-        <p:txBody>
-          <a:bodyPr wrap="square" rtlCol="0" anchor="ctr"/>
+            <a:off x="502920" y="1005840"/>
+            <a:ext cx="8138160" cy="274320"/>
+          </a:xfrm>
+          <a:prstGeom prst="rect">
+            <a:avLst/>
+          </a:prstGeom>
+          <a:noFill/>
+          <a:ln/>
+        </p:spPr>
+        <p:txBody>
+          <a:bodyPr wrap="square" lIns="0" tIns="0" rIns="0" bIns="0" rtlCol="0" anchor="t"/>
           <a:lstStyle/>
           <a:p>
             <a:pPr indent="0" marL="0">
@@ -8436,7 +8436,7 @@
                 <a:ea typeface="Georgia" pitchFamily="34" charset="-122"/>
                 <a:cs typeface="Georgia" pitchFamily="34" charset="-120"/>
               </a:rPr>
-              <a:t>🎧 聆聽 YouTube</a:t>
+              <a:t>■ 聆聽 YouTube</a:t>
             </a:r>
             <a:endParaRPr lang="en-US" sz="1400" dirty="0"/>
           </a:p>
@@ -8450,28 +8450,25 @@
         </p:nvSpPr>
         <p:spPr>
           <a:xfrm>
-            <a:off x="502920" y="1426464"/>
-            <a:ext cx="3657600" cy="1691640"/>
-          </a:xfrm>
-          <a:prstGeom prst="rect">
-            <a:avLst/>
-          </a:prstGeom>
-          <a:noFill/>
-          <a:ln/>
-        </p:spPr>
-        <p:txBody>
-          <a:bodyPr wrap="square" rtlCol="0" anchor="ctr"/>
+            <a:off x="502920" y="1280160"/>
+            <a:ext cx="8138160" cy="1508760"/>
+          </a:xfrm>
+          <a:prstGeom prst="rect">
+            <a:avLst/>
+          </a:prstGeom>
+          <a:noFill/>
+          <a:ln/>
+        </p:spPr>
+        <p:txBody>
+          <a:bodyPr wrap="square" lIns="0" tIns="0" rIns="0" bIns="0" rtlCol="0" anchor="t"/>
           <a:lstStyle/>
           <a:p>
             <a:pPr marL="342900" indent="-342900">
-              <a:spcAft>
-                <a:spcPts val="300"/>
-              </a:spcAft>
               <a:buSzPct val="100000"/>
               <a:buChar char="•"/>
             </a:pPr>
             <a:r>
-              <a:rPr lang="en-US" sz="1000" dirty="0">
+              <a:rPr lang="en-US" sz="1400" dirty="0">
                 <a:solidFill>
                   <a:srgbClr val="FBF5E6"/>
                 </a:solidFill>
@@ -8481,18 +8478,15 @@
               </a:rPr>
               <a:t>Bernart — Can vei la lauzeta mover (NAWM 8)  youtu.be/wjwDTer7R5Y</a:t>
             </a:r>
-            <a:endParaRPr lang="en-US" sz="1000" dirty="0"/>
+            <a:endParaRPr lang="en-US" sz="1400" dirty="0"/>
           </a:p>
           <a:p>
             <a:pPr marL="342900" indent="-342900">
-              <a:spcAft>
-                <a:spcPts val="300"/>
-              </a:spcAft>
               <a:buSzPct val="100000"/>
               <a:buChar char="•"/>
             </a:pPr>
             <a:r>
-              <a:rPr lang="en-US" sz="1000" dirty="0">
+              <a:rPr lang="en-US" sz="1400" dirty="0">
                 <a:solidFill>
                   <a:srgbClr val="FBF5E6"/>
                 </a:solidFill>
@@ -8502,18 +8496,15 @@
               </a:rPr>
               <a:t>Comtessa de Dia — A chantar (NAWM 9)  youtu.be/0aZcf5S9HGk</a:t>
             </a:r>
-            <a:endParaRPr lang="en-US" sz="1000" dirty="0"/>
+            <a:endParaRPr lang="en-US" sz="1400" dirty="0"/>
           </a:p>
           <a:p>
             <a:pPr marL="342900" indent="-342900">
-              <a:spcAft>
-                <a:spcPts val="300"/>
-              </a:spcAft>
               <a:buSzPct val="100000"/>
               <a:buChar char="•"/>
             </a:pPr>
             <a:r>
-              <a:rPr lang="en-US" sz="1000" dirty="0">
+              <a:rPr lang="en-US" sz="1400" dirty="0">
                 <a:solidFill>
                   <a:srgbClr val="FBF5E6"/>
                 </a:solidFill>
@@ -8523,18 +8514,15 @@
               </a:rPr>
               <a:t>Adam de la Halle — Robins m'aime (NAWM 10)  youtu.be/zNNm-wnfZ-U</a:t>
             </a:r>
-            <a:endParaRPr lang="en-US" sz="1000" dirty="0"/>
+            <a:endParaRPr lang="en-US" sz="1400" dirty="0"/>
           </a:p>
           <a:p>
             <a:pPr marL="342900" indent="-342900">
-              <a:spcAft>
-                <a:spcPts val="300"/>
-              </a:spcAft>
               <a:buSzPct val="100000"/>
               <a:buChar char="•"/>
             </a:pPr>
             <a:r>
-              <a:rPr lang="en-US" sz="1000" dirty="0">
+              <a:rPr lang="en-US" sz="1400" dirty="0">
                 <a:solidFill>
                   <a:srgbClr val="FBF5E6"/>
                 </a:solidFill>
@@ -8544,18 +8532,15 @@
               </a:rPr>
               <a:t>Walther — Palästinalied (NAWM 11)  youtu.be/zXoXcAToCBE</a:t>
             </a:r>
-            <a:endParaRPr lang="en-US" sz="1000" dirty="0"/>
+            <a:endParaRPr lang="en-US" sz="1400" dirty="0"/>
           </a:p>
           <a:p>
             <a:pPr marL="342900" indent="-342900">
-              <a:spcAft>
-                <a:spcPts val="300"/>
-              </a:spcAft>
               <a:buSzPct val="100000"/>
               <a:buChar char="•"/>
             </a:pPr>
             <a:r>
-              <a:rPr lang="en-US" sz="1000" dirty="0">
+              <a:rPr lang="en-US" sz="1400" dirty="0">
                 <a:solidFill>
                   <a:srgbClr val="FBF5E6"/>
                 </a:solidFill>
@@ -8565,18 +8550,15 @@
               </a:rPr>
               <a:t>Cantiga 159 — Non sofre Sta. María (NAWM 12)  youtu.be/RGK9bqWctKE</a:t>
             </a:r>
-            <a:endParaRPr lang="en-US" sz="1000" dirty="0"/>
+            <a:endParaRPr lang="en-US" sz="1400" dirty="0"/>
           </a:p>
           <a:p>
             <a:pPr marL="342900" indent="-342900">
-              <a:spcAft>
-                <a:spcPts val="300"/>
-              </a:spcAft>
               <a:buSzPct val="100000"/>
               <a:buChar char="•"/>
             </a:pPr>
             <a:r>
-              <a:rPr lang="en-US" sz="1000" dirty="0">
+              <a:rPr lang="en-US" sz="1400" dirty="0">
                 <a:solidFill>
                   <a:srgbClr val="FBF5E6"/>
                 </a:solidFill>
@@ -8586,7 +8568,7 @@
               </a:rPr>
               <a:t>La quarte estampie royal (NAWM 13)  youtu.be/rXqgEnrgtSg</a:t>
             </a:r>
-            <a:endParaRPr lang="en-US" sz="1000" dirty="0"/>
+            <a:endParaRPr lang="en-US" sz="1400" dirty="0"/>
           </a:p>
         </p:txBody>
       </p:sp>
@@ -8598,8 +8580,8 @@
         </p:nvSpPr>
         <p:spPr>
           <a:xfrm>
-            <a:off x="4480560" y="960120"/>
-            <a:ext cx="4297680" cy="2286000"/>
+            <a:off x="365760" y="2926080"/>
+            <a:ext cx="8412480" cy="1097280"/>
           </a:xfrm>
           <a:prstGeom prst="rect">
             <a:avLst/>
@@ -8618,17 +8600,17 @@
         </p:nvSpPr>
         <p:spPr>
           <a:xfrm>
-            <a:off x="4617720" y="1024128"/>
-            <a:ext cx="4023360" cy="365760"/>
-          </a:xfrm>
-          <a:prstGeom prst="rect">
-            <a:avLst/>
-          </a:prstGeom>
-          <a:noFill/>
-          <a:ln/>
-        </p:spPr>
-        <p:txBody>
-          <a:bodyPr wrap="square" rtlCol="0" anchor="ctr"/>
+            <a:off x="502920" y="2962656"/>
+            <a:ext cx="8138160" cy="256032"/>
+          </a:xfrm>
+          <a:prstGeom prst="rect">
+            <a:avLst/>
+          </a:prstGeom>
+          <a:noFill/>
+          <a:ln/>
+        </p:spPr>
+        <p:txBody>
+          <a:bodyPr wrap="square" lIns="0" tIns="0" rIns="0" bIns="0" rtlCol="0" anchor="t"/>
           <a:lstStyle/>
           <a:p>
             <a:pPr indent="0" marL="0">
@@ -8643,7 +8625,7 @@
                 <a:ea typeface="Georgia" pitchFamily="34" charset="-122"/>
                 <a:cs typeface="Georgia" pitchFamily="34" charset="-120"/>
               </a:rPr>
-              <a:t>📖 閱讀 Read</a:t>
+              <a:t>■ 閱讀 Read</a:t>
             </a:r>
             <a:endParaRPr lang="en-US" sz="1400" dirty="0"/>
           </a:p>
@@ -8657,28 +8639,25 @@
         </p:nvSpPr>
         <p:spPr>
           <a:xfrm>
-            <a:off x="4617720" y="1426464"/>
-            <a:ext cx="4023360" cy="1691640"/>
-          </a:xfrm>
-          <a:prstGeom prst="rect">
-            <a:avLst/>
-          </a:prstGeom>
-          <a:noFill/>
-          <a:ln/>
-        </p:spPr>
-        <p:txBody>
-          <a:bodyPr wrap="square" rtlCol="0" anchor="ctr"/>
+            <a:off x="502920" y="3236976"/>
+            <a:ext cx="4023360" cy="749808"/>
+          </a:xfrm>
+          <a:prstGeom prst="rect">
+            <a:avLst/>
+          </a:prstGeom>
+          <a:noFill/>
+          <a:ln/>
+        </p:spPr>
+        <p:txBody>
+          <a:bodyPr wrap="square" lIns="0" tIns="0" rIns="0" bIns="0" rtlCol="0" anchor="t"/>
           <a:lstStyle/>
           <a:p>
             <a:pPr marL="342900" indent="-342900">
-              <a:spcAft>
-                <a:spcPts val="300"/>
-              </a:spcAft>
               <a:buSzPct val="100000"/>
               <a:buChar char="•"/>
             </a:pPr>
             <a:r>
-              <a:rPr lang="en-US" sz="1000" dirty="0">
+              <a:rPr lang="en-US" sz="1400" dirty="0">
                 <a:solidFill>
                   <a:srgbClr val="FBF5E6"/>
                 </a:solidFill>
@@ -8686,20 +8665,17 @@
                 <a:ea typeface="Calibri" pitchFamily="34" charset="-122"/>
                 <a:cs typeface="Calibri" pitchFamily="34" charset="-120"/>
               </a:rPr>
-              <a:t>Paden &amp; Paden — Troubadour Poems from the South of France</a:t>
-            </a:r>
-            <a:endParaRPr lang="en-US" sz="1000" dirty="0"/>
+              <a:t>Paden — Troubadour Poems</a:t>
+            </a:r>
+            <a:endParaRPr lang="en-US" sz="1400" dirty="0"/>
           </a:p>
           <a:p>
             <a:pPr marL="342900" indent="-342900">
-              <a:spcAft>
-                <a:spcPts val="300"/>
-              </a:spcAft>
               <a:buSzPct val="100000"/>
               <a:buChar char="•"/>
             </a:pPr>
             <a:r>
-              <a:rPr lang="en-US" sz="1000" dirty="0">
+              <a:rPr lang="en-US" sz="1400" dirty="0">
                 <a:solidFill>
                   <a:srgbClr val="FBF5E6"/>
                 </a:solidFill>
@@ -8707,20 +8683,17 @@
                 <a:ea typeface="Calibri" pitchFamily="34" charset="-122"/>
                 <a:cs typeface="Calibri" pitchFamily="34" charset="-120"/>
               </a:rPr>
-              <a:t>Samuel Rosenberg — Songs of the Troubadours and Trouvères</a:t>
-            </a:r>
-            <a:endParaRPr lang="en-US" sz="1000" dirty="0"/>
+              <a:t>Rosenberg — Songs of the Trouvères</a:t>
+            </a:r>
+            <a:endParaRPr lang="en-US" sz="1400" dirty="0"/>
           </a:p>
           <a:p>
             <a:pPr marL="342900" indent="-342900">
-              <a:spcAft>
-                <a:spcPts val="300"/>
-              </a:spcAft>
               <a:buSzPct val="100000"/>
               <a:buChar char="•"/>
             </a:pPr>
             <a:r>
-              <a:rPr lang="en-US" sz="1000" dirty="0">
+              <a:rPr lang="en-US" sz="1400" dirty="0">
                 <a:solidFill>
                   <a:srgbClr val="FBF5E6"/>
                 </a:solidFill>
@@ -8728,20 +8701,39 @@
                 <a:ea typeface="Calibri" pitchFamily="34" charset="-122"/>
                 <a:cs typeface="Calibri" pitchFamily="34" charset="-120"/>
               </a:rPr>
-              <a:t>John Stevens — Words and Music in the Middle Ages</a:t>
-            </a:r>
-            <a:endParaRPr lang="en-US" sz="1000" dirty="0"/>
-          </a:p>
+              <a:t>Stevens — Words and Music</a:t>
+            </a:r>
+            <a:endParaRPr lang="en-US" sz="1400" dirty="0"/>
+          </a:p>
+        </p:txBody>
+      </p:sp>
+      <p:sp>
+        <p:nvSpPr>
+          <p:cNvPr id="12" name="Text 10"/>
+          <p:cNvSpPr/>
+          <p:nvPr/>
+        </p:nvSpPr>
+        <p:spPr>
+          <a:xfrm>
+            <a:off x="4617720" y="3236976"/>
+            <a:ext cx="4023360" cy="749808"/>
+          </a:xfrm>
+          <a:prstGeom prst="rect">
+            <a:avLst/>
+          </a:prstGeom>
+          <a:noFill/>
+          <a:ln/>
+        </p:spPr>
+        <p:txBody>
+          <a:bodyPr wrap="square" lIns="0" tIns="0" rIns="0" bIns="0" rtlCol="0" anchor="t"/>
+          <a:lstStyle/>
           <a:p>
             <a:pPr marL="342900" indent="-342900">
-              <a:spcAft>
-                <a:spcPts val="300"/>
-              </a:spcAft>
               <a:buSzPct val="100000"/>
               <a:buChar char="•"/>
             </a:pPr>
             <a:r>
-              <a:rPr lang="en-US" sz="1000" dirty="0">
+              <a:rPr lang="en-US" sz="1400" dirty="0">
                 <a:solidFill>
                   <a:srgbClr val="FBF5E6"/>
                 </a:solidFill>
@@ -8749,20 +8741,17 @@
                 <a:ea typeface="Calibri" pitchFamily="34" charset="-122"/>
                 <a:cs typeface="Calibri" pitchFamily="34" charset="-120"/>
               </a:rPr>
-              <a:t>Christopher Page — The Owl and the Nightingale</a:t>
-            </a:r>
-            <a:endParaRPr lang="en-US" sz="1000" dirty="0"/>
+              <a:t>Page — The Owl and the Nightingale</a:t>
+            </a:r>
+            <a:endParaRPr lang="en-US" sz="1400" dirty="0"/>
           </a:p>
           <a:p>
             <a:pPr marL="342900" indent="-342900">
-              <a:spcAft>
-                <a:spcPts val="300"/>
-              </a:spcAft>
               <a:buSzPct val="100000"/>
               <a:buChar char="•"/>
             </a:pPr>
             <a:r>
-              <a:rPr lang="en-US" sz="1000" dirty="0">
+              <a:rPr lang="en-US" sz="1400" dirty="0">
                 <a:solidFill>
                   <a:srgbClr val="FBF5E6"/>
                 </a:solidFill>
@@ -8770,20 +8759,17 @@
                 <a:ea typeface="Calibri" pitchFamily="34" charset="-122"/>
                 <a:cs typeface="Calibri" pitchFamily="34" charset="-120"/>
               </a:rPr>
-              <a:t>Wikipedia: Troubadour / Minnesinger / Cantigas de Santa María</a:t>
-            </a:r>
-            <a:endParaRPr lang="en-US" sz="1000" dirty="0"/>
+              <a:t>Wikipedia: Troubadour / Cantigas</a:t>
+            </a:r>
+            <a:endParaRPr lang="en-US" sz="1400" dirty="0"/>
           </a:p>
           <a:p>
             <a:pPr marL="342900" indent="-342900">
-              <a:spcAft>
-                <a:spcPts val="300"/>
-              </a:spcAft>
               <a:buSzPct val="100000"/>
               <a:buChar char="•"/>
             </a:pPr>
             <a:r>
-              <a:rPr lang="en-US" sz="1000" dirty="0">
+              <a:rPr lang="en-US" sz="1400" dirty="0">
                 <a:solidFill>
                   <a:srgbClr val="FBF5E6"/>
                 </a:solidFill>
@@ -8793,20 +8779,20 @@
               </a:rPr>
               <a:t>NAWM 8–13（Grout 樂譜集對應樂曲）</a:t>
             </a:r>
-            <a:endParaRPr lang="en-US" sz="1000" dirty="0"/>
-          </a:p>
-        </p:txBody>
-      </p:sp>
-      <p:sp>
-        <p:nvSpPr>
-          <p:cNvPr id="12" name="Shape 10"/>
-          <p:cNvSpPr/>
-          <p:nvPr/>
-        </p:nvSpPr>
-        <p:spPr>
-          <a:xfrm>
-            <a:off x="365760" y="3337560"/>
-            <a:ext cx="8412480" cy="1554480"/>
+            <a:endParaRPr lang="en-US" sz="1400" dirty="0"/>
+          </a:p>
+        </p:txBody>
+      </p:sp>
+      <p:sp>
+        <p:nvSpPr>
+          <p:cNvPr id="13" name="Shape 11"/>
+          <p:cNvSpPr/>
+          <p:nvPr/>
+        </p:nvSpPr>
+        <p:spPr>
+          <a:xfrm>
+            <a:off x="365760" y="4114800"/>
+            <a:ext cx="8412480" cy="868680"/>
           </a:xfrm>
           <a:prstGeom prst="rect">
             <a:avLst/>
@@ -8819,23 +8805,23 @@
       </p:sp>
       <p:sp>
         <p:nvSpPr>
-          <p:cNvPr id="13" name="Text 11"/>
-          <p:cNvSpPr/>
-          <p:nvPr/>
-        </p:nvSpPr>
-        <p:spPr>
-          <a:xfrm>
-            <a:off x="548640" y="3401568"/>
-            <a:ext cx="8046720" cy="365760"/>
-          </a:xfrm>
-          <a:prstGeom prst="rect">
-            <a:avLst/>
-          </a:prstGeom>
-          <a:noFill/>
-          <a:ln/>
-        </p:spPr>
-        <p:txBody>
-          <a:bodyPr wrap="square" rtlCol="0" anchor="ctr"/>
+          <p:cNvPr id="14" name="Text 12"/>
+          <p:cNvSpPr/>
+          <p:nvPr/>
+        </p:nvSpPr>
+        <p:spPr>
+          <a:xfrm>
+            <a:off x="502920" y="4151376"/>
+            <a:ext cx="8138160" cy="237744"/>
+          </a:xfrm>
+          <a:prstGeom prst="rect">
+            <a:avLst/>
+          </a:prstGeom>
+          <a:noFill/>
+          <a:ln/>
+        </p:spPr>
+        <p:txBody>
+          <a:bodyPr wrap="square" lIns="0" tIns="0" rIns="0" bIns="0" rtlCol="0" anchor="t"/>
           <a:lstStyle/>
           <a:p>
             <a:pPr indent="0" marL="0">
@@ -8850,38 +8836,38 @@
                 <a:ea typeface="Georgia" pitchFamily="34" charset="-122"/>
                 <a:cs typeface="Georgia" pitchFamily="34" charset="-120"/>
               </a:rPr>
-              <a:t>🔑 本章關鍵術語 Key Terms</a:t>
-            </a:r>
-            <a:endParaRPr lang="en-US" sz="1400" dirty="0"/>
-          </a:p>
-        </p:txBody>
-      </p:sp>
-      <p:sp>
-        <p:nvSpPr>
-          <p:cNvPr id="14" name="Text 12"/>
-          <p:cNvSpPr/>
-          <p:nvPr/>
-        </p:nvSpPr>
-        <p:spPr>
-          <a:xfrm>
-            <a:off x="548640" y="3822192"/>
-            <a:ext cx="8046720" cy="932688"/>
-          </a:xfrm>
-          <a:prstGeom prst="rect">
-            <a:avLst/>
-          </a:prstGeom>
-          <a:noFill/>
-          <a:ln/>
-        </p:spPr>
-        <p:txBody>
-          <a:bodyPr wrap="square" rtlCol="0" anchor="ctr"/>
-          <a:lstStyle/>
-          <a:p>
-            <a:pPr indent="0" marL="0">
-              <a:buNone/>
-            </a:pPr>
-            <a:r>
-              <a:rPr lang="en-US" sz="950" dirty="0">
+              <a:t>■ 本章關鍵術語 Key Terms</a:t>
+            </a:r>
+            <a:endParaRPr lang="en-US" sz="1400" dirty="0"/>
+          </a:p>
+        </p:txBody>
+      </p:sp>
+      <p:sp>
+        <p:nvSpPr>
+          <p:cNvPr id="15" name="Text 13"/>
+          <p:cNvSpPr/>
+          <p:nvPr/>
+        </p:nvSpPr>
+        <p:spPr>
+          <a:xfrm>
+            <a:off x="502920" y="4407408"/>
+            <a:ext cx="8138160" cy="548640"/>
+          </a:xfrm>
+          <a:prstGeom prst="rect">
+            <a:avLst/>
+          </a:prstGeom>
+          <a:noFill/>
+          <a:ln/>
+        </p:spPr>
+        <p:txBody>
+          <a:bodyPr wrap="square" lIns="0" tIns="0" rIns="0" bIns="0" rtlCol="0" anchor="t"/>
+          <a:lstStyle/>
+          <a:p>
+            <a:pPr indent="0" marL="0">
+              <a:buNone/>
+            </a:pPr>
+            <a:r>
+              <a:rPr lang="en-US" sz="1400" dirty="0">
                 <a:solidFill>
                   <a:srgbClr val="FBF5E6"/>
                 </a:solidFill>
@@ -8889,9 +8875,9 @@
                 <a:ea typeface="Calibri" pitchFamily="34" charset="-122"/>
                 <a:cs typeface="Calibri" pitchFamily="34" charset="-120"/>
               </a:rPr>
-              <a:t>Versus · Conductus · Goliard · Chanson de geste · Jongleur · Minstrel · Guild · Troubadour / Trobairitz · Trouvère · Langue d'oc / Langue d'oïl · Chansonnier · Contrafactum · Fin' amors · Canso · Alba · Balada · Planh · Tenso · Pastourelle · Vida · AAB form · Bar Form · Stollen / Abgesang · Minnesinger · Minnelied · Lauda · Cantiga · Vielle · Hurdy-gurdy · Psaltery · Shawm · Pipe and tabor · Portative / Positive organ · Carole · Estampie · Ouvert / Clos · Istampita · Rondeau</a:t>
-            </a:r>
-            <a:endParaRPr lang="en-US" sz="950" dirty="0"/>
+              <a:t>Troubadour / Trobairitz · Trouvère · Jongleur · Minstrel · Chanson de geste · Fin' amors · Canso · AAB form · Bar Form · Minnesinger · Cantiga · Vielle · Shawm · Estampie · Istampita · Rondeau</a:t>
+            </a:r>
+            <a:endParaRPr lang="en-US" sz="1400" dirty="0"/>
           </a:p>
         </p:txBody>
       </p:sp>
@@ -9076,7 +9062,7 @@
                   <a:srgbClr val="000000"/>
                 </a:solidFill>
               </a:rPr>
-              <a:t>🏰</a:t>
+              <a:t>■</a:t>
             </a:r>
             <a:endParaRPr lang="en-US" sz="2000" dirty="0"/>
           </a:p>
@@ -9139,14 +9125,14 @@
           <a:ln/>
         </p:spPr>
         <p:txBody>
-          <a:bodyPr wrap="square" lIns="0" tIns="0" rIns="0" bIns="0" rtlCol="0" anchor="ctr"/>
-          <a:lstStyle/>
-          <a:p>
-            <a:pPr indent="0" marL="0">
-              <a:buNone/>
-            </a:pPr>
-            <a:r>
-              <a:rPr lang="en-US" sz="1100" dirty="0">
+          <a:bodyPr wrap="square" lIns="0" tIns="0" rIns="0" bIns="0" rtlCol="0" anchor="t"/>
+          <a:lstStyle/>
+          <a:p>
+            <a:pPr indent="0" marL="0">
+              <a:buNone/>
+            </a:pPr>
+            <a:r>
+              <a:rPr lang="en-US" sz="1400" dirty="0">
                 <a:solidFill>
                   <a:srgbClr val="5C3A28"/>
                 </a:solidFill>
@@ -9156,7 +9142,7 @@
               </a:rPr>
               <a:t>查理曼加冕、封建領主、城市興起、大學出現、識字率提升</a:t>
             </a:r>
-            <a:endParaRPr lang="en-US" sz="1100" dirty="0"/>
+            <a:endParaRPr lang="en-US" sz="1400" dirty="0"/>
           </a:p>
         </p:txBody>
       </p:sp>
@@ -9210,7 +9196,7 @@
                   <a:srgbClr val="000000"/>
                 </a:solidFill>
               </a:rPr>
-              <a:t>📜</a:t>
+              <a:t>■</a:t>
             </a:r>
             <a:endParaRPr lang="en-US" sz="2000" dirty="0"/>
           </a:p>
@@ -9273,14 +9259,14 @@
           <a:ln/>
         </p:spPr>
         <p:txBody>
-          <a:bodyPr wrap="square" lIns="0" tIns="0" rIns="0" bIns="0" rtlCol="0" anchor="ctr"/>
-          <a:lstStyle/>
-          <a:p>
-            <a:pPr indent="0" marL="0">
-              <a:buNone/>
-            </a:pPr>
-            <a:r>
-              <a:rPr lang="en-US" sz="1100" dirty="0">
+          <a:bodyPr wrap="square" lIns="0" tIns="0" rIns="0" bIns="0" rtlCol="0" anchor="t"/>
+          <a:lstStyle/>
+          <a:p>
+            <a:pPr indent="0" marL="0">
+              <a:buNone/>
+            </a:pPr>
+            <a:r>
+              <a:rPr lang="en-US" sz="1400" dirty="0">
                 <a:solidFill>
                   <a:srgbClr val="5C3A28"/>
                 </a:solidFill>
@@ -9290,7 +9276,7 @@
               </a:rPr>
               <a:t>Versus、Conductus、Goliard 學者歌；方言史詩 Chanson de geste</a:t>
             </a:r>
-            <a:endParaRPr lang="en-US" sz="1100" dirty="0"/>
+            <a:endParaRPr lang="en-US" sz="1400" dirty="0"/>
           </a:p>
         </p:txBody>
       </p:sp>
@@ -9344,7 +9330,7 @@
                   <a:srgbClr val="000000"/>
                 </a:solidFill>
               </a:rPr>
-              <a:t>🎭</a:t>
+              <a:t>■</a:t>
             </a:r>
             <a:endParaRPr lang="en-US" sz="2000" dirty="0"/>
           </a:p>
@@ -9407,14 +9393,14 @@
           <a:ln/>
         </p:spPr>
         <p:txBody>
-          <a:bodyPr wrap="square" lIns="0" tIns="0" rIns="0" bIns="0" rtlCol="0" anchor="ctr"/>
-          <a:lstStyle/>
-          <a:p>
-            <a:pPr indent="0" marL="0">
-              <a:buNone/>
-            </a:pPr>
-            <a:r>
-              <a:rPr lang="en-US" sz="1100" dirty="0">
+          <a:bodyPr wrap="square" lIns="0" tIns="0" rIns="0" bIns="0" rtlCol="0" anchor="t"/>
+          <a:lstStyle/>
+          <a:p>
+            <a:pPr indent="0" marL="0">
+              <a:buNone/>
+            </a:pPr>
+            <a:r>
+              <a:rPr lang="en-US" sz="1400" dirty="0">
                 <a:solidFill>
                   <a:srgbClr val="5C3A28"/>
                 </a:solidFill>
@@ -9424,7 +9410,7 @@
               </a:rPr>
               <a:t>從被視為賤民到組織行會（巴黎 1321）——音樂職業化的起點</a:t>
             </a:r>
-            <a:endParaRPr lang="en-US" sz="1100" dirty="0"/>
+            <a:endParaRPr lang="en-US" sz="1400" dirty="0"/>
           </a:p>
         </p:txBody>
       </p:sp>
@@ -9478,7 +9464,7 @@
                   <a:srgbClr val="000000"/>
                 </a:solidFill>
               </a:rPr>
-              <a:t>💘</a:t>
+              <a:t>■</a:t>
             </a:r>
             <a:endParaRPr lang="en-US" sz="2000" dirty="0"/>
           </a:p>
@@ -9541,14 +9527,14 @@
           <a:ln/>
         </p:spPr>
         <p:txBody>
-          <a:bodyPr wrap="square" lIns="0" tIns="0" rIns="0" bIns="0" rtlCol="0" anchor="ctr"/>
-          <a:lstStyle/>
-          <a:p>
-            <a:pPr indent="0" marL="0">
-              <a:buNone/>
-            </a:pPr>
-            <a:r>
-              <a:rPr lang="en-US" sz="1100" dirty="0">
+          <a:bodyPr wrap="square" lIns="0" tIns="0" rIns="0" bIns="0" rtlCol="0" anchor="t"/>
+          <a:lstStyle/>
+          <a:p>
+            <a:pPr indent="0" marL="0">
+              <a:buNone/>
+            </a:pPr>
+            <a:r>
+              <a:rPr lang="en-US" sz="1400" dirty="0">
                 <a:solidFill>
                   <a:srgbClr val="5C3A28"/>
                 </a:solidFill>
@@ -9558,7 +9544,7 @@
               </a:rPr>
               <a:t>南法 Occitan 與北法古法語的抒情詩人；「fine amour」典範</a:t>
             </a:r>
-            <a:endParaRPr lang="en-US" sz="1100" dirty="0"/>
+            <a:endParaRPr lang="en-US" sz="1400" dirty="0"/>
           </a:p>
         </p:txBody>
       </p:sp>
@@ -9612,7 +9598,7 @@
                   <a:srgbClr val="000000"/>
                 </a:solidFill>
               </a:rPr>
-              <a:t>🌍</a:t>
+              <a:t>■</a:t>
             </a:r>
             <a:endParaRPr lang="en-US" sz="2000" dirty="0"/>
           </a:p>
@@ -9675,14 +9661,14 @@
           <a:ln/>
         </p:spPr>
         <p:txBody>
-          <a:bodyPr wrap="square" lIns="0" tIns="0" rIns="0" bIns="0" rtlCol="0" anchor="ctr"/>
-          <a:lstStyle/>
-          <a:p>
-            <a:pPr indent="0" marL="0">
-              <a:buNone/>
-            </a:pPr>
-            <a:r>
-              <a:rPr lang="en-US" sz="1100" dirty="0">
+          <a:bodyPr wrap="square" lIns="0" tIns="0" rIns="0" bIns="0" rtlCol="0" anchor="t"/>
+          <a:lstStyle/>
+          <a:p>
+            <a:pPr indent="0" marL="0">
+              <a:buNone/>
+            </a:pPr>
+            <a:r>
+              <a:rPr lang="en-US" sz="1400" dirty="0">
                 <a:solidFill>
                   <a:srgbClr val="5C3A28"/>
                 </a:solidFill>
@@ -9692,7 +9678,7 @@
               </a:rPr>
               <a:t>Minnesinger（德）、Lauda（義）、Cantigas de Santa María（西）</a:t>
             </a:r>
-            <a:endParaRPr lang="en-US" sz="1100" dirty="0"/>
+            <a:endParaRPr lang="en-US" sz="1400" dirty="0"/>
           </a:p>
         </p:txBody>
       </p:sp>
@@ -9746,7 +9732,7 @@
                   <a:srgbClr val="000000"/>
                 </a:solidFill>
               </a:rPr>
-              <a:t>💃</a:t>
+              <a:t>■</a:t>
             </a:r>
             <a:endParaRPr lang="en-US" sz="2000" dirty="0"/>
           </a:p>
@@ -9809,14 +9795,14 @@
           <a:ln/>
         </p:spPr>
         <p:txBody>
-          <a:bodyPr wrap="square" lIns="0" tIns="0" rIns="0" bIns="0" rtlCol="0" anchor="ctr"/>
-          <a:lstStyle/>
-          <a:p>
-            <a:pPr indent="0" marL="0">
-              <a:buNone/>
-            </a:pPr>
-            <a:r>
-              <a:rPr lang="en-US" sz="1100" dirty="0">
+          <a:bodyPr wrap="square" lIns="0" tIns="0" rIns="0" bIns="0" rtlCol="0" anchor="t"/>
+          <a:lstStyle/>
+          <a:p>
+            <a:pPr indent="0" marL="0">
+              <a:buNone/>
+            </a:pPr>
+            <a:r>
+              <a:rPr lang="en-US" sz="1400" dirty="0">
                 <a:solidFill>
                   <a:srgbClr val="5C3A28"/>
                 </a:solidFill>
@@ -9826,7 +9812,7 @@
               </a:rPr>
               <a:t>Vielle、Psaltery、風笛、管風琴；Carole 圓舞、Estampie</a:t>
             </a:r>
-            <a:endParaRPr lang="en-US" sz="1100" dirty="0"/>
+            <a:endParaRPr lang="en-US" sz="1400" dirty="0"/>
           </a:p>
         </p:txBody>
       </p:sp>
@@ -10053,7 +10039,7 @@
                 <a:ea typeface="Georgia" pitchFamily="34" charset="-122"/>
                 <a:cs typeface="Georgia" pitchFamily="34" charset="-120"/>
               </a:rPr>
-              <a:t>🌍 三個繼承羅馬的帝國 Three Successors to Rome</a:t>
+              <a:t>■ 三個繼承羅馬的帝國 Three Successors to Rome</a:t>
             </a:r>
             <a:endParaRPr lang="en-US" sz="1400" dirty="0"/>
           </a:p>
@@ -10077,14 +10063,14 @@
           <a:ln/>
         </p:spPr>
         <p:txBody>
-          <a:bodyPr wrap="square" rtlCol="0" anchor="ctr"/>
-          <a:lstStyle/>
-          <a:p>
-            <a:pPr indent="0" marL="0">
-              <a:buNone/>
-            </a:pPr>
-            <a:r>
-              <a:rPr lang="en-US" sz="1050" dirty="0">
+          <a:bodyPr wrap="square" rtlCol="0" anchor="t"/>
+          <a:lstStyle/>
+          <a:p>
+            <a:pPr indent="0" marL="0">
+              <a:buNone/>
+            </a:pPr>
+            <a:r>
+              <a:rPr lang="en-US" sz="1400" dirty="0">
                 <a:solidFill>
                   <a:srgbClr val="E8D8A8"/>
                 </a:solidFill>
@@ -10094,14 +10080,14 @@
               </a:rPr>
               <a:t>① Byzantine Empire 拜占庭：保存希臘羅馬科學與文化；多數古希臘著作因拜占庭抄寫員而倖存</a:t>
             </a:r>
-            <a:endParaRPr lang="en-US" sz="1050" dirty="0"/>
-          </a:p>
-          <a:p>
-            <a:pPr indent="0" marL="0">
-              <a:buNone/>
-            </a:pPr>
-            <a:r>
-              <a:rPr lang="en-US" sz="1050" dirty="0">
+            <a:endParaRPr lang="en-US" sz="1400" dirty="0"/>
+          </a:p>
+          <a:p>
+            <a:pPr indent="0" marL="0">
+              <a:buNone/>
+            </a:pPr>
+            <a:r>
+              <a:rPr lang="en-US" sz="1400" dirty="0">
                 <a:solidFill>
                   <a:srgbClr val="E8D8A8"/>
                 </a:solidFill>
@@ -10111,14 +10097,14 @@
               </a:rPr>
               <a:t>② Arab world 阿拉伯世界：最強盛的一支；延伸希臘哲學與科學；在醫學、化學、數學上貢獻卓著</a:t>
             </a:r>
-            <a:endParaRPr lang="en-US" sz="1050" dirty="0"/>
-          </a:p>
-          <a:p>
-            <a:pPr indent="0" marL="0">
-              <a:buNone/>
-            </a:pPr>
-            <a:r>
-              <a:rPr lang="en-US" sz="1050" dirty="0">
+            <a:endParaRPr lang="en-US" sz="1400" dirty="0"/>
+          </a:p>
+          <a:p>
+            <a:pPr indent="0" marL="0">
+              <a:buNone/>
+            </a:pPr>
+            <a:r>
+              <a:rPr lang="en-US" sz="1400" dirty="0">
                 <a:solidFill>
                   <a:srgbClr val="E8D8A8"/>
                 </a:solidFill>
@@ -10128,14 +10114,14 @@
               </a:rPr>
               <a:t>③ Western Europe 西歐：最弱最窮；800 年查理曼加冕為羅馬皇帝，宣告與拜占庭獨立</a:t>
             </a:r>
-            <a:endParaRPr lang="en-US" sz="1050" dirty="0"/>
-          </a:p>
-          <a:p>
-            <a:pPr indent="0" marL="0">
-              <a:buNone/>
-            </a:pPr>
-            <a:r>
-              <a:rPr lang="en-US" sz="1050" dirty="0">
+            <a:endParaRPr lang="en-US" sz="1400" dirty="0"/>
+          </a:p>
+          <a:p>
+            <a:pPr indent="0" marL="0">
+              <a:buNone/>
+            </a:pPr>
+            <a:r>
+              <a:rPr lang="en-US" sz="1400" dirty="0">
                 <a:solidFill>
                   <a:srgbClr val="E8D8A8"/>
                 </a:solidFill>
@@ -10145,7 +10131,7 @@
               </a:rPr>
               <a:t>    Western Europe was weakest; Charlemagne's coronation in 800 asserted independence from Byzantium</a:t>
             </a:r>
-            <a:endParaRPr lang="en-US" sz="1050" dirty="0"/>
+            <a:endParaRPr lang="en-US" sz="1400" dirty="0"/>
           </a:p>
         </p:txBody>
       </p:sp>
@@ -10202,7 +10188,7 @@
                 <a:ea typeface="Georgia" pitchFamily="34" charset="-122"/>
                 <a:cs typeface="Georgia" pitchFamily="34" charset="-120"/>
               </a:rPr>
-              <a:t>📊 社會與文化變遷 Social &amp; Cultural Developments</a:t>
+              <a:t>■ 社會與文化變遷 Social &amp; Cultural Developments</a:t>
             </a:r>
             <a:endParaRPr lang="en-US" sz="1400" dirty="0"/>
           </a:p>
@@ -10236,7 +10222,7 @@
               <a:buNone/>
             </a:pPr>
             <a:r>
-              <a:rPr lang="en-US" sz="1000" dirty="0">
+              <a:rPr lang="en-US" sz="1400" dirty="0">
                 <a:solidFill>
                   <a:srgbClr val="E8D8A8"/>
                 </a:solidFill>
@@ -10246,7 +10232,7 @@
               </a:rPr>
               <a:t>• 人口 1000–1300 年間增長三倍；農業技術進步、水車與風車普及</a:t>
             </a:r>
-            <a:endParaRPr lang="en-US" sz="1000" dirty="0"/>
+            <a:endParaRPr lang="en-US" sz="1400" dirty="0"/>
           </a:p>
           <a:p>
             <a:pPr indent="0" marL="0">
@@ -10256,7 +10242,7 @@
               <a:buNone/>
             </a:pPr>
             <a:r>
-              <a:rPr lang="en-US" sz="1000" dirty="0">
+              <a:rPr lang="en-US" sz="1400" dirty="0">
                 <a:solidFill>
                   <a:srgbClr val="E8D8A8"/>
                 </a:solidFill>
@@ -10266,7 +10252,7 @@
               </a:rPr>
               <a:t>  Population tripled 1000–1300; agricultural advances, water mills and windmills</a:t>
             </a:r>
-            <a:endParaRPr lang="en-US" sz="1000" dirty="0"/>
+            <a:endParaRPr lang="en-US" sz="1400" dirty="0"/>
           </a:p>
           <a:p>
             <a:pPr indent="0" marL="0">
@@ -10276,7 +10262,7 @@
               <a:buNone/>
             </a:pPr>
             <a:r>
-              <a:rPr lang="en-US" sz="1000" dirty="0">
+              <a:rPr lang="en-US" sz="1400" dirty="0">
                 <a:solidFill>
                   <a:srgbClr val="E8D8A8"/>
                 </a:solidFill>
@@ -10286,7 +10272,7 @@
               </a:rPr>
               <a:t>• 三階級社會：神職人員（祈禱）、貴族騎士（征戰）、農民商人（勞動）</a:t>
             </a:r>
-            <a:endParaRPr lang="en-US" sz="1000" dirty="0"/>
+            <a:endParaRPr lang="en-US" sz="1400" dirty="0"/>
           </a:p>
           <a:p>
             <a:pPr indent="0" marL="0">
@@ -10296,7 +10282,7 @@
               <a:buNone/>
             </a:pPr>
             <a:r>
-              <a:rPr lang="en-US" sz="1000" dirty="0">
+              <a:rPr lang="en-US" sz="1400" dirty="0">
                 <a:solidFill>
                   <a:srgbClr val="E8D8A8"/>
                 </a:solidFill>
@@ -10306,7 +10292,7 @@
               </a:rPr>
               <a:t>  Three estates: clergy who prayed · nobility who fought · commoners who worked</a:t>
             </a:r>
-            <a:endParaRPr lang="en-US" sz="1000" dirty="0"/>
+            <a:endParaRPr lang="en-US" sz="1400" dirty="0"/>
           </a:p>
           <a:p>
             <a:pPr indent="0" marL="0">
@@ -10316,7 +10302,7 @@
               <a:buNone/>
             </a:pPr>
             <a:r>
-              <a:rPr lang="en-US" sz="1000" dirty="0">
+              <a:rPr lang="en-US" sz="1400" dirty="0">
                 <a:solidFill>
                   <a:srgbClr val="E8D8A8"/>
                 </a:solidFill>
@@ -10326,7 +10312,7 @@
               </a:rPr>
               <a:t>• 城市興起：巴黎約 20 萬人、倫敦 7 萬、威尼斯/米蘭/佛羅倫斯各約 10 萬</a:t>
             </a:r>
-            <a:endParaRPr lang="en-US" sz="1000" dirty="0"/>
+            <a:endParaRPr lang="en-US" sz="1400" dirty="0"/>
           </a:p>
           <a:p>
             <a:pPr indent="0" marL="0">
@@ -10336,7 +10322,7 @@
               <a:buNone/>
             </a:pPr>
             <a:r>
-              <a:rPr lang="en-US" sz="1000" dirty="0">
+              <a:rPr lang="en-US" sz="1400" dirty="0">
                 <a:solidFill>
                   <a:srgbClr val="E8D8A8"/>
                 </a:solidFill>
@@ -10346,7 +10332,7 @@
               </a:rPr>
               <a:t>• 行會（guild）保護工匠；學徒制度；音樂家也開始組織行會</a:t>
             </a:r>
-            <a:endParaRPr lang="en-US" sz="1000" dirty="0"/>
+            <a:endParaRPr lang="en-US" sz="1400" dirty="0"/>
           </a:p>
           <a:p>
             <a:pPr indent="0" marL="0">
@@ -10356,7 +10342,7 @@
               <a:buNone/>
             </a:pPr>
             <a:r>
-              <a:rPr lang="en-US" sz="1000" dirty="0">
+              <a:rPr lang="en-US" sz="1400" dirty="0">
                 <a:solidFill>
                   <a:srgbClr val="E8D8A8"/>
                 </a:solidFill>
@@ -10366,7 +10352,7 @@
               </a:rPr>
               <a:t>• 大學成立：波隆那、巴黎、牛津（12 世紀起）· 識字率大幅提升</a:t>
             </a:r>
-            <a:endParaRPr lang="en-US" sz="1000" dirty="0"/>
+            <a:endParaRPr lang="en-US" sz="1400" dirty="0"/>
           </a:p>
           <a:p>
             <a:pPr indent="0" marL="0">
@@ -10376,7 +10362,7 @@
               <a:buNone/>
             </a:pPr>
             <a:r>
-              <a:rPr lang="en-US" sz="1000" dirty="0">
+              <a:rPr lang="en-US" sz="1400" dirty="0">
                 <a:solidFill>
                   <a:srgbClr val="E8D8A8"/>
                 </a:solidFill>
@@ -10386,7 +10372,7 @@
               </a:rPr>
               <a:t>• 從修道院到主教座堂學校；教會重心由鄉村移至城市</a:t>
             </a:r>
-            <a:endParaRPr lang="en-US" sz="1000" dirty="0"/>
+            <a:endParaRPr lang="en-US" sz="1400" dirty="0"/>
           </a:p>
         </p:txBody>
       </p:sp>
@@ -10519,14 +10505,14 @@
           <a:ln/>
         </p:spPr>
         <p:txBody>
-          <a:bodyPr wrap="square" lIns="0" tIns="0" rIns="0" bIns="0" rtlCol="0" anchor="ctr"/>
-          <a:lstStyle/>
-          <a:p>
-            <a:pPr indent="0" marL="0">
-              <a:buNone/>
-            </a:pPr>
-            <a:r>
-              <a:rPr lang="en-US" sz="1200" i="1" dirty="0">
+          <a:bodyPr wrap="square" lIns="0" tIns="0" rIns="0" bIns="0" rtlCol="0" anchor="t"/>
+          <a:lstStyle/>
+          <a:p>
+            <a:pPr indent="0" marL="0">
+              <a:buNone/>
+            </a:pPr>
+            <a:r>
+              <a:rPr lang="en-US" sz="1400" i="1" dirty="0">
                 <a:solidFill>
                   <a:srgbClr val="5C3A28"/>
                 </a:solidFill>
@@ -10536,7 +10522,7 @@
               </a:rPr>
               <a:t>教會之外、修道院外的中世紀歌唱傳統</a:t>
             </a:r>
-            <a:endParaRPr lang="en-US" sz="1200" dirty="0"/>
+            <a:endParaRPr lang="en-US" sz="1400" dirty="0"/>
           </a:p>
         </p:txBody>
       </p:sp>
@@ -10613,7 +10599,7 @@
                 <a:ea typeface="Georgia" pitchFamily="34" charset="-122"/>
                 <a:cs typeface="Georgia" pitchFamily="34" charset="-120"/>
               </a:rPr>
-              <a:t>📜 拉丁歌曲 Latin Song</a:t>
+              <a:t>■ 拉丁歌曲 Latin Song</a:t>
             </a:r>
             <a:endParaRPr lang="en-US" sz="1400" dirty="0"/>
           </a:p>
@@ -10657,14 +10643,14 @@
           <a:ln/>
         </p:spPr>
         <p:txBody>
-          <a:bodyPr wrap="square" rtlCol="0" anchor="ctr"/>
-          <a:lstStyle/>
-          <a:p>
-            <a:pPr indent="0" marL="0">
-              <a:buNone/>
-            </a:pPr>
-            <a:r>
-              <a:rPr lang="en-US" sz="1000" dirty="0">
+          <a:bodyPr wrap="square" rtlCol="0" anchor="t"/>
+          <a:lstStyle/>
+          <a:p>
+            <a:pPr indent="0" marL="0">
+              <a:buNone/>
+            </a:pPr>
+            <a:r>
+              <a:rPr lang="en-US" sz="1400" dirty="0">
                 <a:solidFill>
                   <a:srgbClr val="FBF5E6"/>
                 </a:solidFill>
@@ -10674,14 +10660,14 @@
               </a:rPr>
               <a:t>Versus（詩句）:</a:t>
             </a:r>
-            <a:endParaRPr lang="en-US" sz="1000" dirty="0"/>
-          </a:p>
-          <a:p>
-            <a:pPr indent="0" marL="0">
-              <a:buNone/>
-            </a:pPr>
-            <a:r>
-              <a:rPr lang="en-US" sz="1000" dirty="0">
+            <a:endParaRPr lang="en-US" sz="1400" dirty="0"/>
+          </a:p>
+          <a:p>
+            <a:pPr indent="0" marL="0">
+              <a:buNone/>
+            </a:pPr>
+            <a:r>
+              <a:rPr lang="en-US" sz="1400" dirty="0">
                 <a:solidFill>
                   <a:srgbClr val="FBF5E6"/>
                 </a:solidFill>
@@ -10691,14 +10677,14 @@
               </a:rPr>
               <a:t>• 11–13 世紀亞奎丹地區 · 多半神聖 · 押韻、規律重音</a:t>
             </a:r>
-            <a:endParaRPr lang="en-US" sz="1000" dirty="0"/>
-          </a:p>
-          <a:p>
-            <a:pPr indent="0" marL="0">
-              <a:buNone/>
-            </a:pPr>
-            <a:r>
-              <a:rPr lang="en-US" sz="1000" dirty="0">
+            <a:endParaRPr lang="en-US" sz="1400" dirty="0"/>
+          </a:p>
+          <a:p>
+            <a:pPr indent="0" marL="0">
+              <a:buNone/>
+            </a:pPr>
+            <a:r>
+              <a:rPr lang="en-US" sz="1400" dirty="0">
                 <a:solidFill>
                   <a:srgbClr val="FBF5E6"/>
                 </a:solidFill>
@@ -10708,14 +10694,14 @@
               </a:rPr>
               <a:t>• 主題：耶穌誕生、聖母、道成肉身</a:t>
             </a:r>
-            <a:endParaRPr lang="en-US" sz="1000" dirty="0"/>
-          </a:p>
-          <a:p>
-            <a:pPr indent="0" marL="0">
-              <a:buNone/>
-            </a:pPr>
-            <a:r>
-              <a:rPr lang="en-US" sz="1000" dirty="0">
+            <a:endParaRPr lang="en-US" sz="1400" dirty="0"/>
+          </a:p>
+          <a:p>
+            <a:pPr indent="0" marL="0">
+              <a:buNone/>
+            </a:pPr>
+            <a:r>
+              <a:rPr lang="en-US" sz="1400" dirty="0">
                 <a:solidFill>
                   <a:srgbClr val="FBF5E6"/>
                 </a:solidFill>
@@ -10725,20 +10711,20 @@
               </a:rPr>
               <a:t>• 影響了 troubadour 與亞奎丹複音</a:t>
             </a:r>
-            <a:endParaRPr lang="en-US" sz="1000" dirty="0"/>
-          </a:p>
-          <a:p>
-            <a:pPr indent="0" marL="0">
-              <a:buNone/>
-            </a:pPr>
-            <a:endParaRPr lang="en-US" sz="1000" dirty="0"/>
-          </a:p>
-          <a:p>
-            <a:pPr indent="0" marL="0">
-              <a:buNone/>
-            </a:pPr>
-            <a:r>
-              <a:rPr lang="en-US" sz="1000" dirty="0">
+            <a:endParaRPr lang="en-US" sz="1400" dirty="0"/>
+          </a:p>
+          <a:p>
+            <a:pPr indent="0" marL="0">
+              <a:buNone/>
+            </a:pPr>
+            <a:endParaRPr lang="en-US" sz="1400" dirty="0"/>
+          </a:p>
+          <a:p>
+            <a:pPr indent="0" marL="0">
+              <a:buNone/>
+            </a:pPr>
+            <a:r>
+              <a:rPr lang="en-US" sz="1400" dirty="0">
                 <a:solidFill>
                   <a:srgbClr val="FBF5E6"/>
                 </a:solidFill>
@@ -10748,14 +10734,14 @@
               </a:rPr>
               <a:t>Conductus（導引歌）:</a:t>
             </a:r>
-            <a:endParaRPr lang="en-US" sz="1000" dirty="0"/>
-          </a:p>
-          <a:p>
-            <a:pPr indent="0" marL="0">
-              <a:buNone/>
-            </a:pPr>
-            <a:r>
-              <a:rPr lang="en-US" sz="1000" dirty="0">
+            <a:endParaRPr lang="en-US" sz="1400" dirty="0"/>
+          </a:p>
+          <a:p>
+            <a:pPr indent="0" marL="0">
+              <a:buNone/>
+            </a:pPr>
+            <a:r>
+              <a:rPr lang="en-US" sz="1400" dirty="0">
                 <a:solidFill>
                   <a:srgbClr val="FBF5E6"/>
                 </a:solidFill>
@@ -10765,14 +10751,14 @@
               </a:rPr>
               <a:t>• 12 世紀北法 · 嚴肅的拉丁歌</a:t>
             </a:r>
-            <a:endParaRPr lang="en-US" sz="1000" dirty="0"/>
-          </a:p>
-          <a:p>
-            <a:pPr indent="0" marL="0">
-              <a:buNone/>
-            </a:pPr>
-            <a:r>
-              <a:rPr lang="en-US" sz="1000" dirty="0">
+            <a:endParaRPr lang="en-US" sz="1400" dirty="0"/>
+          </a:p>
+          <a:p>
+            <a:pPr indent="0" marL="0">
+              <a:buNone/>
+            </a:pPr>
+            <a:r>
+              <a:rPr lang="en-US" sz="1400" dirty="0">
                 <a:solidFill>
                   <a:srgbClr val="FBF5E6"/>
                 </a:solidFill>
@@ -10782,20 +10768,20 @@
               </a:rPr>
               <a:t>• 神聖或世俗皆可 · 新創旋律不以聖詠為基</a:t>
             </a:r>
-            <a:endParaRPr lang="en-US" sz="1000" dirty="0"/>
-          </a:p>
-          <a:p>
-            <a:pPr indent="0" marL="0">
-              <a:buNone/>
-            </a:pPr>
-            <a:endParaRPr lang="en-US" sz="1000" dirty="0"/>
-          </a:p>
-          <a:p>
-            <a:pPr indent="0" marL="0">
-              <a:buNone/>
-            </a:pPr>
-            <a:r>
-              <a:rPr lang="en-US" sz="1000" dirty="0">
+            <a:endParaRPr lang="en-US" sz="1400" dirty="0"/>
+          </a:p>
+          <a:p>
+            <a:pPr indent="0" marL="0">
+              <a:buNone/>
+            </a:pPr>
+            <a:endParaRPr lang="en-US" sz="1400" dirty="0"/>
+          </a:p>
+          <a:p>
+            <a:pPr indent="0" marL="0">
+              <a:buNone/>
+            </a:pPr>
+            <a:r>
+              <a:rPr lang="en-US" sz="1400" dirty="0">
                 <a:solidFill>
                   <a:srgbClr val="FBF5E6"/>
                 </a:solidFill>
@@ -10805,14 +10791,14 @@
               </a:rPr>
               <a:t>Goliard 歌曲:</a:t>
             </a:r>
-            <a:endParaRPr lang="en-US" sz="1000" dirty="0"/>
-          </a:p>
-          <a:p>
-            <a:pPr indent="0" marL="0">
-              <a:buNone/>
-            </a:pPr>
-            <a:r>
-              <a:rPr lang="en-US" sz="1000" dirty="0">
+            <a:endParaRPr lang="en-US" sz="1400" dirty="0"/>
+          </a:p>
+          <a:p>
+            <a:pPr indent="0" marL="0">
+              <a:buNone/>
+            </a:pPr>
+            <a:r>
+              <a:rPr lang="en-US" sz="1400" dirty="0">
                 <a:solidFill>
                   <a:srgbClr val="FBF5E6"/>
                 </a:solidFill>
@@ -10822,14 +10808,14 @@
               </a:rPr>
               <a:t>• 10–13 世紀 · 流浪學者與教士</a:t>
             </a:r>
-            <a:endParaRPr lang="en-US" sz="1000" dirty="0"/>
-          </a:p>
-          <a:p>
-            <a:pPr indent="0" marL="0">
-              <a:buNone/>
-            </a:pPr>
-            <a:r>
-              <a:rPr lang="en-US" sz="1000" dirty="0">
+            <a:endParaRPr lang="en-US" sz="1400" dirty="0"/>
+          </a:p>
+          <a:p>
+            <a:pPr indent="0" marL="0">
+              <a:buNone/>
+            </a:pPr>
+            <a:r>
+              <a:rPr lang="en-US" sz="1400" dirty="0">
                 <a:solidFill>
                   <a:srgbClr val="FBF5E6"/>
                 </a:solidFill>
@@ -10839,14 +10825,14 @@
               </a:rPr>
               <a:t>• 主題：愛情、春天、飲酒、諷刺</a:t>
             </a:r>
-            <a:endParaRPr lang="en-US" sz="1000" dirty="0"/>
-          </a:p>
-          <a:p>
-            <a:pPr indent="0" marL="0">
-              <a:buNone/>
-            </a:pPr>
-            <a:r>
-              <a:rPr lang="en-US" sz="1000" dirty="0">
+            <a:endParaRPr lang="en-US" sz="1400" dirty="0"/>
+          </a:p>
+          <a:p>
+            <a:pPr indent="0" marL="0">
+              <a:buNone/>
+            </a:pPr>
+            <a:r>
+              <a:rPr lang="en-US" sz="1400" dirty="0">
                 <a:solidFill>
                   <a:srgbClr val="FBF5E6"/>
                 </a:solidFill>
@@ -10856,7 +10842,7 @@
               </a:rPr>
               <a:t>• 作者常為受人尊敬的教師與宮廷人</a:t>
             </a:r>
-            <a:endParaRPr lang="en-US" sz="1000" dirty="0"/>
+            <a:endParaRPr lang="en-US" sz="1400" dirty="0"/>
           </a:p>
         </p:txBody>
       </p:sp>
@@ -10913,7 +10899,7 @@
                 <a:ea typeface="Georgia" pitchFamily="34" charset="-122"/>
                 <a:cs typeface="Georgia" pitchFamily="34" charset="-120"/>
               </a:rPr>
-              <a:t>🗣 方言歌曲 Vernacular Song</a:t>
+              <a:t>■ 方言歌曲 Vernacular Song</a:t>
             </a:r>
             <a:endParaRPr lang="en-US" sz="1400" dirty="0"/>
           </a:p>
@@ -10957,14 +10943,14 @@
           <a:ln/>
         </p:spPr>
         <p:txBody>
-          <a:bodyPr wrap="square" rtlCol="0" anchor="ctr"/>
-          <a:lstStyle/>
-          <a:p>
-            <a:pPr indent="0" marL="0">
-              <a:buNone/>
-            </a:pPr>
-            <a:r>
-              <a:rPr lang="en-US" sz="1000" dirty="0">
+          <a:bodyPr wrap="square" rtlCol="0" anchor="t"/>
+          <a:lstStyle/>
+          <a:p>
+            <a:pPr indent="0" marL="0">
+              <a:buNone/>
+            </a:pPr>
+            <a:r>
+              <a:rPr lang="en-US" sz="1400" dirty="0">
                 <a:solidFill>
                   <a:srgbClr val="FBF5E6"/>
                 </a:solidFill>
@@ -10972,16 +10958,16 @@
                 <a:ea typeface="Calibri" pitchFamily="34" charset="-122"/>
                 <a:cs typeface="Calibri" pitchFamily="34" charset="-120"/>
               </a:rPr>
-              <a:t>大多失傳：因中世紀 90% 人口為不識字的鄉民</a:t>
-            </a:r>
-            <a:endParaRPr lang="en-US" sz="1000" dirty="0"/>
-          </a:p>
-          <a:p>
-            <a:pPr indent="0" marL="0">
-              <a:buNone/>
-            </a:pPr>
-            <a:r>
-              <a:rPr lang="en-US" sz="1000" dirty="0">
+              <a:t>大多失傳：90% 人口為不識字的鄉民</a:t>
+            </a:r>
+            <a:endParaRPr lang="en-US" sz="1400" dirty="0"/>
+          </a:p>
+          <a:p>
+            <a:pPr indent="0" marL="0">
+              <a:buNone/>
+            </a:pPr>
+            <a:r>
+              <a:rPr lang="en-US" sz="1400" dirty="0">
                 <a:solidFill>
                   <a:srgbClr val="FBF5E6"/>
                 </a:solidFill>
@@ -10989,22 +10975,22 @@
                 <a:ea typeface="Calibri" pitchFamily="34" charset="-122"/>
                 <a:cs typeface="Calibri" pitchFamily="34" charset="-120"/>
               </a:rPr>
-              <a:t>Most are lost — 90% of the population was nonliterate</a:t>
-            </a:r>
-            <a:endParaRPr lang="en-US" sz="1000" dirty="0"/>
-          </a:p>
-          <a:p>
-            <a:pPr indent="0" marL="0">
-              <a:buNone/>
-            </a:pPr>
-            <a:endParaRPr lang="en-US" sz="1000" dirty="0"/>
-          </a:p>
-          <a:p>
-            <a:pPr indent="0" marL="0">
-              <a:buNone/>
-            </a:pPr>
-            <a:r>
-              <a:rPr lang="en-US" sz="1000" dirty="0">
+              <a:t>Most lost — 90% nonliterate</a:t>
+            </a:r>
+            <a:endParaRPr lang="en-US" sz="1400" dirty="0"/>
+          </a:p>
+          <a:p>
+            <a:pPr indent="0" marL="0">
+              <a:buNone/>
+            </a:pPr>
+            <a:endParaRPr lang="en-US" sz="1400" dirty="0"/>
+          </a:p>
+          <a:p>
+            <a:pPr indent="0" marL="0">
+              <a:buNone/>
+            </a:pPr>
+            <a:r>
+              <a:rPr lang="en-US" sz="1400" dirty="0">
                 <a:solidFill>
                   <a:srgbClr val="FBF5E6"/>
                 </a:solidFill>
@@ -11014,20 +11000,20 @@
               </a:rPr>
               <a:t>倖存的主要類型：</a:t>
             </a:r>
-            <a:endParaRPr lang="en-US" sz="1000" dirty="0"/>
-          </a:p>
-          <a:p>
-            <a:pPr indent="0" marL="0">
-              <a:buNone/>
-            </a:pPr>
-            <a:endParaRPr lang="en-US" sz="1000" dirty="0"/>
-          </a:p>
-          <a:p>
-            <a:pPr indent="0" marL="0">
-              <a:buNone/>
-            </a:pPr>
-            <a:r>
-              <a:rPr lang="en-US" sz="1000" dirty="0">
+            <a:endParaRPr lang="en-US" sz="1400" dirty="0"/>
+          </a:p>
+          <a:p>
+            <a:pPr indent="0" marL="0">
+              <a:buNone/>
+            </a:pPr>
+            <a:endParaRPr lang="en-US" sz="1400" dirty="0"/>
+          </a:p>
+          <a:p>
+            <a:pPr indent="0" marL="0">
+              <a:buNone/>
+            </a:pPr>
+            <a:r>
+              <a:rPr lang="en-US" sz="1400" dirty="0">
                 <a:solidFill>
                   <a:srgbClr val="FBF5E6"/>
                 </a:solidFill>
@@ -11035,16 +11021,16 @@
                 <a:ea typeface="Calibri" pitchFamily="34" charset="-122"/>
                 <a:cs typeface="Calibri" pitchFamily="34" charset="-120"/>
               </a:rPr>
-              <a:t>• Epic 史詩：以簡單旋律公式吟唱</a:t>
-            </a:r>
-            <a:endParaRPr lang="en-US" sz="1000" dirty="0"/>
-          </a:p>
-          <a:p>
-            <a:pPr indent="0" marL="0">
-              <a:buNone/>
-            </a:pPr>
-            <a:r>
-              <a:rPr lang="en-US" sz="1000" dirty="0">
+              <a:t>• Epic 史詩：以旋律公式吟唱</a:t>
+            </a:r>
+            <a:endParaRPr lang="en-US" sz="1400" dirty="0"/>
+          </a:p>
+          <a:p>
+            <a:pPr indent="0" marL="0">
+              <a:buNone/>
+            </a:pPr>
+            <a:r>
+              <a:rPr lang="en-US" sz="1400" dirty="0">
                 <a:solidFill>
                   <a:srgbClr val="FBF5E6"/>
                 </a:solidFill>
@@ -11052,16 +11038,16 @@
                 <a:ea typeface="Calibri" pitchFamily="34" charset="-122"/>
                 <a:cs typeface="Calibri" pitchFamily="34" charset="-120"/>
               </a:rPr>
-              <a:t>  Chanson de geste（「功業之歌」）</a:t>
-            </a:r>
-            <a:endParaRPr lang="en-US" sz="1000" dirty="0"/>
-          </a:p>
-          <a:p>
-            <a:pPr indent="0" marL="0">
-              <a:buNone/>
-            </a:pPr>
-            <a:r>
-              <a:rPr lang="en-US" sz="1000" dirty="0">
+              <a:t>  Chanson de geste（功業之歌）</a:t>
+            </a:r>
+            <a:endParaRPr lang="en-US" sz="1400" dirty="0"/>
+          </a:p>
+          <a:p>
+            <a:pPr indent="0" marL="0">
+              <a:buNone/>
+            </a:pPr>
+            <a:r>
+              <a:rPr lang="en-US" sz="1400" dirty="0">
                 <a:solidFill>
                   <a:srgbClr val="FBF5E6"/>
                 </a:solidFill>
@@ -11071,14 +11057,14 @@
               </a:rPr>
               <a:t>  最著名：《羅蘭之歌》(ca. 1100)</a:t>
             </a:r>
-            <a:endParaRPr lang="en-US" sz="1000" dirty="0"/>
-          </a:p>
-          <a:p>
-            <a:pPr indent="0" marL="0">
-              <a:buNone/>
-            </a:pPr>
-            <a:r>
-              <a:rPr lang="en-US" sz="1000" dirty="0">
+            <a:endParaRPr lang="en-US" sz="1400" dirty="0"/>
+          </a:p>
+          <a:p>
+            <a:pPr indent="0" marL="0">
+              <a:buNone/>
+            </a:pPr>
+            <a:r>
+              <a:rPr lang="en-US" sz="1400" dirty="0">
                 <a:solidFill>
                   <a:srgbClr val="FBF5E6"/>
                 </a:solidFill>
@@ -11086,22 +11072,22 @@
                 <a:ea typeface="Calibri" pitchFamily="34" charset="-122"/>
                 <a:cs typeface="Calibri" pitchFamily="34" charset="-120"/>
               </a:rPr>
-              <a:t>  其他：Beowulf（古英文）、The Nibelungs（德語）、Norse Eddas</a:t>
-            </a:r>
-            <a:endParaRPr lang="en-US" sz="1000" dirty="0"/>
-          </a:p>
-          <a:p>
-            <a:pPr indent="0" marL="0">
-              <a:buNone/>
-            </a:pPr>
-            <a:endParaRPr lang="en-US" sz="1000" dirty="0"/>
-          </a:p>
-          <a:p>
-            <a:pPr indent="0" marL="0">
-              <a:buNone/>
-            </a:pPr>
-            <a:r>
-              <a:rPr lang="en-US" sz="1000" dirty="0">
+              <a:t>  Beowulf、Nibelungs、Eddas</a:t>
+            </a:r>
+            <a:endParaRPr lang="en-US" sz="1400" dirty="0"/>
+          </a:p>
+          <a:p>
+            <a:pPr indent="0" marL="0">
+              <a:buNone/>
+            </a:pPr>
+            <a:endParaRPr lang="en-US" sz="1400" dirty="0"/>
+          </a:p>
+          <a:p>
+            <a:pPr indent="0" marL="0">
+              <a:buNone/>
+            </a:pPr>
+            <a:r>
+              <a:rPr lang="en-US" sz="1400" dirty="0">
                 <a:solidFill>
                   <a:srgbClr val="FBF5E6"/>
                 </a:solidFill>
@@ -11109,16 +11095,16 @@
                 <a:ea typeface="Calibri" pitchFamily="34" charset="-122"/>
                 <a:cs typeface="Calibri" pitchFamily="34" charset="-120"/>
               </a:rPr>
-              <a:t>• 市井街頭叫賣、民歌、搖籃曲——僅因被複音音樂引用而留存（「如琥珀中的蒼蠅」）</a:t>
-            </a:r>
-            <a:endParaRPr lang="en-US" sz="1000" dirty="0"/>
-          </a:p>
-          <a:p>
-            <a:pPr indent="0" marL="0">
-              <a:buNone/>
-            </a:pPr>
-            <a:r>
-              <a:rPr lang="en-US" sz="1000" dirty="0">
+              <a:t>• 市井街頭叫賣、民歌、搖籃曲</a:t>
+            </a:r>
+            <a:endParaRPr lang="en-US" sz="1400" dirty="0"/>
+          </a:p>
+          <a:p>
+            <a:pPr indent="0" marL="0">
+              <a:buNone/>
+            </a:pPr>
+            <a:r>
+              <a:rPr lang="en-US" sz="1400" dirty="0">
                 <a:solidFill>
                   <a:srgbClr val="FBF5E6"/>
                 </a:solidFill>
@@ -11126,9 +11112,26 @@
                 <a:ea typeface="Calibri" pitchFamily="34" charset="-122"/>
                 <a:cs typeface="Calibri" pitchFamily="34" charset="-120"/>
               </a:rPr>
-              <a:t>  Street cries preserved like flies in amber</a:t>
-            </a:r>
-            <a:endParaRPr lang="en-US" sz="1000" dirty="0"/>
+              <a:t>  僅因被複音音樂引用而留存</a:t>
+            </a:r>
+            <a:endParaRPr lang="en-US" sz="1400" dirty="0"/>
+          </a:p>
+          <a:p>
+            <a:pPr indent="0" marL="0">
+              <a:buNone/>
+            </a:pPr>
+            <a:r>
+              <a:rPr lang="en-US" sz="1400" dirty="0">
+                <a:solidFill>
+                  <a:srgbClr val="FBF5E6"/>
+                </a:solidFill>
+                <a:latin typeface="Calibri" pitchFamily="34" charset="0"/>
+                <a:ea typeface="Calibri" pitchFamily="34" charset="-122"/>
+                <a:cs typeface="Calibri" pitchFamily="34" charset="-120"/>
+              </a:rPr>
+              <a:t>  Preserved like flies in amber</a:t>
+            </a:r>
+            <a:endParaRPr lang="en-US" sz="1400" dirty="0"/>
           </a:p>
         </p:txBody>
       </p:sp>
@@ -11347,7 +11350,7 @@
               <a:buNone/>
             </a:pPr>
             <a:r>
-              <a:rPr lang="en-US" sz="1300" b="1" dirty="0">
+              <a:rPr lang="en-US" sz="1400" b="1" dirty="0">
                 <a:solidFill>
                   <a:srgbClr val="C8A020"/>
                 </a:solidFill>
@@ -11355,9 +11358,9 @@
                 <a:ea typeface="Georgia" pitchFamily="34" charset="-122"/>
                 <a:cs typeface="Georgia" pitchFamily="34" charset="-120"/>
               </a:rPr>
-              <a:t>🎤 Bards 遊吟詩人</a:t>
-            </a:r>
-            <a:endParaRPr lang="en-US" sz="1300" dirty="0"/>
+              <a:t>■ Bards 遊吟詩人</a:t>
+            </a:r>
+            <a:endParaRPr lang="en-US" sz="1400" dirty="0"/>
           </a:p>
         </p:txBody>
       </p:sp>
@@ -11379,14 +11382,14 @@
           <a:ln/>
         </p:spPr>
         <p:txBody>
-          <a:bodyPr wrap="square" lIns="0" tIns="0" rIns="0" bIns="0" rtlCol="0" anchor="ctr"/>
-          <a:lstStyle/>
-          <a:p>
-            <a:pPr indent="0" marL="0">
-              <a:buNone/>
-            </a:pPr>
-            <a:r>
-              <a:rPr lang="en-US" sz="950" i="1" dirty="0">
+          <a:bodyPr wrap="square" lIns="0" tIns="0" rIns="0" bIns="0" rtlCol="0" anchor="t"/>
+          <a:lstStyle/>
+          <a:p>
+            <a:pPr indent="0" marL="0">
+              <a:buNone/>
+            </a:pPr>
+            <a:r>
+              <a:rPr lang="en-US" sz="1400" i="1" dirty="0">
                 <a:solidFill>
                   <a:srgbClr val="E8D8A8"/>
                 </a:solidFill>
@@ -11396,7 +11399,7 @@
               </a:rPr>
               <a:t>Celtic lands</a:t>
             </a:r>
-            <a:endParaRPr lang="en-US" sz="950" dirty="0"/>
+            <a:endParaRPr lang="en-US" sz="1400" dirty="0"/>
           </a:p>
         </p:txBody>
       </p:sp>
@@ -11438,14 +11441,14 @@
           <a:ln/>
         </p:spPr>
         <p:txBody>
-          <a:bodyPr wrap="square" lIns="0" tIns="0" rIns="0" bIns="0" rtlCol="0" anchor="ctr"/>
-          <a:lstStyle/>
-          <a:p>
-            <a:pPr indent="0" marL="0">
-              <a:buNone/>
-            </a:pPr>
-            <a:r>
-              <a:rPr lang="en-US" sz="1000" dirty="0">
+          <a:bodyPr wrap="square" lIns="0" tIns="0" rIns="0" bIns="0" rtlCol="0" anchor="t"/>
+          <a:lstStyle/>
+          <a:p>
+            <a:pPr indent="0" marL="0">
+              <a:buNone/>
+            </a:pPr>
+            <a:r>
+              <a:rPr lang="en-US" sz="1400" dirty="0">
                 <a:solidFill>
                   <a:srgbClr val="FBF5E6"/>
                 </a:solidFill>
@@ -11455,14 +11458,14 @@
               </a:rPr>
               <a:t>在宴會上演唱史詩，以豎琴、費德爾或其他弦樂器自伴</a:t>
             </a:r>
-            <a:endParaRPr lang="en-US" sz="1000" dirty="0"/>
-          </a:p>
-          <a:p>
-            <a:pPr indent="0" marL="0">
-              <a:buNone/>
-            </a:pPr>
-            <a:r>
-              <a:rPr lang="en-US" sz="1000" dirty="0">
+            <a:endParaRPr lang="en-US" sz="1400" dirty="0"/>
+          </a:p>
+          <a:p>
+            <a:pPr indent="0" marL="0">
+              <a:buNone/>
+            </a:pPr>
+            <a:r>
+              <a:rPr lang="en-US" sz="1400" dirty="0">
                 <a:solidFill>
                   <a:srgbClr val="FBF5E6"/>
                 </a:solidFill>
@@ -11472,7 +11475,7 @@
               </a:rPr>
               <a:t>Sang epics at banquets, accompanying themselves on harp or fiddle</a:t>
             </a:r>
-            <a:endParaRPr lang="en-US" sz="1000" dirty="0"/>
+            <a:endParaRPr lang="en-US" sz="1400" dirty="0"/>
           </a:p>
         </p:txBody>
       </p:sp>
@@ -11521,7 +11524,7 @@
               <a:buNone/>
             </a:pPr>
             <a:r>
-              <a:rPr lang="en-US" sz="1300" b="1" dirty="0">
+              <a:rPr lang="en-US" sz="1400" b="1" dirty="0">
                 <a:solidFill>
                   <a:srgbClr val="C8A020"/>
                 </a:solidFill>
@@ -11529,9 +11532,9 @@
                 <a:ea typeface="Georgia" pitchFamily="34" charset="-122"/>
                 <a:cs typeface="Georgia" pitchFamily="34" charset="-120"/>
               </a:rPr>
-              <a:t>🤹 Jongleurs 雜耍藝人</a:t>
-            </a:r>
-            <a:endParaRPr lang="en-US" sz="1300" dirty="0"/>
+              <a:t>■ Jongleurs 雜耍藝人</a:t>
+            </a:r>
+            <a:endParaRPr lang="en-US" sz="1400" dirty="0"/>
           </a:p>
         </p:txBody>
       </p:sp>
@@ -11553,14 +11556,14 @@
           <a:ln/>
         </p:spPr>
         <p:txBody>
-          <a:bodyPr wrap="square" lIns="0" tIns="0" rIns="0" bIns="0" rtlCol="0" anchor="ctr"/>
-          <a:lstStyle/>
-          <a:p>
-            <a:pPr indent="0" marL="0">
-              <a:buNone/>
-            </a:pPr>
-            <a:r>
-              <a:rPr lang="en-US" sz="950" i="1" dirty="0">
+          <a:bodyPr wrap="square" lIns="0" tIns="0" rIns="0" bIns="0" rtlCol="0" anchor="t"/>
+          <a:lstStyle/>
+          <a:p>
+            <a:pPr indent="0" marL="0">
+              <a:buNone/>
+            </a:pPr>
+            <a:r>
+              <a:rPr lang="en-US" sz="1400" i="1" dirty="0">
                 <a:solidFill>
                   <a:srgbClr val="E8D8A8"/>
                 </a:solidFill>
@@ -11570,7 +11573,7 @@
               </a:rPr>
               <a:t>Itinerant · Lower-class</a:t>
             </a:r>
-            <a:endParaRPr lang="en-US" sz="950" dirty="0"/>
+            <a:endParaRPr lang="en-US" sz="1400" dirty="0"/>
           </a:p>
         </p:txBody>
       </p:sp>
@@ -11612,14 +11615,14 @@
           <a:ln/>
         </p:spPr>
         <p:txBody>
-          <a:bodyPr wrap="square" lIns="0" tIns="0" rIns="0" bIns="0" rtlCol="0" anchor="ctr"/>
-          <a:lstStyle/>
-          <a:p>
-            <a:pPr indent="0" marL="0">
-              <a:buNone/>
-            </a:pPr>
-            <a:r>
-              <a:rPr lang="en-US" sz="1000" dirty="0">
+          <a:bodyPr wrap="square" lIns="0" tIns="0" rIns="0" bIns="0" rtlCol="0" anchor="t"/>
+          <a:lstStyle/>
+          <a:p>
+            <a:pPr indent="0" marL="0">
+              <a:buNone/>
+            </a:pPr>
+            <a:r>
+              <a:rPr lang="en-US" sz="1400" dirty="0">
                 <a:solidFill>
                   <a:srgbClr val="FBF5E6"/>
                 </a:solidFill>
@@ -11629,14 +11632,14 @@
               </a:rPr>
               <a:t>來自拉丁文「juggler」· 流浪賣藝：雜耍、說書、演奏樂器</a:t>
             </a:r>
-            <a:endParaRPr lang="en-US" sz="1000" dirty="0"/>
-          </a:p>
-          <a:p>
-            <a:pPr indent="0" marL="0">
-              <a:buNone/>
-            </a:pPr>
-            <a:r>
-              <a:rPr lang="en-US" sz="1000" dirty="0">
+            <a:endParaRPr lang="en-US" sz="1400" dirty="0"/>
+          </a:p>
+          <a:p>
+            <a:pPr indent="0" marL="0">
+              <a:buNone/>
+            </a:pPr>
+            <a:r>
+              <a:rPr lang="en-US" sz="1400" dirty="0">
                 <a:solidFill>
                   <a:srgbClr val="FBF5E6"/>
                 </a:solidFill>
@@ -11646,7 +11649,7 @@
               </a:rPr>
               <a:t>Itinerant lower-class performers — tricks, stories, instruments</a:t>
             </a:r>
-            <a:endParaRPr lang="en-US" sz="1000" dirty="0"/>
+            <a:endParaRPr lang="en-US" sz="1400" dirty="0"/>
           </a:p>
         </p:txBody>
       </p:sp>
@@ -11695,7 +11698,7 @@
               <a:buNone/>
             </a:pPr>
             <a:r>
-              <a:rPr lang="en-US" sz="1300" b="1" dirty="0">
+              <a:rPr lang="en-US" sz="1400" b="1" dirty="0">
                 <a:solidFill>
                   <a:srgbClr val="C8A020"/>
                 </a:solidFill>
@@ -11703,9 +11706,9 @@
                 <a:ea typeface="Georgia" pitchFamily="34" charset="-122"/>
                 <a:cs typeface="Georgia" pitchFamily="34" charset="-120"/>
               </a:rPr>
-              <a:t>🎺 Minstrels 宮廷樂師</a:t>
-            </a:r>
-            <a:endParaRPr lang="en-US" sz="1300" dirty="0"/>
+              <a:t>■ Minstrels 宮廷樂師</a:t>
+            </a:r>
+            <a:endParaRPr lang="en-US" sz="1400" dirty="0"/>
           </a:p>
         </p:txBody>
       </p:sp>
@@ -11727,14 +11730,14 @@
           <a:ln/>
         </p:spPr>
         <p:txBody>
-          <a:bodyPr wrap="square" lIns="0" tIns="0" rIns="0" bIns="0" rtlCol="0" anchor="ctr"/>
-          <a:lstStyle/>
-          <a:p>
-            <a:pPr indent="0" marL="0">
-              <a:buNone/>
-            </a:pPr>
-            <a:r>
-              <a:rPr lang="en-US" sz="950" i="1" dirty="0">
+          <a:bodyPr wrap="square" lIns="0" tIns="0" rIns="0" bIns="0" rtlCol="0" anchor="t"/>
+          <a:lstStyle/>
+          <a:p>
+            <a:pPr indent="0" marL="0">
+              <a:buNone/>
+            </a:pPr>
+            <a:r>
+              <a:rPr lang="en-US" sz="1400" i="1" dirty="0">
                 <a:solidFill>
                   <a:srgbClr val="E8D8A8"/>
                 </a:solidFill>
@@ -11744,7 +11747,7 @@
               </a:rPr>
               <a:t>From 13th c. · Specialized</a:t>
             </a:r>
-            <a:endParaRPr lang="en-US" sz="950" dirty="0"/>
+            <a:endParaRPr lang="en-US" sz="1400" dirty="0"/>
           </a:p>
         </p:txBody>
       </p:sp>
@@ -11786,14 +11789,14 @@
           <a:ln/>
         </p:spPr>
         <p:txBody>
-          <a:bodyPr wrap="square" lIns="0" tIns="0" rIns="0" bIns="0" rtlCol="0" anchor="ctr"/>
-          <a:lstStyle/>
-          <a:p>
-            <a:pPr indent="0" marL="0">
-              <a:buNone/>
-            </a:pPr>
-            <a:r>
-              <a:rPr lang="en-US" sz="1000" dirty="0">
+          <a:bodyPr wrap="square" lIns="0" tIns="0" rIns="0" bIns="0" rtlCol="0" anchor="t"/>
+          <a:lstStyle/>
+          <a:p>
+            <a:pPr indent="0" marL="0">
+              <a:buNone/>
+            </a:pPr>
+            <a:r>
+              <a:rPr lang="en-US" sz="1400" dirty="0">
                 <a:solidFill>
                   <a:srgbClr val="FBF5E6"/>
                 </a:solidFill>
@@ -11803,14 +11806,14 @@
               </a:rPr>
               <a:t>來自拉丁 minister（「服侍者」）· 受雇於宮廷或城市 · 出身背景多元</a:t>
             </a:r>
-            <a:endParaRPr lang="en-US" sz="1000" dirty="0"/>
-          </a:p>
-          <a:p>
-            <a:pPr indent="0" marL="0">
-              <a:buNone/>
-            </a:pPr>
-            <a:r>
-              <a:rPr lang="en-US" sz="1000" dirty="0">
+            <a:endParaRPr lang="en-US" sz="1400" dirty="0"/>
+          </a:p>
+          <a:p>
+            <a:pPr indent="0" marL="0">
+              <a:buNone/>
+            </a:pPr>
+            <a:r>
+              <a:rPr lang="en-US" sz="1400" dirty="0">
                 <a:solidFill>
                   <a:srgbClr val="FBF5E6"/>
                 </a:solidFill>
@@ -11820,7 +11823,7 @@
               </a:rPr>
               <a:t>From Latin minister; hired by courts or cities; varied backgrounds</a:t>
             </a:r>
-            <a:endParaRPr lang="en-US" sz="1000" dirty="0"/>
+            <a:endParaRPr lang="en-US" sz="1400" dirty="0"/>
           </a:p>
         </p:txBody>
       </p:sp>
@@ -11869,7 +11872,7 @@
               <a:buNone/>
             </a:pPr>
             <a:r>
-              <a:rPr lang="en-US" sz="1300" b="1" dirty="0">
+              <a:rPr lang="en-US" sz="1400" b="1" dirty="0">
                 <a:solidFill>
                   <a:srgbClr val="C8A020"/>
                 </a:solidFill>
@@ -11877,9 +11880,9 @@
                 <a:ea typeface="Georgia" pitchFamily="34" charset="-122"/>
                 <a:cs typeface="Georgia" pitchFamily="34" charset="-120"/>
               </a:rPr>
-              <a:t>⚖ Guilds 音樂家行會</a:t>
-            </a:r>
-            <a:endParaRPr lang="en-US" sz="1300" dirty="0"/>
+              <a:t>■ Guilds 音樂家行會</a:t>
+            </a:r>
+            <a:endParaRPr lang="en-US" sz="1400" dirty="0"/>
           </a:p>
         </p:txBody>
       </p:sp>
@@ -11901,14 +11904,14 @@
           <a:ln/>
         </p:spPr>
         <p:txBody>
-          <a:bodyPr wrap="square" lIns="0" tIns="0" rIns="0" bIns="0" rtlCol="0" anchor="ctr"/>
-          <a:lstStyle/>
-          <a:p>
-            <a:pPr indent="0" marL="0">
-              <a:buNone/>
-            </a:pPr>
-            <a:r>
-              <a:rPr lang="en-US" sz="950" i="1" dirty="0">
+          <a:bodyPr wrap="square" lIns="0" tIns="0" rIns="0" bIns="0" rtlCol="0" anchor="t"/>
+          <a:lstStyle/>
+          <a:p>
+            <a:pPr indent="0" marL="0">
+              <a:buNone/>
+            </a:pPr>
+            <a:r>
+              <a:rPr lang="en-US" sz="1400" i="1" dirty="0">
                 <a:solidFill>
                   <a:srgbClr val="E8D8A8"/>
                 </a:solidFill>
@@ -11918,7 +11921,7 @@
               </a:rPr>
               <a:t>From 12th c.</a:t>
             </a:r>
-            <a:endParaRPr lang="en-US" sz="950" dirty="0"/>
+            <a:endParaRPr lang="en-US" sz="1400" dirty="0"/>
           </a:p>
         </p:txBody>
       </p:sp>
@@ -11960,14 +11963,14 @@
           <a:ln/>
         </p:spPr>
         <p:txBody>
-          <a:bodyPr wrap="square" lIns="0" tIns="0" rIns="0" bIns="0" rtlCol="0" anchor="ctr"/>
-          <a:lstStyle/>
-          <a:p>
-            <a:pPr indent="0" marL="0">
-              <a:buNone/>
-            </a:pPr>
-            <a:r>
-              <a:rPr lang="en-US" sz="1000" dirty="0">
+          <a:bodyPr wrap="square" lIns="0" tIns="0" rIns="0" bIns="0" rtlCol="0" anchor="t"/>
+          <a:lstStyle/>
+          <a:p>
+            <a:pPr indent="0" marL="0">
+              <a:buNone/>
+            </a:pPr>
+            <a:r>
+              <a:rPr lang="en-US" sz="1400" dirty="0">
                 <a:solidFill>
                   <a:srgbClr val="FBF5E6"/>
                 </a:solidFill>
@@ -11977,14 +11980,14 @@
               </a:rPr>
               <a:t>提供法律保護、界定城市內的演出專屬權、規範行為準則</a:t>
             </a:r>
-            <a:endParaRPr lang="en-US" sz="1000" dirty="0"/>
-          </a:p>
-          <a:p>
-            <a:pPr indent="0" marL="0">
-              <a:buNone/>
-            </a:pPr>
-            <a:r>
-              <a:rPr lang="en-US" sz="1000" dirty="0">
+            <a:endParaRPr lang="en-US" sz="1400" dirty="0"/>
+          </a:p>
+          <a:p>
+            <a:pPr indent="0" marL="0">
+              <a:buNone/>
+            </a:pPr>
+            <a:r>
+              <a:rPr lang="en-US" sz="1400" dirty="0">
                 <a:solidFill>
                   <a:srgbClr val="FBF5E6"/>
                 </a:solidFill>
@@ -11994,7 +11997,7 @@
               </a:rPr>
               <a:t>Protected legal rights; defined performance exclusivity; regulated conduct</a:t>
             </a:r>
-            <a:endParaRPr lang="en-US" sz="1000" dirty="0"/>
+            <a:endParaRPr lang="en-US" sz="1400" dirty="0"/>
           </a:p>
         </p:txBody>
       </p:sp>
@@ -12016,14 +12019,14 @@
           <a:ln/>
         </p:spPr>
         <p:txBody>
-          <a:bodyPr wrap="square" rtlCol="0" anchor="ctr"/>
+          <a:bodyPr wrap="square" rtlCol="0" anchor="t"/>
           <a:lstStyle/>
           <a:p>
             <a:pPr algn="ctr" indent="0" marL="0">
               <a:buNone/>
             </a:pPr>
             <a:r>
-              <a:rPr lang="en-US" sz="1050" i="1" dirty="0">
+              <a:rPr lang="en-US" sz="1400" i="1" dirty="0">
                 <a:solidFill>
                   <a:srgbClr val="C8A020"/>
                 </a:solidFill>
@@ -12031,9 +12034,9 @@
                 <a:ea typeface="Calibri" pitchFamily="34" charset="-122"/>
                 <a:cs typeface="Calibri" pitchFamily="34" charset="-120"/>
               </a:rPr>
-              <a:t>🔑 里程碑：1321 年巴黎的 Confrérie de St.-Julien des Menestriers 成立，37 位男女樂師共同簽署章程</a:t>
-            </a:r>
-            <a:endParaRPr lang="en-US" sz="1050" dirty="0"/>
+              <a:t>■ 里程碑：1321 年巴黎的 Confrérie de St.-Julien des Menestriers 成立，37 位男女樂師共同簽署章程</a:t>
+            </a:r>
+            <a:endParaRPr lang="en-US" sz="1400" dirty="0"/>
           </a:p>
         </p:txBody>
       </p:sp>
@@ -12055,14 +12058,14 @@
           <a:ln/>
         </p:spPr>
         <p:txBody>
-          <a:bodyPr wrap="square" rtlCol="0" anchor="ctr"/>
+          <a:bodyPr wrap="square" rtlCol="0" anchor="t"/>
           <a:lstStyle/>
           <a:p>
             <a:pPr algn="ctr" indent="0" marL="0">
               <a:buNone/>
             </a:pPr>
             <a:r>
-              <a:rPr lang="en-US" sz="1000" i="1" dirty="0">
+              <a:rPr lang="en-US" sz="1400" i="1" dirty="0">
                 <a:solidFill>
                   <a:srgbClr val="E8D8A8"/>
                 </a:solidFill>
@@ -12072,7 +12075,7 @@
               </a:rPr>
               <a:t>Milestone: In 1321 Paris musicians formed the Confrérie de St.-Julien des Menestriers — 37 men and women signatories</a:t>
             </a:r>
-            <a:endParaRPr lang="en-US" sz="1000" dirty="0"/>
+            <a:endParaRPr lang="en-US" sz="1400" dirty="0"/>
           </a:p>
         </p:txBody>
       </p:sp>
@@ -12212,7 +12215,7 @@
               <a:buNone/>
             </a:pPr>
             <a:r>
-              <a:rPr lang="en-US" sz="1200" i="1" dirty="0">
+              <a:rPr lang="en-US" sz="1400" i="1" dirty="0">
                 <a:solidFill>
                   <a:srgbClr val="5C3A28"/>
                 </a:solidFill>
@@ -12222,7 +12225,7 @@
               </a:rPr>
               <a:t>The Fountainhead of Western Vernacular Poetry</a:t>
             </a:r>
-            <a:endParaRPr lang="en-US" sz="1200" dirty="0"/>
+            <a:endParaRPr lang="en-US" sz="1400" dirty="0"/>
           </a:p>
         </p:txBody>
       </p:sp>
@@ -12299,7 +12302,7 @@
                 <a:ea typeface="Georgia" pitchFamily="34" charset="-122"/>
                 <a:cs typeface="Georgia" pitchFamily="34" charset="-120"/>
               </a:rPr>
-              <a:t>🌅 Troubadours</a:t>
+              <a:t>■ Troubadours</a:t>
             </a:r>
             <a:endParaRPr lang="en-US" sz="1500" dirty="0"/>
           </a:p>
@@ -12323,14 +12326,14 @@
           <a:ln/>
         </p:spPr>
         <p:txBody>
-          <a:bodyPr wrap="square" rtlCol="0" anchor="ctr"/>
-          <a:lstStyle/>
-          <a:p>
-            <a:pPr indent="0" marL="0">
-              <a:buNone/>
-            </a:pPr>
-            <a:r>
-              <a:rPr lang="en-US" sz="1000" i="1" dirty="0">
+          <a:bodyPr wrap="square" rtlCol="0" anchor="t"/>
+          <a:lstStyle/>
+          <a:p>
+            <a:pPr indent="0" marL="0">
+              <a:buNone/>
+            </a:pPr>
+            <a:r>
+              <a:rPr lang="en-US" sz="1400" i="1" dirty="0">
                 <a:solidFill>
                   <a:srgbClr val="E8D8A8"/>
                 </a:solidFill>
@@ -12340,7 +12343,7 @@
               </a:rPr>
               <a:t>南法 · 12 世紀起 · Occitan（langue d'oc）</a:t>
             </a:r>
-            <a:endParaRPr lang="en-US" sz="1000" dirty="0"/>
+            <a:endParaRPr lang="en-US" sz="1400" dirty="0"/>
           </a:p>
         </p:txBody>
       </p:sp>
@@ -12382,14 +12385,14 @@
           <a:ln/>
         </p:spPr>
         <p:txBody>
-          <a:bodyPr wrap="square" rtlCol="0" anchor="ctr"/>
-          <a:lstStyle/>
-          <a:p>
-            <a:pPr indent="0" marL="0">
-              <a:buNone/>
-            </a:pPr>
-            <a:r>
-              <a:rPr lang="en-US" sz="950" dirty="0">
+          <a:bodyPr wrap="square" rtlCol="0" anchor="t"/>
+          <a:lstStyle/>
+          <a:p>
+            <a:pPr indent="0" marL="0">
+              <a:buNone/>
+            </a:pPr>
+            <a:r>
+              <a:rPr lang="en-US" sz="1400" dirty="0">
                 <a:solidFill>
                   <a:srgbClr val="FBF5E6"/>
                 </a:solidFill>
@@ -12399,14 +12402,14 @@
               </a:rPr>
               <a:t>• Trobador（陰性 trobairitz）</a:t>
             </a:r>
-            <a:endParaRPr lang="en-US" sz="950" dirty="0"/>
-          </a:p>
-          <a:p>
-            <a:pPr indent="0" marL="0">
-              <a:buNone/>
-            </a:pPr>
-            <a:r>
-              <a:rPr lang="en-US" sz="950" dirty="0">
+            <a:endParaRPr lang="en-US" sz="1400" dirty="0"/>
+          </a:p>
+          <a:p>
+            <a:pPr indent="0" marL="0">
+              <a:buNone/>
+            </a:pPr>
+            <a:r>
+              <a:rPr lang="en-US" sz="1400" dirty="0">
                 <a:solidFill>
                   <a:srgbClr val="FBF5E6"/>
                 </a:solidFill>
@@ -12416,14 +12419,14 @@
               </a:rPr>
               <a:t>• Trobar = 「創作歌曲」→「找到」「發明」</a:t>
             </a:r>
-            <a:endParaRPr lang="en-US" sz="950" dirty="0"/>
-          </a:p>
-          <a:p>
-            <a:pPr indent="0" marL="0">
-              <a:buNone/>
-            </a:pPr>
-            <a:r>
-              <a:rPr lang="en-US" sz="950" dirty="0">
+            <a:endParaRPr lang="en-US" sz="1400" dirty="0"/>
+          </a:p>
+          <a:p>
+            <a:pPr indent="0" marL="0">
+              <a:buNone/>
+            </a:pPr>
+            <a:r>
+              <a:rPr lang="en-US" sz="1400" dirty="0">
                 <a:solidFill>
                   <a:srgbClr val="FBF5E6"/>
                 </a:solidFill>
@@ -12433,20 +12436,20 @@
               </a:rPr>
               <a:t>• 存 ca. 2,600 首詩 · 約 1/10 有旋律</a:t>
             </a:r>
-            <a:endParaRPr lang="en-US" sz="950" dirty="0"/>
-          </a:p>
-          <a:p>
-            <a:pPr indent="0" marL="0">
-              <a:buNone/>
-            </a:pPr>
-            <a:endParaRPr lang="en-US" sz="950" dirty="0"/>
-          </a:p>
-          <a:p>
-            <a:pPr indent="0" marL="0">
-              <a:buNone/>
-            </a:pPr>
-            <a:r>
-              <a:rPr lang="en-US" sz="950" dirty="0">
+            <a:endParaRPr lang="en-US" sz="1400" dirty="0"/>
+          </a:p>
+          <a:p>
+            <a:pPr indent="0" marL="0">
+              <a:buNone/>
+            </a:pPr>
+            <a:endParaRPr lang="en-US" sz="1400" dirty="0"/>
+          </a:p>
+          <a:p>
+            <a:pPr indent="0" marL="0">
+              <a:buNone/>
+            </a:pPr>
+            <a:r>
+              <a:rPr lang="en-US" sz="1400" dirty="0">
                 <a:solidFill>
                   <a:srgbClr val="FBF5E6"/>
                 </a:solidFill>
@@ -12456,14 +12459,14 @@
               </a:rPr>
               <a:t>重要人物:</a:t>
             </a:r>
-            <a:endParaRPr lang="en-US" sz="950" dirty="0"/>
-          </a:p>
-          <a:p>
-            <a:pPr indent="0" marL="0">
-              <a:buNone/>
-            </a:pPr>
-            <a:r>
-              <a:rPr lang="en-US" sz="950" dirty="0">
+            <a:endParaRPr lang="en-US" sz="1400" dirty="0"/>
+          </a:p>
+          <a:p>
+            <a:pPr indent="0" marL="0">
+              <a:buNone/>
+            </a:pPr>
+            <a:r>
+              <a:rPr lang="en-US" sz="1400" dirty="0">
                 <a:solidFill>
                   <a:srgbClr val="FBF5E6"/>
                 </a:solidFill>
@@ -12473,14 +12476,14 @@
               </a:rPr>
               <a:t>◆ Guillaume IX（亞奎丹公爵，1071–1126）</a:t>
             </a:r>
-            <a:endParaRPr lang="en-US" sz="950" dirty="0"/>
-          </a:p>
-          <a:p>
-            <a:pPr indent="0" marL="0">
-              <a:buNone/>
-            </a:pPr>
-            <a:r>
-              <a:rPr lang="en-US" sz="950" dirty="0">
+            <a:endParaRPr lang="en-US" sz="1400" dirty="0"/>
+          </a:p>
+          <a:p>
+            <a:pPr indent="0" marL="0">
+              <a:buNone/>
+            </a:pPr>
+            <a:r>
+              <a:rPr lang="en-US" sz="1400" dirty="0">
                 <a:solidFill>
                   <a:srgbClr val="FBF5E6"/>
                 </a:solidFill>
@@ -12490,14 +12493,14 @@
               </a:rPr>
               <a:t>   現存最早留名的 troubadour</a:t>
             </a:r>
-            <a:endParaRPr lang="en-US" sz="950" dirty="0"/>
-          </a:p>
-          <a:p>
-            <a:pPr indent="0" marL="0">
-              <a:buNone/>
-            </a:pPr>
-            <a:r>
-              <a:rPr lang="en-US" sz="950" dirty="0">
+            <a:endParaRPr lang="en-US" sz="1400" dirty="0"/>
+          </a:p>
+          <a:p>
+            <a:pPr indent="0" marL="0">
+              <a:buNone/>
+            </a:pPr>
+            <a:r>
+              <a:rPr lang="en-US" sz="1400" dirty="0">
                 <a:solidFill>
                   <a:srgbClr val="FBF5E6"/>
                 </a:solidFill>
@@ -12507,14 +12510,14 @@
               </a:rPr>
               <a:t>◆ Bernart de Ventadorn (ca. 1130–1200)</a:t>
             </a:r>
-            <a:endParaRPr lang="en-US" sz="950" dirty="0"/>
-          </a:p>
-          <a:p>
-            <a:pPr indent="0" marL="0">
-              <a:buNone/>
-            </a:pPr>
-            <a:r>
-              <a:rPr lang="en-US" sz="950" dirty="0">
+            <a:endParaRPr lang="en-US" sz="1400" dirty="0"/>
+          </a:p>
+          <a:p>
+            <a:pPr indent="0" marL="0">
+              <a:buNone/>
+            </a:pPr>
+            <a:r>
+              <a:rPr lang="en-US" sz="1400" dirty="0">
                 <a:solidFill>
                   <a:srgbClr val="FBF5E6"/>
                 </a:solidFill>
@@ -12524,14 +12527,14 @@
               </a:rPr>
               <a:t>   最具影響力之一 · 城堡僕役之子</a:t>
             </a:r>
-            <a:endParaRPr lang="en-US" sz="950" dirty="0"/>
-          </a:p>
-          <a:p>
-            <a:pPr indent="0" marL="0">
-              <a:buNone/>
-            </a:pPr>
-            <a:r>
-              <a:rPr lang="en-US" sz="950" dirty="0">
+            <a:endParaRPr lang="en-US" sz="1400" dirty="0"/>
+          </a:p>
+          <a:p>
+            <a:pPr indent="0" marL="0">
+              <a:buNone/>
+            </a:pPr>
+            <a:r>
+              <a:rPr lang="en-US" sz="1400" dirty="0">
                 <a:solidFill>
                   <a:srgbClr val="FBF5E6"/>
                 </a:solidFill>
@@ -12541,14 +12544,14 @@
               </a:rPr>
               <a:t>◆ Comtessa de Dia（12 世紀末 / 13 世紀初）</a:t>
             </a:r>
-            <a:endParaRPr lang="en-US" sz="950" dirty="0"/>
-          </a:p>
-          <a:p>
-            <a:pPr indent="0" marL="0">
-              <a:buNone/>
-            </a:pPr>
-            <a:r>
-              <a:rPr lang="en-US" sz="950" dirty="0">
+            <a:endParaRPr lang="en-US" sz="1400" dirty="0"/>
+          </a:p>
+          <a:p>
+            <a:pPr indent="0" marL="0">
+              <a:buNone/>
+            </a:pPr>
+            <a:r>
+              <a:rPr lang="en-US" sz="1400" dirty="0">
                 <a:solidFill>
                   <a:srgbClr val="FBF5E6"/>
                 </a:solidFill>
@@ -12558,7 +12561,7 @@
               </a:rPr>
               <a:t>   唯一有音樂留存的女性遊唱詩人 trobairitz</a:t>
             </a:r>
-            <a:endParaRPr lang="en-US" sz="950" dirty="0"/>
+            <a:endParaRPr lang="en-US" sz="1400" dirty="0"/>
           </a:p>
         </p:txBody>
       </p:sp>
@@ -12615,7 +12618,7 @@
                 <a:ea typeface="Georgia" pitchFamily="34" charset="-122"/>
                 <a:cs typeface="Georgia" pitchFamily="34" charset="-120"/>
               </a:rPr>
-              <a:t>🌇 Trouvères</a:t>
+              <a:t>■ Trouvères</a:t>
             </a:r>
             <a:endParaRPr lang="en-US" sz="1500" dirty="0"/>
           </a:p>
@@ -12639,14 +12642,14 @@
           <a:ln/>
         </p:spPr>
         <p:txBody>
-          <a:bodyPr wrap="square" rtlCol="0" anchor="ctr"/>
-          <a:lstStyle/>
-          <a:p>
-            <a:pPr indent="0" marL="0">
-              <a:buNone/>
-            </a:pPr>
-            <a:r>
-              <a:rPr lang="en-US" sz="1000" i="1" dirty="0">
+          <a:bodyPr wrap="square" rtlCol="0" anchor="t"/>
+          <a:lstStyle/>
+          <a:p>
+            <a:pPr indent="0" marL="0">
+              <a:buNone/>
+            </a:pPr>
+            <a:r>
+              <a:rPr lang="en-US" sz="1400" i="1" dirty="0">
                 <a:solidFill>
                   <a:srgbClr val="E8D8A8"/>
                 </a:solidFill>
@@ -12656,7 +12659,7 @@
               </a:rPr>
               <a:t>北法 · 12 世紀末起 · 古法語（langue d'oïl）</a:t>
             </a:r>
-            <a:endParaRPr lang="en-US" sz="1000" dirty="0"/>
+            <a:endParaRPr lang="en-US" sz="1400" dirty="0"/>
           </a:p>
         </p:txBody>
       </p:sp>
@@ -12698,14 +12701,14 @@
           <a:ln/>
         </p:spPr>
         <p:txBody>
-          <a:bodyPr wrap="square" rtlCol="0" anchor="ctr"/>
-          <a:lstStyle/>
-          <a:p>
-            <a:pPr indent="0" marL="0">
-              <a:buNone/>
-            </a:pPr>
-            <a:r>
-              <a:rPr lang="en-US" sz="950" dirty="0">
+          <a:bodyPr wrap="square" rtlCol="0" anchor="t"/>
+          <a:lstStyle/>
+          <a:p>
+            <a:pPr indent="0" marL="0">
+              <a:buNone/>
+            </a:pPr>
+            <a:r>
+              <a:rPr lang="en-US" sz="1400" dirty="0">
                 <a:solidFill>
                   <a:srgbClr val="FBF5E6"/>
                 </a:solidFill>
@@ -12715,14 +12718,14 @@
               </a:rPr>
               <a:t>• Trover 也意為「創作歌曲」</a:t>
             </a:r>
-            <a:endParaRPr lang="en-US" sz="950" dirty="0"/>
-          </a:p>
-          <a:p>
-            <a:pPr indent="0" marL="0">
-              <a:buNone/>
-            </a:pPr>
-            <a:r>
-              <a:rPr lang="en-US" sz="950" dirty="0">
+            <a:endParaRPr lang="en-US" sz="1400" dirty="0"/>
+          </a:p>
+          <a:p>
+            <a:pPr indent="0" marL="0">
+              <a:buNone/>
+            </a:pPr>
+            <a:r>
+              <a:rPr lang="en-US" sz="1400" dirty="0">
                 <a:solidFill>
                   <a:srgbClr val="FBF5E6"/>
                 </a:solidFill>
@@ -12732,14 +12735,14 @@
               </a:rPr>
               <a:t>• 存 ca. 2,100 首詩 · 2/3 有旋律（遠高於 troubadour）</a:t>
             </a:r>
-            <a:endParaRPr lang="en-US" sz="950" dirty="0"/>
-          </a:p>
-          <a:p>
-            <a:pPr indent="0" marL="0">
-              <a:buNone/>
-            </a:pPr>
-            <a:r>
-              <a:rPr lang="en-US" sz="950" dirty="0">
+            <a:endParaRPr lang="en-US" sz="1400" dirty="0"/>
+          </a:p>
+          <a:p>
+            <a:pPr indent="0" marL="0">
+              <a:buNone/>
+            </a:pPr>
+            <a:r>
+              <a:rPr lang="en-US" sz="1400" dirty="0">
                 <a:solidFill>
                   <a:srgbClr val="FBF5E6"/>
                 </a:solidFill>
@@ -12749,20 +12752,20 @@
               </a:rPr>
               <a:t>• 由南法北傳 · Bernart de Ventadorn 功不可沒</a:t>
             </a:r>
-            <a:endParaRPr lang="en-US" sz="950" dirty="0"/>
-          </a:p>
-          <a:p>
-            <a:pPr indent="0" marL="0">
-              <a:buNone/>
-            </a:pPr>
-            <a:endParaRPr lang="en-US" sz="950" dirty="0"/>
-          </a:p>
-          <a:p>
-            <a:pPr indent="0" marL="0">
-              <a:buNone/>
-            </a:pPr>
-            <a:r>
-              <a:rPr lang="en-US" sz="950" dirty="0">
+            <a:endParaRPr lang="en-US" sz="1400" dirty="0"/>
+          </a:p>
+          <a:p>
+            <a:pPr indent="0" marL="0">
+              <a:buNone/>
+            </a:pPr>
+            <a:endParaRPr lang="en-US" sz="1400" dirty="0"/>
+          </a:p>
+          <a:p>
+            <a:pPr indent="0" marL="0">
+              <a:buNone/>
+            </a:pPr>
+            <a:r>
+              <a:rPr lang="en-US" sz="1400" dirty="0">
                 <a:solidFill>
                   <a:srgbClr val="FBF5E6"/>
                 </a:solidFill>
@@ -12772,14 +12775,14 @@
               </a:rPr>
               <a:t>重要人物:</a:t>
             </a:r>
-            <a:endParaRPr lang="en-US" sz="950" dirty="0"/>
-          </a:p>
-          <a:p>
-            <a:pPr indent="0" marL="0">
-              <a:buNone/>
-            </a:pPr>
-            <a:r>
-              <a:rPr lang="en-US" sz="950" dirty="0">
+            <a:endParaRPr lang="en-US" sz="1400" dirty="0"/>
+          </a:p>
+          <a:p>
+            <a:pPr indent="0" marL="0">
+              <a:buNone/>
+            </a:pPr>
+            <a:r>
+              <a:rPr lang="en-US" sz="1400" dirty="0">
                 <a:solidFill>
                   <a:srgbClr val="FBF5E6"/>
                 </a:solidFill>
@@ -12789,14 +12792,14 @@
               </a:rPr>
               <a:t>◆ Eleanor of Aquitaine (1122–1204)</a:t>
             </a:r>
-            <a:endParaRPr lang="en-US" sz="950" dirty="0"/>
-          </a:p>
-          <a:p>
-            <a:pPr indent="0" marL="0">
-              <a:buNone/>
-            </a:pPr>
-            <a:r>
-              <a:rPr lang="en-US" sz="950" dirty="0">
+            <a:endParaRPr lang="en-US" sz="1400" dirty="0"/>
+          </a:p>
+          <a:p>
+            <a:pPr indent="0" marL="0">
+              <a:buNone/>
+            </a:pPr>
+            <a:r>
+              <a:rPr lang="en-US" sz="1400" dirty="0">
                 <a:solidFill>
                   <a:srgbClr val="FBF5E6"/>
                 </a:solidFill>
@@ -12806,14 +12809,14 @@
               </a:rPr>
               <a:t>   亞奎丹女公爵、法國與英國王后 · 贊助 Bernart</a:t>
             </a:r>
-            <a:endParaRPr lang="en-US" sz="950" dirty="0"/>
-          </a:p>
-          <a:p>
-            <a:pPr indent="0" marL="0">
-              <a:buNone/>
-            </a:pPr>
-            <a:r>
-              <a:rPr lang="en-US" sz="950" dirty="0">
+            <a:endParaRPr lang="en-US" sz="1400" dirty="0"/>
+          </a:p>
+          <a:p>
+            <a:pPr indent="0" marL="0">
+              <a:buNone/>
+            </a:pPr>
+            <a:r>
+              <a:rPr lang="en-US" sz="1400" dirty="0">
                 <a:solidFill>
                   <a:srgbClr val="FBF5E6"/>
                 </a:solidFill>
@@ -12823,14 +12826,14 @@
               </a:rPr>
               <a:t>◆ Richard I（獅心王，1157–1199）</a:t>
             </a:r>
-            <a:endParaRPr lang="en-US" sz="950" dirty="0"/>
-          </a:p>
-          <a:p>
-            <a:pPr indent="0" marL="0">
-              <a:buNone/>
-            </a:pPr>
-            <a:r>
-              <a:rPr lang="en-US" sz="950" dirty="0">
+            <a:endParaRPr lang="en-US" sz="1400" dirty="0"/>
+          </a:p>
+          <a:p>
+            <a:pPr indent="0" marL="0">
+              <a:buNone/>
+            </a:pPr>
+            <a:r>
+              <a:rPr lang="en-US" sz="1400" dirty="0">
                 <a:solidFill>
                   <a:srgbClr val="FBF5E6"/>
                 </a:solidFill>
@@ -12840,14 +12843,14 @@
               </a:rPr>
               <a:t>   Eleanor 之子，本人就是 trouvère，以法文作詞</a:t>
             </a:r>
-            <a:endParaRPr lang="en-US" sz="950" dirty="0"/>
-          </a:p>
-          <a:p>
-            <a:pPr indent="0" marL="0">
-              <a:buNone/>
-            </a:pPr>
-            <a:r>
-              <a:rPr lang="en-US" sz="950" dirty="0">
+            <a:endParaRPr lang="en-US" sz="1400" dirty="0"/>
+          </a:p>
+          <a:p>
+            <a:pPr indent="0" marL="0">
+              <a:buNone/>
+            </a:pPr>
+            <a:r>
+              <a:rPr lang="en-US" sz="1400" dirty="0">
                 <a:solidFill>
                   <a:srgbClr val="FBF5E6"/>
                 </a:solidFill>
@@ -12857,14 +12860,14 @@
               </a:rPr>
               <a:t>◆ Adam de la Halle (ca. 1240–1288)</a:t>
             </a:r>
-            <a:endParaRPr lang="en-US" sz="950" dirty="0"/>
-          </a:p>
-          <a:p>
-            <a:pPr indent="0" marL="0">
-              <a:buNone/>
-            </a:pPr>
-            <a:r>
-              <a:rPr lang="en-US" sz="950" dirty="0">
+            <a:endParaRPr lang="en-US" sz="1400" dirty="0"/>
+          </a:p>
+          <a:p>
+            <a:pPr indent="0" marL="0">
+              <a:buNone/>
+            </a:pPr>
+            <a:r>
+              <a:rPr lang="en-US" sz="1400" dirty="0">
                 <a:solidFill>
                   <a:srgbClr val="FBF5E6"/>
                 </a:solidFill>
@@ -12874,14 +12877,14 @@
               </a:rPr>
               <a:t>   第一位完整作品被集結手稿的方言詩人</a:t>
             </a:r>
-            <a:endParaRPr lang="en-US" sz="950" dirty="0"/>
-          </a:p>
-          <a:p>
-            <a:pPr indent="0" marL="0">
-              <a:buNone/>
-            </a:pPr>
-            <a:r>
-              <a:rPr lang="en-US" sz="950" dirty="0">
+            <a:endParaRPr lang="en-US" sz="1400" dirty="0"/>
+          </a:p>
+          <a:p>
+            <a:pPr indent="0" marL="0">
+              <a:buNone/>
+            </a:pPr>
+            <a:r>
+              <a:rPr lang="en-US" sz="1400" dirty="0">
                 <a:solidFill>
                   <a:srgbClr val="FBF5E6"/>
                 </a:solidFill>
@@ -12891,7 +12894,7 @@
               </a:rPr>
               <a:t>   代表作：Jeu de Robin et de Marion</a:t>
             </a:r>
-            <a:endParaRPr lang="en-US" sz="950" dirty="0"/>
+            <a:endParaRPr lang="en-US" sz="1400" dirty="0"/>
           </a:p>
         </p:txBody>
       </p:sp>
@@ -12913,14 +12916,14 @@
           <a:ln/>
         </p:spPr>
         <p:txBody>
-          <a:bodyPr wrap="square" rtlCol="0" anchor="ctr"/>
+          <a:bodyPr wrap="square" rtlCol="0" anchor="t"/>
           <a:lstStyle/>
           <a:p>
             <a:pPr algn="ctr" indent="0" marL="0">
               <a:buNone/>
             </a:pPr>
             <a:r>
-              <a:rPr lang="en-US" sz="1000" i="1" dirty="0">
+              <a:rPr lang="en-US" sz="1400" i="1" dirty="0">
                 <a:solidFill>
                   <a:srgbClr val="7A2830"/>
                 </a:solidFill>
@@ -12930,7 +12933,7 @@
               </a:rPr>
               <a:t>歌曲收錄於手稿集「Chansonnier」（歌曲集）· 現存大多為 13 世紀中後期抄本</a:t>
             </a:r>
-            <a:endParaRPr lang="en-US" sz="1000" dirty="0"/>
+            <a:endParaRPr lang="en-US" sz="1400" dirty="0"/>
           </a:p>
         </p:txBody>
       </p:sp>
@@ -13157,7 +13160,7 @@
                 <a:ea typeface="Georgia" pitchFamily="34" charset="-122"/>
                 <a:cs typeface="Georgia" pitchFamily="34" charset="-120"/>
               </a:rPr>
-              <a:t>💘 何謂 Fin' amors（精鍊之愛）</a:t>
+              <a:t>■ 何謂 Fin' amors（精鍊之愛）</a:t>
             </a:r>
             <a:endParaRPr lang="en-US" sz="1400" dirty="0"/>
           </a:p>
@@ -13181,14 +13184,14 @@
           <a:ln/>
         </p:spPr>
         <p:txBody>
-          <a:bodyPr wrap="square" rtlCol="0" anchor="ctr"/>
-          <a:lstStyle/>
-          <a:p>
-            <a:pPr indent="0" marL="0">
-              <a:buNone/>
-            </a:pPr>
-            <a:r>
-              <a:rPr lang="en-US" sz="1050" dirty="0">
+          <a:bodyPr wrap="square" rtlCol="0" anchor="t"/>
+          <a:lstStyle/>
+          <a:p>
+            <a:pPr indent="0" marL="0">
+              <a:buNone/>
+            </a:pPr>
+            <a:r>
+              <a:rPr lang="en-US" sz="1400" dirty="0">
                 <a:solidFill>
                   <a:srgbClr val="E8D8A8"/>
                 </a:solidFill>
@@ -13198,14 +13201,14 @@
               </a:rPr>
               <a:t>• 非雙方對等的愛，而是形式化、理想化的愛——情人藉之自我精鍊</a:t>
             </a:r>
-            <a:endParaRPr lang="en-US" sz="1050" dirty="0"/>
-          </a:p>
-          <a:p>
-            <a:pPr indent="0" marL="0">
-              <a:buNone/>
-            </a:pPr>
-            <a:r>
-              <a:rPr lang="en-US" sz="1050" dirty="0">
+            <a:endParaRPr lang="en-US" sz="1400" dirty="0"/>
+          </a:p>
+          <a:p>
+            <a:pPr indent="0" marL="0">
+              <a:buNone/>
+            </a:pPr>
+            <a:r>
+              <a:rPr lang="en-US" sz="1400" dirty="0">
                 <a:solidFill>
                   <a:srgbClr val="E8D8A8"/>
                 </a:solidFill>
@@ -13215,14 +13218,14 @@
               </a:rPr>
               <a:t>  Not mutual; formal, idealized love through which the lover is refined</a:t>
             </a:r>
-            <a:endParaRPr lang="en-US" sz="1050" dirty="0"/>
-          </a:p>
-          <a:p>
-            <a:pPr indent="0" marL="0">
-              <a:buNone/>
-            </a:pPr>
-            <a:r>
-              <a:rPr lang="en-US" sz="1050" dirty="0">
+            <a:endParaRPr lang="en-US" sz="1400" dirty="0"/>
+          </a:p>
+          <a:p>
+            <a:pPr indent="0" marL="0">
+              <a:buNone/>
+            </a:pPr>
+            <a:r>
+              <a:rPr lang="en-US" sz="1400" dirty="0">
                 <a:solidFill>
                   <a:srgbClr val="E8D8A8"/>
                 </a:solidFill>
@@ -13232,14 +13235,14 @@
               </a:rPr>
               <a:t>• 對象通常是另一貴族之妻；從遠方、帶著謹慎、尊敬、謙卑地愛慕</a:t>
             </a:r>
-            <a:endParaRPr lang="en-US" sz="1050" dirty="0"/>
-          </a:p>
-          <a:p>
-            <a:pPr indent="0" marL="0">
-              <a:buNone/>
-            </a:pPr>
-            <a:r>
-              <a:rPr lang="en-US" sz="1050" dirty="0">
+            <a:endParaRPr lang="en-US" sz="1400" dirty="0"/>
+          </a:p>
+          <a:p>
+            <a:pPr indent="0" marL="0">
+              <a:buNone/>
+            </a:pPr>
+            <a:r>
+              <a:rPr lang="en-US" sz="1400" dirty="0">
                 <a:solidFill>
                   <a:srgbClr val="E8D8A8"/>
                 </a:solidFill>
@@ -13249,14 +13252,14 @@
               </a:rPr>
               <a:t>  Object usually another man's wife; adored from a distance with discretion, respect, humility</a:t>
             </a:r>
-            <a:endParaRPr lang="en-US" sz="1050" dirty="0"/>
-          </a:p>
-          <a:p>
-            <a:pPr indent="0" marL="0">
-              <a:buNone/>
-            </a:pPr>
-            <a:r>
-              <a:rPr lang="en-US" sz="1050" dirty="0">
+            <a:endParaRPr lang="en-US" sz="1400" dirty="0"/>
+          </a:p>
+          <a:p>
+            <a:pPr indent="0" marL="0">
+              <a:buNone/>
+            </a:pPr>
+            <a:r>
+              <a:rPr lang="en-US" sz="1400" dirty="0">
                 <a:solidFill>
                   <a:srgbClr val="E8D8A8"/>
                 </a:solidFill>
@@ -13266,14 +13269,14 @@
               </a:rPr>
               <a:t>• 愛慕語言常與對聖母的崇拜相近——女士被塑造成高不可攀、無法回應的理想</a:t>
             </a:r>
-            <a:endParaRPr lang="en-US" sz="1050" dirty="0"/>
-          </a:p>
-          <a:p>
-            <a:pPr indent="0" marL="0">
-              <a:buNone/>
-            </a:pPr>
-            <a:r>
-              <a:rPr lang="en-US" sz="1050" dirty="0">
+            <a:endParaRPr lang="en-US" sz="1400" dirty="0"/>
+          </a:p>
+          <a:p>
+            <a:pPr indent="0" marL="0">
+              <a:buNone/>
+            </a:pPr>
+            <a:r>
+              <a:rPr lang="en-US" sz="1400" dirty="0">
                 <a:solidFill>
                   <a:srgbClr val="E8D8A8"/>
                 </a:solidFill>
@@ -13283,14 +13286,14 @@
               </a:rPr>
               <a:t>  The language borders on devotional songs to the Virgin Mary</a:t>
             </a:r>
-            <a:endParaRPr lang="en-US" sz="1050" dirty="0"/>
-          </a:p>
-          <a:p>
-            <a:pPr indent="0" marL="0">
-              <a:buNone/>
-            </a:pPr>
-            <a:r>
-              <a:rPr lang="en-US" sz="1050" dirty="0">
+            <a:endParaRPr lang="en-US" sz="1400" dirty="0"/>
+          </a:p>
+          <a:p>
+            <a:pPr indent="0" marL="0">
+              <a:buNone/>
+            </a:pPr>
+            <a:r>
+              <a:rPr lang="en-US" sz="1400" dirty="0">
                 <a:solidFill>
                   <a:srgbClr val="E8D8A8"/>
                 </a:solidFill>
@@ -13300,7 +13303,7 @@
               </a:rPr>
               <a:t>• 「courtly love」一詞為 19 世紀後創；不是事實而是藝術形式，向男性同儕展現教養</a:t>
             </a:r>
-            <a:endParaRPr lang="en-US" sz="1050" dirty="0"/>
+            <a:endParaRPr lang="en-US" sz="1400" dirty="0"/>
           </a:p>
         </p:txBody>
       </p:sp>
@@ -13357,7 +13360,7 @@
                 <a:ea typeface="Georgia" pitchFamily="34" charset="-122"/>
                 <a:cs typeface="Georgia" pitchFamily="34" charset="-120"/>
               </a:rPr>
-              <a:t>📚 詩歌類型 Poetic Genres</a:t>
+              <a:t>■ 詩歌類型 Poetic Genres</a:t>
             </a:r>
             <a:endParaRPr lang="en-US" sz="1400" dirty="0"/>
           </a:p>
@@ -13388,7 +13391,7 @@
               <a:buNone/>
             </a:pPr>
             <a:r>
-              <a:rPr lang="en-US" sz="1100" b="1" dirty="0">
+              <a:rPr lang="en-US" sz="1400" b="1" dirty="0">
                 <a:solidFill>
                   <a:srgbClr val="C8A020"/>
                 </a:solidFill>
@@ -13398,7 +13401,7 @@
               </a:rPr>
               <a:t>Canso 情歌</a:t>
             </a:r>
-            <a:endParaRPr lang="en-US" sz="1100" dirty="0"/>
+            <a:endParaRPr lang="en-US" sz="1400" dirty="0"/>
           </a:p>
         </p:txBody>
       </p:sp>
@@ -13420,14 +13423,14 @@
           <a:ln/>
         </p:spPr>
         <p:txBody>
-          <a:bodyPr wrap="square" lIns="0" tIns="0" rIns="0" bIns="0" rtlCol="0" anchor="ctr"/>
-          <a:lstStyle/>
-          <a:p>
-            <a:pPr indent="0" marL="0">
-              <a:buNone/>
-            </a:pPr>
-            <a:r>
-              <a:rPr lang="en-US" sz="950" dirty="0">
+          <a:bodyPr wrap="square" lIns="0" tIns="0" rIns="0" bIns="0" rtlCol="0" anchor="t"/>
+          <a:lstStyle/>
+          <a:p>
+            <a:pPr indent="0" marL="0">
+              <a:buNone/>
+            </a:pPr>
+            <a:r>
+              <a:rPr lang="en-US" sz="1400" dirty="0">
                 <a:solidFill>
                   <a:srgbClr val="E8D8A8"/>
                 </a:solidFill>
@@ -13437,7 +13440,7 @@
               </a:rPr>
               <a:t>Love song · 最主要的類型</a:t>
             </a:r>
-            <a:endParaRPr lang="en-US" sz="950" dirty="0"/>
+            <a:endParaRPr lang="en-US" sz="1400" dirty="0"/>
           </a:p>
         </p:txBody>
       </p:sp>
@@ -13466,7 +13469,7 @@
               <a:buNone/>
             </a:pPr>
             <a:r>
-              <a:rPr lang="en-US" sz="1100" b="1" dirty="0">
+              <a:rPr lang="en-US" sz="1400" b="1" dirty="0">
                 <a:solidFill>
                   <a:srgbClr val="C8A020"/>
                 </a:solidFill>
@@ -13476,7 +13479,7 @@
               </a:rPr>
               <a:t>Alba 黎明歌</a:t>
             </a:r>
-            <a:endParaRPr lang="en-US" sz="1100" dirty="0"/>
+            <a:endParaRPr lang="en-US" sz="1400" dirty="0"/>
           </a:p>
         </p:txBody>
       </p:sp>
@@ -13498,14 +13501,14 @@
           <a:ln/>
         </p:spPr>
         <p:txBody>
-          <a:bodyPr wrap="square" lIns="0" tIns="0" rIns="0" bIns="0" rtlCol="0" anchor="ctr"/>
-          <a:lstStyle/>
-          <a:p>
-            <a:pPr indent="0" marL="0">
-              <a:buNone/>
-            </a:pPr>
-            <a:r>
-              <a:rPr lang="en-US" sz="950" dirty="0">
+          <a:bodyPr wrap="square" lIns="0" tIns="0" rIns="0" bIns="0" rtlCol="0" anchor="t"/>
+          <a:lstStyle/>
+          <a:p>
+            <a:pPr indent="0" marL="0">
+              <a:buNone/>
+            </a:pPr>
+            <a:r>
+              <a:rPr lang="en-US" sz="1400" dirty="0">
                 <a:solidFill>
                   <a:srgbClr val="E8D8A8"/>
                 </a:solidFill>
@@ -13515,7 +13518,7 @@
               </a:rPr>
               <a:t>Dawn song · 情人於拂曉被迫分別</a:t>
             </a:r>
-            <a:endParaRPr lang="en-US" sz="950" dirty="0"/>
+            <a:endParaRPr lang="en-US" sz="1400" dirty="0"/>
           </a:p>
         </p:txBody>
       </p:sp>
@@ -13544,7 +13547,7 @@
               <a:buNone/>
             </a:pPr>
             <a:r>
-              <a:rPr lang="en-US" sz="1100" b="1" dirty="0">
+              <a:rPr lang="en-US" sz="1400" b="1" dirty="0">
                 <a:solidFill>
                   <a:srgbClr val="C8A020"/>
                 </a:solidFill>
@@ -13554,7 +13557,7 @@
               </a:rPr>
               <a:t>Balada 舞歌</a:t>
             </a:r>
-            <a:endParaRPr lang="en-US" sz="1100" dirty="0"/>
+            <a:endParaRPr lang="en-US" sz="1400" dirty="0"/>
           </a:p>
         </p:txBody>
       </p:sp>
@@ -13576,14 +13579,14 @@
           <a:ln/>
         </p:spPr>
         <p:txBody>
-          <a:bodyPr wrap="square" lIns="0" tIns="0" rIns="0" bIns="0" rtlCol="0" anchor="ctr"/>
-          <a:lstStyle/>
-          <a:p>
-            <a:pPr indent="0" marL="0">
-              <a:buNone/>
-            </a:pPr>
-            <a:r>
-              <a:rPr lang="en-US" sz="950" dirty="0">
+          <a:bodyPr wrap="square" lIns="0" tIns="0" rIns="0" bIns="0" rtlCol="0" anchor="t"/>
+          <a:lstStyle/>
+          <a:p>
+            <a:pPr indent="0" marL="0">
+              <a:buNone/>
+            </a:pPr>
+            <a:r>
+              <a:rPr lang="en-US" sz="1400" dirty="0">
                 <a:solidFill>
                   <a:srgbClr val="E8D8A8"/>
                 </a:solidFill>
@@ -13593,7 +13596,7 @@
               </a:rPr>
               <a:t>Dance song · 有迴旋副歌（refrain）</a:t>
             </a:r>
-            <a:endParaRPr lang="en-US" sz="950" dirty="0"/>
+            <a:endParaRPr lang="en-US" sz="1400" dirty="0"/>
           </a:p>
         </p:txBody>
       </p:sp>
@@ -13622,7 +13625,7 @@
               <a:buNone/>
             </a:pPr>
             <a:r>
-              <a:rPr lang="en-US" sz="1100" b="1" dirty="0">
+              <a:rPr lang="en-US" sz="1400" b="1" dirty="0">
                 <a:solidFill>
                   <a:srgbClr val="C8A020"/>
                 </a:solidFill>
@@ -13632,7 +13635,7 @@
               </a:rPr>
               <a:t>Planh 輓歌</a:t>
             </a:r>
-            <a:endParaRPr lang="en-US" sz="1100" dirty="0"/>
+            <a:endParaRPr lang="en-US" sz="1400" dirty="0"/>
           </a:p>
         </p:txBody>
       </p:sp>
@@ -13654,14 +13657,14 @@
           <a:ln/>
         </p:spPr>
         <p:txBody>
-          <a:bodyPr wrap="square" lIns="0" tIns="0" rIns="0" bIns="0" rtlCol="0" anchor="ctr"/>
-          <a:lstStyle/>
-          <a:p>
-            <a:pPr indent="0" marL="0">
-              <a:buNone/>
-            </a:pPr>
-            <a:r>
-              <a:rPr lang="en-US" sz="950" dirty="0">
+          <a:bodyPr wrap="square" lIns="0" tIns="0" rIns="0" bIns="0" rtlCol="0" anchor="t"/>
+          <a:lstStyle/>
+          <a:p>
+            <a:pPr indent="0" marL="0">
+              <a:buNone/>
+            </a:pPr>
+            <a:r>
+              <a:rPr lang="en-US" sz="1400" dirty="0">
                 <a:solidFill>
                   <a:srgbClr val="E8D8A8"/>
                 </a:solidFill>
@@ -13671,7 +13674,7 @@
               </a:rPr>
               <a:t>Lament · 悼念逝者</a:t>
             </a:r>
-            <a:endParaRPr lang="en-US" sz="950" dirty="0"/>
+            <a:endParaRPr lang="en-US" sz="1400" dirty="0"/>
           </a:p>
         </p:txBody>
       </p:sp>
@@ -13700,7 +13703,7 @@
               <a:buNone/>
             </a:pPr>
             <a:r>
-              <a:rPr lang="en-US" sz="1100" b="1" dirty="0">
+              <a:rPr lang="en-US" sz="1400" b="1" dirty="0">
                 <a:solidFill>
                   <a:srgbClr val="C8A020"/>
                 </a:solidFill>
@@ -13710,7 +13713,7 @@
               </a:rPr>
               <a:t>Tenso 辯論歌</a:t>
             </a:r>
-            <a:endParaRPr lang="en-US" sz="1100" dirty="0"/>
+            <a:endParaRPr lang="en-US" sz="1400" dirty="0"/>
           </a:p>
         </p:txBody>
       </p:sp>
@@ -13732,14 +13735,14 @@
           <a:ln/>
         </p:spPr>
         <p:txBody>
-          <a:bodyPr wrap="square" lIns="0" tIns="0" rIns="0" bIns="0" rtlCol="0" anchor="ctr"/>
-          <a:lstStyle/>
-          <a:p>
-            <a:pPr indent="0" marL="0">
-              <a:buNone/>
-            </a:pPr>
-            <a:r>
-              <a:rPr lang="en-US" sz="950" dirty="0">
+          <a:bodyPr wrap="square" lIns="0" tIns="0" rIns="0" bIns="0" rtlCol="0" anchor="t"/>
+          <a:lstStyle/>
+          <a:p>
+            <a:pPr indent="0" marL="0">
+              <a:buNone/>
+            </a:pPr>
+            <a:r>
+              <a:rPr lang="en-US" sz="1400" dirty="0">
                 <a:solidFill>
                   <a:srgbClr val="E8D8A8"/>
                 </a:solidFill>
@@ -13749,7 +13752,7 @@
               </a:rPr>
               <a:t>Debate song · 兩人就某一主題對話</a:t>
             </a:r>
-            <a:endParaRPr lang="en-US" sz="950" dirty="0"/>
+            <a:endParaRPr lang="en-US" sz="1400" dirty="0"/>
           </a:p>
         </p:txBody>
       </p:sp>
@@ -13778,7 +13781,7 @@
               <a:buNone/>
             </a:pPr>
             <a:r>
-              <a:rPr lang="en-US" sz="1100" b="1" dirty="0">
+              <a:rPr lang="en-US" sz="1400" b="1" dirty="0">
                 <a:solidFill>
                   <a:srgbClr val="C8A020"/>
                 </a:solidFill>
@@ -13788,7 +13791,7 @@
               </a:rPr>
               <a:t>Pastourelle 牧歌</a:t>
             </a:r>
-            <a:endParaRPr lang="en-US" sz="1100" dirty="0"/>
+            <a:endParaRPr lang="en-US" sz="1400" dirty="0"/>
           </a:p>
         </p:txBody>
       </p:sp>
@@ -13810,14 +13813,14 @@
           <a:ln/>
         </p:spPr>
         <p:txBody>
-          <a:bodyPr wrap="square" lIns="0" tIns="0" rIns="0" bIns="0" rtlCol="0" anchor="ctr"/>
-          <a:lstStyle/>
-          <a:p>
-            <a:pPr indent="0" marL="0">
-              <a:buNone/>
-            </a:pPr>
-            <a:r>
-              <a:rPr lang="en-US" sz="950" dirty="0">
+          <a:bodyPr wrap="square" lIns="0" tIns="0" rIns="0" bIns="0" rtlCol="0" anchor="t"/>
+          <a:lstStyle/>
+          <a:p>
+            <a:pPr indent="0" marL="0">
+              <a:buNone/>
+            </a:pPr>
+            <a:r>
+              <a:rPr lang="en-US" sz="1400" dirty="0">
                 <a:solidFill>
                   <a:srgbClr val="E8D8A8"/>
                 </a:solidFill>
@@ -13827,7 +13830,7 @@
               </a:rPr>
               <a:t>牧羊女與追求她的騎士</a:t>
             </a:r>
-            <a:endParaRPr lang="en-US" sz="950" dirty="0"/>
+            <a:endParaRPr lang="en-US" sz="1400" dirty="0"/>
           </a:p>
         </p:txBody>
       </p:sp>
@@ -13960,14 +13963,14 @@
           <a:ln/>
         </p:spPr>
         <p:txBody>
-          <a:bodyPr wrap="square" lIns="0" tIns="0" rIns="0" bIns="0" rtlCol="0" anchor="ctr"/>
-          <a:lstStyle/>
-          <a:p>
-            <a:pPr indent="0" marL="0">
-              <a:buNone/>
-            </a:pPr>
-            <a:r>
-              <a:rPr lang="en-US" sz="1200" i="1" dirty="0">
+          <a:bodyPr wrap="square" lIns="0" tIns="0" rIns="0" bIns="0" rtlCol="0" anchor="t"/>
+          <a:lstStyle/>
+          <a:p>
+            <a:pPr indent="0" marL="0">
+              <a:buNone/>
+            </a:pPr>
+            <a:r>
+              <a:rPr lang="en-US" sz="1400" i="1" dirty="0">
                 <a:solidFill>
                   <a:srgbClr val="5C3A28"/>
                 </a:solidFill>
@@ -13977,7 +13980,7 @@
               </a:rPr>
               <a:t>Melodies &amp; the AAB Form · Forms at a Glance</a:t>
             </a:r>
-            <a:endParaRPr lang="en-US" sz="1200" dirty="0"/>
+            <a:endParaRPr lang="en-US" sz="1400" dirty="0"/>
           </a:p>
         </p:txBody>
       </p:sp>
@@ -14054,7 +14057,7 @@
                 <a:ea typeface="Georgia" pitchFamily="34" charset="-122"/>
                 <a:cs typeface="Georgia" pitchFamily="34" charset="-120"/>
               </a:rPr>
-              <a:t>🎵 旋律特徵 Melody</a:t>
+              <a:t>■ 旋律特徵 Melody</a:t>
             </a:r>
             <a:endParaRPr lang="en-US" sz="1400" dirty="0"/>
           </a:p>
@@ -14098,14 +14101,14 @@
           <a:ln/>
         </p:spPr>
         <p:txBody>
-          <a:bodyPr wrap="square" rtlCol="0" anchor="ctr"/>
-          <a:lstStyle/>
-          <a:p>
-            <a:pPr indent="0" marL="0">
-              <a:buNone/>
-            </a:pPr>
-            <a:r>
-              <a:rPr lang="en-US" sz="1000" dirty="0">
+          <a:bodyPr wrap="square" rtlCol="0" anchor="t"/>
+          <a:lstStyle/>
+          <a:p>
+            <a:pPr indent="0" marL="0">
+              <a:buNone/>
+            </a:pPr>
+            <a:r>
+              <a:rPr lang="en-US" sz="1400" dirty="0">
                 <a:solidFill>
                   <a:srgbClr val="FBF5E6"/>
                 </a:solidFill>
@@ -14115,14 +14118,14 @@
               </a:rPr>
               <a:t>• 分節歌式（strophic）</a:t>
             </a:r>
-            <a:endParaRPr lang="en-US" sz="1000" dirty="0"/>
-          </a:p>
-          <a:p>
-            <a:pPr indent="0" marL="0">
-              <a:buNone/>
-            </a:pPr>
-            <a:r>
-              <a:rPr lang="en-US" sz="1000" dirty="0">
+            <a:endParaRPr lang="en-US" sz="1400" dirty="0"/>
+          </a:p>
+          <a:p>
+            <a:pPr indent="0" marL="0">
+              <a:buNone/>
+            </a:pPr>
+            <a:r>
+              <a:rPr lang="en-US" sz="1400" dirty="0">
                 <a:solidFill>
                   <a:srgbClr val="FBF5E6"/>
                 </a:solidFill>
@@ -14132,20 +14135,20 @@
               </a:rPr>
               <a:t>  每段歌詞共用同一旋律</a:t>
             </a:r>
-            <a:endParaRPr lang="en-US" sz="1000" dirty="0"/>
-          </a:p>
-          <a:p>
-            <a:pPr indent="0" marL="0">
-              <a:buNone/>
-            </a:pPr>
-            <a:endParaRPr lang="en-US" sz="1000" dirty="0"/>
-          </a:p>
-          <a:p>
-            <a:pPr indent="0" marL="0">
-              <a:buNone/>
-            </a:pPr>
-            <a:r>
-              <a:rPr lang="en-US" sz="1000" dirty="0">
+            <a:endParaRPr lang="en-US" sz="1400" dirty="0"/>
+          </a:p>
+          <a:p>
+            <a:pPr indent="0" marL="0">
+              <a:buNone/>
+            </a:pPr>
+            <a:endParaRPr lang="en-US" sz="1400" dirty="0"/>
+          </a:p>
+          <a:p>
+            <a:pPr indent="0" marL="0">
+              <a:buNone/>
+            </a:pPr>
+            <a:r>
+              <a:rPr lang="en-US" sz="1400" dirty="0">
                 <a:solidFill>
                   <a:srgbClr val="FBF5E6"/>
                 </a:solidFill>
@@ -14155,14 +14158,14 @@
               </a:rPr>
               <a:t>• 多半音節式（mostly syllabic）</a:t>
             </a:r>
-            <a:endParaRPr lang="en-US" sz="1000" dirty="0"/>
-          </a:p>
-          <a:p>
-            <a:pPr indent="0" marL="0">
-              <a:buNone/>
-            </a:pPr>
-            <a:r>
-              <a:rPr lang="en-US" sz="1000" dirty="0">
+            <a:endParaRPr lang="en-US" sz="1400" dirty="0"/>
+          </a:p>
+          <a:p>
+            <a:pPr indent="0" marL="0">
+              <a:buNone/>
+            </a:pPr>
+            <a:r>
+              <a:rPr lang="en-US" sz="1400" dirty="0">
                 <a:solidFill>
                   <a:srgbClr val="FBF5E6"/>
                 </a:solidFill>
@@ -14172,20 +14175,20 @@
               </a:rPr>
               <a:t>  偶有兩三音的 neume</a:t>
             </a:r>
-            <a:endParaRPr lang="en-US" sz="1000" dirty="0"/>
-          </a:p>
-          <a:p>
-            <a:pPr indent="0" marL="0">
-              <a:buNone/>
-            </a:pPr>
-            <a:endParaRPr lang="en-US" sz="1000" dirty="0"/>
-          </a:p>
-          <a:p>
-            <a:pPr indent="0" marL="0">
-              <a:buNone/>
-            </a:pPr>
-            <a:r>
-              <a:rPr lang="en-US" sz="1000" dirty="0">
+            <a:endParaRPr lang="en-US" sz="1400" dirty="0"/>
+          </a:p>
+          <a:p>
+            <a:pPr indent="0" marL="0">
+              <a:buNone/>
+            </a:pPr>
+            <a:endParaRPr lang="en-US" sz="1400" dirty="0"/>
+          </a:p>
+          <a:p>
+            <a:pPr indent="0" marL="0">
+              <a:buNone/>
+            </a:pPr>
+            <a:r>
+              <a:rPr lang="en-US" sz="1400" dirty="0">
                 <a:solidFill>
                   <a:srgbClr val="FBF5E6"/>
                 </a:solidFill>
@@ -14195,14 +14198,14 @@
               </a:rPr>
               <a:t>• 音域窄，少超過九度</a:t>
             </a:r>
-            <a:endParaRPr lang="en-US" sz="1000" dirty="0"/>
-          </a:p>
-          <a:p>
-            <a:pPr indent="0" marL="0">
-              <a:buNone/>
-            </a:pPr>
-            <a:r>
-              <a:rPr lang="en-US" sz="1000" dirty="0">
+            <a:endParaRPr lang="en-US" sz="1400" dirty="0"/>
+          </a:p>
+          <a:p>
+            <a:pPr indent="0" marL="0">
+              <a:buNone/>
+            </a:pPr>
+            <a:r>
+              <a:rPr lang="en-US" sz="1400" dirty="0">
                 <a:solidFill>
                   <a:srgbClr val="FBF5E6"/>
                 </a:solidFill>
@@ -14212,20 +14215,20 @@
               </a:rPr>
               <a:t>  Range seldom over a ninth</a:t>
             </a:r>
-            <a:endParaRPr lang="en-US" sz="1000" dirty="0"/>
-          </a:p>
-          <a:p>
-            <a:pPr indent="0" marL="0">
-              <a:buNone/>
-            </a:pPr>
-            <a:endParaRPr lang="en-US" sz="1000" dirty="0"/>
-          </a:p>
-          <a:p>
-            <a:pPr indent="0" marL="0">
-              <a:buNone/>
-            </a:pPr>
-            <a:r>
-              <a:rPr lang="en-US" sz="1000" dirty="0">
+            <a:endParaRPr lang="en-US" sz="1400" dirty="0"/>
+          </a:p>
+          <a:p>
+            <a:pPr indent="0" marL="0">
+              <a:buNone/>
+            </a:pPr>
+            <a:endParaRPr lang="en-US" sz="1400" dirty="0"/>
+          </a:p>
+          <a:p>
+            <a:pPr indent="0" marL="0">
+              <a:buNone/>
+            </a:pPr>
+            <a:r>
+              <a:rPr lang="en-US" sz="1400" dirty="0">
                 <a:solidFill>
                   <a:srgbClr val="FBF5E6"/>
                 </a:solidFill>
@@ -14235,20 +14238,20 @@
               </a:rPr>
               <a:t>• 主要級進，偶有三度跳進</a:t>
             </a:r>
-            <a:endParaRPr lang="en-US" sz="1000" dirty="0"/>
-          </a:p>
-          <a:p>
-            <a:pPr indent="0" marL="0">
-              <a:buNone/>
-            </a:pPr>
-            <a:endParaRPr lang="en-US" sz="1000" dirty="0"/>
-          </a:p>
-          <a:p>
-            <a:pPr indent="0" marL="0">
-              <a:buNone/>
-            </a:pPr>
-            <a:r>
-              <a:rPr lang="en-US" sz="1000" dirty="0">
+            <a:endParaRPr lang="en-US" sz="1400" dirty="0"/>
+          </a:p>
+          <a:p>
+            <a:pPr indent="0" marL="0">
+              <a:buNone/>
+            </a:pPr>
+            <a:endParaRPr lang="en-US" sz="1400" dirty="0"/>
+          </a:p>
+          <a:p>
+            <a:pPr indent="0" marL="0">
+              <a:buNone/>
+            </a:pPr>
+            <a:r>
+              <a:rPr lang="en-US" sz="1400" dirty="0">
                 <a:solidFill>
                   <a:srgbClr val="FBF5E6"/>
                 </a:solidFill>
@@ -14256,16 +14259,16 @@
                 <a:ea typeface="Calibri" pitchFamily="34" charset="-122"/>
                 <a:cs typeface="Calibri" pitchFamily="34" charset="-120"/>
               </a:rPr>
-              <a:t>• 樂句呈「弧形」：升至高點後下行至終止</a:t>
-            </a:r>
-            <a:endParaRPr lang="en-US" sz="1000" dirty="0"/>
-          </a:p>
-          <a:p>
-            <a:pPr indent="0" marL="0">
-              <a:buNone/>
-            </a:pPr>
-            <a:r>
-              <a:rPr lang="en-US" sz="1000" dirty="0">
+              <a:t>• 樂句呈「弧形」：升至高點後下行</a:t>
+            </a:r>
+            <a:endParaRPr lang="en-US" sz="1400" dirty="0"/>
+          </a:p>
+          <a:p>
+            <a:pPr indent="0" marL="0">
+              <a:buNone/>
+            </a:pPr>
+            <a:r>
+              <a:rPr lang="en-US" sz="1400" dirty="0">
                 <a:solidFill>
                   <a:srgbClr val="FBF5E6"/>
                 </a:solidFill>
@@ -14275,20 +14278,20 @@
               </a:rPr>
               <a:t>  Phrases arch-shaped</a:t>
             </a:r>
-            <a:endParaRPr lang="en-US" sz="1000" dirty="0"/>
-          </a:p>
-          <a:p>
-            <a:pPr indent="0" marL="0">
-              <a:buNone/>
-            </a:pPr>
-            <a:endParaRPr lang="en-US" sz="1000" dirty="0"/>
-          </a:p>
-          <a:p>
-            <a:pPr indent="0" marL="0">
-              <a:buNone/>
-            </a:pPr>
-            <a:r>
-              <a:rPr lang="en-US" sz="1000" dirty="0">
+            <a:endParaRPr lang="en-US" sz="1400" dirty="0"/>
+          </a:p>
+          <a:p>
+            <a:pPr indent="0" marL="0">
+              <a:buNone/>
+            </a:pPr>
+            <a:endParaRPr lang="en-US" sz="1400" dirty="0"/>
+          </a:p>
+          <a:p>
+            <a:pPr indent="0" marL="0">
+              <a:buNone/>
+            </a:pPr>
+            <a:r>
+              <a:rPr lang="en-US" sz="1400" dirty="0">
                 <a:solidFill>
                   <a:srgbClr val="FBF5E6"/>
                 </a:solidFill>
@@ -14296,9 +14299,9 @@
                 <a:ea typeface="Calibri" pitchFamily="34" charset="-122"/>
                 <a:cs typeface="Calibri" pitchFamily="34" charset="-120"/>
               </a:rPr>
-              <a:t>• 多符合教會調式——mode 1 與 mode 7 最常見</a:t>
-            </a:r>
-            <a:endParaRPr lang="en-US" sz="1000" dirty="0"/>
+              <a:t>• 符合教會調式 mode 1、mode 7</a:t>
+            </a:r>
+            <a:endParaRPr lang="en-US" sz="1400" dirty="0"/>
           </a:p>
         </p:txBody>
       </p:sp>
@@ -14355,7 +14358,7 @@
                 <a:ea typeface="Georgia" pitchFamily="34" charset="-122"/>
                 <a:cs typeface="Georgia" pitchFamily="34" charset="-120"/>
               </a:rPr>
-              <a:t>📐 AAB 形式</a:t>
+              <a:t>■ AAB 形式</a:t>
             </a:r>
             <a:endParaRPr lang="en-US" sz="1400" dirty="0"/>
           </a:p>
@@ -14399,14 +14402,14 @@
           <a:ln/>
         </p:spPr>
         <p:txBody>
-          <a:bodyPr wrap="square" rtlCol="0" anchor="ctr"/>
-          <a:lstStyle/>
-          <a:p>
-            <a:pPr indent="0" marL="0">
-              <a:buNone/>
-            </a:pPr>
-            <a:r>
-              <a:rPr lang="en-US" sz="950" dirty="0">
+          <a:bodyPr wrap="square" rtlCol="0" anchor="t"/>
+          <a:lstStyle/>
+          <a:p>
+            <a:pPr indent="0" marL="0">
+              <a:buNone/>
+            </a:pPr>
+            <a:r>
+              <a:rPr lang="en-US" sz="1400" dirty="0">
                 <a:solidFill>
                   <a:srgbClr val="FBF5E6"/>
                 </a:solidFill>
@@ -14416,14 +14419,14 @@
               </a:rPr>
               <a:t>• 一段樂句群唱兩次（第二次填新詞）+ 對比段</a:t>
             </a:r>
-            <a:endParaRPr lang="en-US" sz="950" dirty="0"/>
-          </a:p>
-          <a:p>
-            <a:pPr indent="0" marL="0">
-              <a:buNone/>
-            </a:pPr>
-            <a:r>
-              <a:rPr lang="en-US" sz="950" dirty="0">
+            <a:endParaRPr lang="en-US" sz="1400" dirty="0"/>
+          </a:p>
+          <a:p>
+            <a:pPr indent="0" marL="0">
+              <a:buNone/>
+            </a:pPr>
+            <a:r>
+              <a:rPr lang="en-US" sz="1400" dirty="0">
                 <a:solidFill>
                   <a:srgbClr val="FBF5E6"/>
                 </a:solidFill>
@@ -14433,20 +14436,20 @@
               </a:rPr>
               <a:t>  Section sung twice (new text) + contrasting section</a:t>
             </a:r>
-            <a:endParaRPr lang="en-US" sz="950" dirty="0"/>
-          </a:p>
-          <a:p>
-            <a:pPr indent="0" marL="0">
-              <a:buNone/>
-            </a:pPr>
-            <a:endParaRPr lang="en-US" sz="950" dirty="0"/>
-          </a:p>
-          <a:p>
-            <a:pPr indent="0" marL="0">
-              <a:buNone/>
-            </a:pPr>
-            <a:r>
-              <a:rPr lang="en-US" sz="950" dirty="0">
+            <a:endParaRPr lang="en-US" sz="1400" dirty="0"/>
+          </a:p>
+          <a:p>
+            <a:pPr indent="0" marL="0">
+              <a:buNone/>
+            </a:pPr>
+            <a:endParaRPr lang="en-US" sz="1400" dirty="0"/>
+          </a:p>
+          <a:p>
+            <a:pPr indent="0" marL="0">
+              <a:buNone/>
+            </a:pPr>
+            <a:r>
+              <a:rPr lang="en-US" sz="1400" dirty="0">
                 <a:solidFill>
                   <a:srgbClr val="FBF5E6"/>
                 </a:solidFill>
@@ -14456,14 +14459,14 @@
               </a:rPr>
               <a:t>• A 段與 B 段常以相同樂句結束</a:t>
             </a:r>
-            <a:endParaRPr lang="en-US" sz="950" dirty="0"/>
-          </a:p>
-          <a:p>
-            <a:pPr indent="0" marL="0">
-              <a:buNone/>
-            </a:pPr>
-            <a:r>
-              <a:rPr lang="en-US" sz="950" dirty="0">
+            <a:endParaRPr lang="en-US" sz="1400" dirty="0"/>
+          </a:p>
+          <a:p>
+            <a:pPr indent="0" marL="0">
+              <a:buNone/>
+            </a:pPr>
+            <a:r>
+              <a:rPr lang="en-US" sz="1400" dirty="0">
                 <a:solidFill>
                   <a:srgbClr val="FBF5E6"/>
                 </a:solidFill>
@@ -14473,20 +14476,20 @@
               </a:rPr>
               <a:t>  → 產生「音樂韻腳」(musical rhyme)</a:t>
             </a:r>
-            <a:endParaRPr lang="en-US" sz="950" dirty="0"/>
-          </a:p>
-          <a:p>
-            <a:pPr indent="0" marL="0">
-              <a:buNone/>
-            </a:pPr>
-            <a:endParaRPr lang="en-US" sz="950" dirty="0"/>
-          </a:p>
-          <a:p>
-            <a:pPr indent="0" marL="0">
-              <a:buNone/>
-            </a:pPr>
-            <a:r>
-              <a:rPr lang="en-US" sz="950" dirty="0">
+            <a:endParaRPr lang="en-US" sz="1400" dirty="0"/>
+          </a:p>
+          <a:p>
+            <a:pPr indent="0" marL="0">
+              <a:buNone/>
+            </a:pPr>
+            <a:endParaRPr lang="en-US" sz="1400" dirty="0"/>
+          </a:p>
+          <a:p>
+            <a:pPr indent="0" marL="0">
+              <a:buNone/>
+            </a:pPr>
+            <a:r>
+              <a:rPr lang="en-US" sz="1400" dirty="0">
                 <a:solidFill>
                   <a:srgbClr val="FBF5E6"/>
                 </a:solidFill>
@@ -14496,14 +14499,14 @@
               </a:rPr>
               <a:t>• 德國 Minnesinger 稱為 Bar Form</a:t>
             </a:r>
-            <a:endParaRPr lang="en-US" sz="950" dirty="0"/>
-          </a:p>
-          <a:p>
-            <a:pPr indent="0" marL="0">
-              <a:buNone/>
-            </a:pPr>
-            <a:r>
-              <a:rPr lang="en-US" sz="950" dirty="0">
+            <a:endParaRPr lang="en-US" sz="1400" dirty="0"/>
+          </a:p>
+          <a:p>
+            <a:pPr indent="0" marL="0">
+              <a:buNone/>
+            </a:pPr>
+            <a:r>
+              <a:rPr lang="en-US" sz="1400" dirty="0">
                 <a:solidFill>
                   <a:srgbClr val="FBF5E6"/>
                 </a:solidFill>
@@ -14513,14 +14516,14 @@
               </a:rPr>
               <a:t>  A 段 = Stollen（下唇）</a:t>
             </a:r>
-            <a:endParaRPr lang="en-US" sz="950" dirty="0"/>
-          </a:p>
-          <a:p>
-            <a:pPr indent="0" marL="0">
-              <a:buNone/>
-            </a:pPr>
-            <a:r>
-              <a:rPr lang="en-US" sz="950" dirty="0">
+            <a:endParaRPr lang="en-US" sz="1400" dirty="0"/>
+          </a:p>
+          <a:p>
+            <a:pPr indent="0" marL="0">
+              <a:buNone/>
+            </a:pPr>
+            <a:r>
+              <a:rPr lang="en-US" sz="1400" dirty="0">
                 <a:solidFill>
                   <a:srgbClr val="FBF5E6"/>
                 </a:solidFill>
@@ -14530,20 +14533,20 @@
               </a:rPr>
               <a:t>  B 段 = Abgesang（末唱）</a:t>
             </a:r>
-            <a:endParaRPr lang="en-US" sz="950" dirty="0"/>
-          </a:p>
-          <a:p>
-            <a:pPr indent="0" marL="0">
-              <a:buNone/>
-            </a:pPr>
-            <a:endParaRPr lang="en-US" sz="950" dirty="0"/>
-          </a:p>
-          <a:p>
-            <a:pPr indent="0" marL="0">
-              <a:buNone/>
-            </a:pPr>
-            <a:r>
-              <a:rPr lang="en-US" sz="950" dirty="0">
+            <a:endParaRPr lang="en-US" sz="1400" dirty="0"/>
+          </a:p>
+          <a:p>
+            <a:pPr indent="0" marL="0">
+              <a:buNone/>
+            </a:pPr>
+            <a:endParaRPr lang="en-US" sz="1400" dirty="0"/>
+          </a:p>
+          <a:p>
+            <a:pPr indent="0" marL="0">
+              <a:buNone/>
+            </a:pPr>
+            <a:r>
+              <a:rPr lang="en-US" sz="1400" dirty="0">
                 <a:solidFill>
                   <a:srgbClr val="FBF5E6"/>
                 </a:solidFill>
@@ -14553,14 +14556,14 @@
               </a:rPr>
               <a:t>• 四首 NAWM 範例:</a:t>
             </a:r>
-            <a:endParaRPr lang="en-US" sz="950" dirty="0"/>
-          </a:p>
-          <a:p>
-            <a:pPr indent="0" marL="0">
-              <a:buNone/>
-            </a:pPr>
-            <a:r>
-              <a:rPr lang="en-US" sz="950" dirty="0">
+            <a:endParaRPr lang="en-US" sz="1400" dirty="0"/>
+          </a:p>
+          <a:p>
+            <a:pPr indent="0" marL="0">
+              <a:buNone/>
+            </a:pPr>
+            <a:r>
+              <a:rPr lang="en-US" sz="1400" dirty="0">
                 <a:solidFill>
                   <a:srgbClr val="FBF5E6"/>
                 </a:solidFill>
@@ -14570,14 +14573,14 @@
               </a:rPr>
               <a:t>  A chantar（Comtessa de Dia）</a:t>
             </a:r>
-            <a:endParaRPr lang="en-US" sz="950" dirty="0"/>
-          </a:p>
-          <a:p>
-            <a:pPr indent="0" marL="0">
-              <a:buNone/>
-            </a:pPr>
-            <a:r>
-              <a:rPr lang="en-US" sz="950" dirty="0">
+            <a:endParaRPr lang="en-US" sz="1400" dirty="0"/>
+          </a:p>
+          <a:p>
+            <a:pPr indent="0" marL="0">
+              <a:buNone/>
+            </a:pPr>
+            <a:r>
+              <a:rPr lang="en-US" sz="1400" dirty="0">
                 <a:solidFill>
                   <a:srgbClr val="FBF5E6"/>
                 </a:solidFill>
@@ -14587,14 +14590,14 @@
               </a:rPr>
               <a:t>  Palästinalied（Walther）</a:t>
             </a:r>
-            <a:endParaRPr lang="en-US" sz="950" dirty="0"/>
-          </a:p>
-          <a:p>
-            <a:pPr indent="0" marL="0">
-              <a:buNone/>
-            </a:pPr>
-            <a:r>
-              <a:rPr lang="en-US" sz="950" dirty="0">
+            <a:endParaRPr lang="en-US" sz="1400" dirty="0"/>
+          </a:p>
+          <a:p>
+            <a:pPr indent="0" marL="0">
+              <a:buNone/>
+            </a:pPr>
+            <a:r>
+              <a:rPr lang="en-US" sz="1400" dirty="0">
                 <a:solidFill>
                   <a:srgbClr val="FBF5E6"/>
                 </a:solidFill>
@@ -14604,14 +14607,14 @@
               </a:rPr>
               <a:t>  Robins m'aime（Adam de la Halle）</a:t>
             </a:r>
-            <a:endParaRPr lang="en-US" sz="950" dirty="0"/>
-          </a:p>
-          <a:p>
-            <a:pPr indent="0" marL="0">
-              <a:buNone/>
-            </a:pPr>
-            <a:r>
-              <a:rPr lang="en-US" sz="950" dirty="0">
+            <a:endParaRPr lang="en-US" sz="1400" dirty="0"/>
+          </a:p>
+          <a:p>
+            <a:pPr indent="0" marL="0">
+              <a:buNone/>
+            </a:pPr>
+            <a:r>
+              <a:rPr lang="en-US" sz="1400" dirty="0">
                 <a:solidFill>
                   <a:srgbClr val="FBF5E6"/>
                 </a:solidFill>
@@ -14621,7 +14624,7 @@
               </a:rPr>
               <a:t>  Non sofre Santa María（Cantiga 159）</a:t>
             </a:r>
-            <a:endParaRPr lang="en-US" sz="950" dirty="0"/>
+            <a:endParaRPr lang="en-US" sz="1400" dirty="0"/>
           </a:p>
         </p:txBody>
       </p:sp>
@@ -14643,14 +14646,14 @@
           <a:ln/>
         </p:spPr>
         <p:txBody>
-          <a:bodyPr wrap="square" rtlCol="0" anchor="ctr"/>
+          <a:bodyPr wrap="square" rtlCol="0" anchor="t"/>
           <a:lstStyle/>
           <a:p>
             <a:pPr algn="ctr" indent="0" marL="0">
               <a:buNone/>
             </a:pPr>
             <a:r>
-              <a:rPr lang="en-US" sz="1000" i="1" dirty="0">
+              <a:rPr lang="en-US" sz="1400" i="1" dirty="0">
                 <a:solidFill>
                   <a:srgbClr val="A84030"/>
                 </a:solidFill>
@@ -14658,9 +14661,9 @@
                 <a:ea typeface="Calibri" pitchFamily="34" charset="-122"/>
                 <a:cs typeface="Calibri" pitchFamily="34" charset="-120"/>
               </a:rPr>
-              <a:t>🔑 節奏記譜：以聖詠音高符號寫成，不指示節奏——演出時可自由（愛情歌）或按韻律節拍（舞歌）</a:t>
-            </a:r>
-            <a:endParaRPr lang="en-US" sz="1000" dirty="0"/>
+              <a:t>■ 節奏記譜：以聖詠音高符號寫成，不指示節奏——演出時可自由（愛情歌）或按韻律節拍（舞歌）</a:t>
+            </a:r>
+            <a:endParaRPr lang="en-US" sz="1400" dirty="0"/>
           </a:p>
         </p:txBody>
       </p:sp>
@@ -14879,7 +14882,7 @@
               <a:buNone/>
             </a:pPr>
             <a:r>
-              <a:rPr lang="en-US" sz="1200" b="1" dirty="0">
+              <a:rPr lang="en-US" sz="1400" b="1" dirty="0">
                 <a:solidFill>
                   <a:srgbClr val="C8A020"/>
                 </a:solidFill>
@@ -14887,9 +14890,9 @@
                 <a:ea typeface="Georgia" pitchFamily="34" charset="-122"/>
                 <a:cs typeface="Georgia" pitchFamily="34" charset="-120"/>
               </a:rPr>
-              <a:t>🏴󠁧󠁢󠁥󠁮󠁧󠁿 English Song</a:t>
-            </a:r>
-            <a:endParaRPr lang="en-US" sz="1200" dirty="0"/>
+              <a:t>■󠁧󠁢󠁥󠁮󠁧󠁿 English Song</a:t>
+            </a:r>
+            <a:endParaRPr lang="en-US" sz="1400" dirty="0"/>
           </a:p>
         </p:txBody>
       </p:sp>
@@ -14911,14 +14914,14 @@
           <a:ln/>
         </p:spPr>
         <p:txBody>
-          <a:bodyPr wrap="square" lIns="0" tIns="0" rIns="0" bIns="0" rtlCol="0" anchor="ctr"/>
-          <a:lstStyle/>
-          <a:p>
-            <a:pPr indent="0" marL="0">
-              <a:buNone/>
-            </a:pPr>
-            <a:r>
-              <a:rPr lang="en-US" sz="950" i="1" dirty="0">
+          <a:bodyPr wrap="square" lIns="0" tIns="0" rIns="0" bIns="0" rtlCol="0" anchor="t"/>
+          <a:lstStyle/>
+          <a:p>
+            <a:pPr indent="0" marL="0">
+              <a:buNone/>
+            </a:pPr>
+            <a:r>
+              <a:rPr lang="en-US" sz="1400" i="1" dirty="0">
                 <a:solidFill>
                   <a:srgbClr val="E8D8A8"/>
                 </a:solidFill>
@@ -14928,7 +14931,7 @@
               </a:rPr>
               <a:t>England</a:t>
             </a:r>
-            <a:endParaRPr lang="en-US" sz="950" dirty="0"/>
+            <a:endParaRPr lang="en-US" sz="1400" dirty="0"/>
           </a:p>
         </p:txBody>
       </p:sp>
@@ -14970,14 +14973,14 @@
           <a:ln/>
         </p:spPr>
         <p:txBody>
-          <a:bodyPr wrap="square" lIns="0" tIns="0" rIns="0" bIns="0" rtlCol="0" anchor="ctr"/>
-          <a:lstStyle/>
-          <a:p>
-            <a:pPr indent="0" marL="0">
-              <a:buNone/>
-            </a:pPr>
-            <a:r>
-              <a:rPr lang="en-US" sz="950" dirty="0">
+          <a:bodyPr wrap="square" lIns="0" tIns="0" rIns="0" bIns="0" rtlCol="0" anchor="t"/>
+          <a:lstStyle/>
+          <a:p>
+            <a:pPr indent="0" marL="0">
+              <a:buNone/>
+            </a:pPr>
+            <a:r>
+              <a:rPr lang="en-US" sz="1400" dirty="0">
                 <a:solidFill>
                   <a:srgbClr val="FBF5E6"/>
                 </a:solidFill>
@@ -14987,14 +14990,14 @@
               </a:rPr>
               <a:t>1066 諾曼征服後 · 法語為王室語言 · Eleanor 之子 Richard I 獅心王本人為 trouvère，以法文創作</a:t>
             </a:r>
-            <a:endParaRPr lang="en-US" sz="950" dirty="0"/>
-          </a:p>
-          <a:p>
-            <a:pPr indent="0" marL="0">
-              <a:buNone/>
-            </a:pPr>
-            <a:r>
-              <a:rPr lang="en-US" sz="950" dirty="0">
+            <a:endParaRPr lang="en-US" sz="1400" dirty="0"/>
+          </a:p>
+          <a:p>
+            <a:pPr indent="0" marL="0">
+              <a:buNone/>
+            </a:pPr>
+            <a:r>
+              <a:rPr lang="en-US" sz="1400" dirty="0">
                 <a:solidFill>
                   <a:srgbClr val="FBF5E6"/>
                 </a:solidFill>
@@ -15004,7 +15007,7 @@
               </a:rPr>
               <a:t>Few Middle English melodies survive</a:t>
             </a:r>
-            <a:endParaRPr lang="en-US" sz="950" dirty="0"/>
+            <a:endParaRPr lang="en-US" sz="1400" dirty="0"/>
           </a:p>
         </p:txBody>
       </p:sp>
@@ -15053,7 +15056,7 @@
               <a:buNone/>
             </a:pPr>
             <a:r>
-              <a:rPr lang="en-US" sz="1200" b="1" dirty="0">
+              <a:rPr lang="en-US" sz="1400" b="1" dirty="0">
                 <a:solidFill>
                   <a:srgbClr val="C8A020"/>
                 </a:solidFill>
@@ -15061,9 +15064,9 @@
                 <a:ea typeface="Georgia" pitchFamily="34" charset="-122"/>
                 <a:cs typeface="Georgia" pitchFamily="34" charset="-120"/>
               </a:rPr>
-              <a:t>🦅 Minnesinger</a:t>
-            </a:r>
-            <a:endParaRPr lang="en-US" sz="1200" dirty="0"/>
+              <a:t>■ Minnesinger</a:t>
+            </a:r>
+            <a:endParaRPr lang="en-US" sz="1400" dirty="0"/>
           </a:p>
         </p:txBody>
       </p:sp>
@@ -15085,14 +15088,14 @@
           <a:ln/>
         </p:spPr>
         <p:txBody>
-          <a:bodyPr wrap="square" lIns="0" tIns="0" rIns="0" bIns="0" rtlCol="0" anchor="ctr"/>
-          <a:lstStyle/>
-          <a:p>
-            <a:pPr indent="0" marL="0">
-              <a:buNone/>
-            </a:pPr>
-            <a:r>
-              <a:rPr lang="en-US" sz="950" i="1" dirty="0">
+          <a:bodyPr wrap="square" lIns="0" tIns="0" rIns="0" bIns="0" rtlCol="0" anchor="t"/>
+          <a:lstStyle/>
+          <a:p>
+            <a:pPr indent="0" marL="0">
+              <a:buNone/>
+            </a:pPr>
+            <a:r>
+              <a:rPr lang="en-US" sz="1400" i="1" dirty="0">
                 <a:solidFill>
                   <a:srgbClr val="E8D8A8"/>
                 </a:solidFill>
@@ -15102,7 +15105,7 @@
               </a:rPr>
               <a:t>Germany, 12–14 c.</a:t>
             </a:r>
-            <a:endParaRPr lang="en-US" sz="950" dirty="0"/>
+            <a:endParaRPr lang="en-US" sz="1400" dirty="0"/>
           </a:p>
         </p:txBody>
       </p:sp>
@@ -15144,14 +15147,14 @@
           <a:ln/>
         </p:spPr>
         <p:txBody>
-          <a:bodyPr wrap="square" lIns="0" tIns="0" rIns="0" bIns="0" rtlCol="0" anchor="ctr"/>
-          <a:lstStyle/>
-          <a:p>
-            <a:pPr indent="0" marL="0">
-              <a:buNone/>
-            </a:pPr>
-            <a:r>
-              <a:rPr lang="en-US" sz="950" dirty="0">
+          <a:bodyPr wrap="square" lIns="0" tIns="0" rIns="0" bIns="0" rtlCol="0" anchor="t"/>
+          <a:lstStyle/>
+          <a:p>
+            <a:pPr indent="0" marL="0">
+              <a:buNone/>
+            </a:pPr>
+            <a:r>
+              <a:rPr lang="en-US" sz="1400" dirty="0">
                 <a:solidFill>
                   <a:srgbClr val="FBF5E6"/>
                 </a:solidFill>
@@ -15161,14 +15164,14 @@
               </a:rPr>
               <a:t>以中古高地德語創作 · Minne = 愛 · 更重靈性、忠誠與義務 · AAB 形式稱 Bar Form</a:t>
             </a:r>
-            <a:endParaRPr lang="en-US" sz="950" dirty="0"/>
-          </a:p>
-          <a:p>
-            <a:pPr indent="0" marL="0">
-              <a:buNone/>
-            </a:pPr>
-            <a:r>
-              <a:rPr lang="en-US" sz="950" dirty="0">
+            <a:endParaRPr lang="en-US" sz="1400" dirty="0"/>
+          </a:p>
+          <a:p>
+            <a:pPr indent="0" marL="0">
+              <a:buNone/>
+            </a:pPr>
+            <a:r>
+              <a:rPr lang="en-US" sz="1400" dirty="0">
                 <a:solidFill>
                   <a:srgbClr val="FBF5E6"/>
                 </a:solidFill>
@@ -15178,7 +15181,7 @@
               </a:rPr>
               <a:t>Walther von der Vogelweide: Palästinalied（十字軍歌）</a:t>
             </a:r>
-            <a:endParaRPr lang="en-US" sz="950" dirty="0"/>
+            <a:endParaRPr lang="en-US" sz="1400" dirty="0"/>
           </a:p>
         </p:txBody>
       </p:sp>
@@ -15227,7 +15230,7 @@
               <a:buNone/>
             </a:pPr>
             <a:r>
-              <a:rPr lang="en-US" sz="1200" b="1" dirty="0">
+              <a:rPr lang="en-US" sz="1400" b="1" dirty="0">
                 <a:solidFill>
                   <a:srgbClr val="C8A020"/>
                 </a:solidFill>
@@ -15235,9 +15238,9 @@
                 <a:ea typeface="Georgia" pitchFamily="34" charset="-122"/>
                 <a:cs typeface="Georgia" pitchFamily="34" charset="-120"/>
               </a:rPr>
-              <a:t>✝ Lauda 讚美歌</a:t>
-            </a:r>
-            <a:endParaRPr lang="en-US" sz="1200" dirty="0"/>
+              <a:t>■ Lauda 讚美歌</a:t>
+            </a:r>
+            <a:endParaRPr lang="en-US" sz="1400" dirty="0"/>
           </a:p>
         </p:txBody>
       </p:sp>
@@ -15259,14 +15262,14 @@
           <a:ln/>
         </p:spPr>
         <p:txBody>
-          <a:bodyPr wrap="square" lIns="0" tIns="0" rIns="0" bIns="0" rtlCol="0" anchor="ctr"/>
-          <a:lstStyle/>
-          <a:p>
-            <a:pPr indent="0" marL="0">
-              <a:buNone/>
-            </a:pPr>
-            <a:r>
-              <a:rPr lang="en-US" sz="950" i="1" dirty="0">
+          <a:bodyPr wrap="square" lIns="0" tIns="0" rIns="0" bIns="0" rtlCol="0" anchor="t"/>
+          <a:lstStyle/>
+          <a:p>
+            <a:pPr indent="0" marL="0">
+              <a:buNone/>
+            </a:pPr>
+            <a:r>
+              <a:rPr lang="en-US" sz="1400" i="1" dirty="0">
                 <a:solidFill>
                   <a:srgbClr val="E8D8A8"/>
                 </a:solidFill>
@@ -15276,7 +15279,7 @@
               </a:rPr>
               <a:t>Italy, 13 c.+</a:t>
             </a:r>
-            <a:endParaRPr lang="en-US" sz="950" dirty="0"/>
+            <a:endParaRPr lang="en-US" sz="1400" dirty="0"/>
           </a:p>
         </p:txBody>
       </p:sp>
@@ -15318,14 +15321,14 @@
           <a:ln/>
         </p:spPr>
         <p:txBody>
-          <a:bodyPr wrap="square" lIns="0" tIns="0" rIns="0" bIns="0" rtlCol="0" anchor="ctr"/>
-          <a:lstStyle/>
-          <a:p>
-            <a:pPr indent="0" marL="0">
-              <a:buNone/>
-            </a:pPr>
-            <a:r>
-              <a:rPr lang="en-US" sz="950" dirty="0">
+          <a:bodyPr wrap="square" lIns="0" tIns="0" rIns="0" bIns="0" rtlCol="0" anchor="t"/>
+          <a:lstStyle/>
+          <a:p>
+            <a:pPr indent="0" marL="0">
+              <a:buNone/>
+            </a:pPr>
+            <a:r>
+              <a:rPr lang="en-US" sz="1400" dirty="0">
                 <a:solidFill>
                   <a:srgbClr val="FBF5E6"/>
                 </a:solidFill>
@@ -15335,14 +15338,14 @@
               </a:rPr>
               <a:t>義大利神聖單旋律歌 · 在城市（非宮廷）創作 · 由宗教苦行遊行與兄弟會演唱</a:t>
             </a:r>
-            <a:endParaRPr lang="en-US" sz="950" dirty="0"/>
-          </a:p>
-          <a:p>
-            <a:pPr indent="0" marL="0">
-              <a:buNone/>
-            </a:pPr>
-            <a:r>
-              <a:rPr lang="en-US" sz="950" dirty="0">
+            <a:endParaRPr lang="en-US" sz="1400" dirty="0"/>
+          </a:p>
+          <a:p>
+            <a:pPr indent="0" marL="0">
+              <a:buNone/>
+            </a:pPr>
+            <a:r>
+              <a:rPr lang="en-US" sz="1400" dirty="0">
                 <a:solidFill>
                   <a:srgbClr val="FBF5E6"/>
                 </a:solidFill>
@@ -15352,7 +15355,7 @@
               </a:rPr>
               <a:t>Blends chant, hymn, and troubadour influences</a:t>
             </a:r>
-            <a:endParaRPr lang="en-US" sz="950" dirty="0"/>
+            <a:endParaRPr lang="en-US" sz="1400" dirty="0"/>
           </a:p>
         </p:txBody>
       </p:sp>
@@ -15401,7 +15404,7 @@
               <a:buNone/>
             </a:pPr>
             <a:r>
-              <a:rPr lang="en-US" sz="1200" b="1" dirty="0">
+              <a:rPr lang="en-US" sz="1400" b="1" dirty="0">
                 <a:solidFill>
                   <a:srgbClr val="C8A020"/>
                 </a:solidFill>
@@ -15409,9 +15412,9 @@
                 <a:ea typeface="Georgia" pitchFamily="34" charset="-122"/>
                 <a:cs typeface="Georgia" pitchFamily="34" charset="-120"/>
               </a:rPr>
-              <a:t>🎼 Cantigas de Santa María</a:t>
-            </a:r>
-            <a:endParaRPr lang="en-US" sz="1200" dirty="0"/>
+              <a:t>■ Cantigas de Santa María</a:t>
+            </a:r>
+            <a:endParaRPr lang="en-US" sz="1400" dirty="0"/>
           </a:p>
         </p:txBody>
       </p:sp>
@@ -15433,14 +15436,14 @@
           <a:ln/>
         </p:spPr>
         <p:txBody>
-          <a:bodyPr wrap="square" lIns="0" tIns="0" rIns="0" bIns="0" rtlCol="0" anchor="ctr"/>
-          <a:lstStyle/>
-          <a:p>
-            <a:pPr indent="0" marL="0">
-              <a:buNone/>
-            </a:pPr>
-            <a:r>
-              <a:rPr lang="en-US" sz="950" i="1" dirty="0">
+          <a:bodyPr wrap="square" lIns="0" tIns="0" rIns="0" bIns="0" rtlCol="0" anchor="t"/>
+          <a:lstStyle/>
+          <a:p>
+            <a:pPr indent="0" marL="0">
+              <a:buNone/>
+            </a:pPr>
+            <a:r>
+              <a:rPr lang="en-US" sz="1400" i="1" dirty="0">
                 <a:solidFill>
                   <a:srgbClr val="E8D8A8"/>
                 </a:solidFill>
@@ -15450,7 +15453,7 @@
               </a:rPr>
               <a:t>Castile, ca. 1270–90</a:t>
             </a:r>
-            <a:endParaRPr lang="en-US" sz="950" dirty="0"/>
+            <a:endParaRPr lang="en-US" sz="1400" dirty="0"/>
           </a:p>
         </p:txBody>
       </p:sp>
@@ -15492,14 +15495,14 @@
           <a:ln/>
         </p:spPr>
         <p:txBody>
-          <a:bodyPr wrap="square" lIns="0" tIns="0" rIns="0" bIns="0" rtlCol="0" anchor="ctr"/>
-          <a:lstStyle/>
-          <a:p>
-            <a:pPr indent="0" marL="0">
-              <a:buNone/>
-            </a:pPr>
-            <a:r>
-              <a:rPr lang="en-US" sz="950" dirty="0">
+          <a:bodyPr wrap="square" lIns="0" tIns="0" rIns="0" bIns="0" rtlCol="0" anchor="t"/>
+          <a:lstStyle/>
+          <a:p>
+            <a:pPr indent="0" marL="0">
+              <a:buNone/>
+            </a:pPr>
+            <a:r>
+              <a:rPr lang="en-US" sz="1400" dirty="0">
                 <a:solidFill>
                   <a:srgbClr val="FBF5E6"/>
                 </a:solidFill>
@@ -15509,14 +15512,14 @@
               </a:rPr>
               <a:t>400+ 首 Galician-Portuguese 歌頌聖母的歌 · 卡斯提爾王 Alfonso el Sabio（智者）監督編纂 · 每第 10 首為讚美聖母</a:t>
             </a:r>
-            <a:endParaRPr lang="en-US" sz="950" dirty="0"/>
-          </a:p>
-          <a:p>
-            <a:pPr indent="0" marL="0">
-              <a:buNone/>
-            </a:pPr>
-            <a:r>
-              <a:rPr lang="en-US" sz="950" dirty="0">
+            <a:endParaRPr lang="en-US" sz="1400" dirty="0"/>
+          </a:p>
+          <a:p>
+            <a:pPr indent="0" marL="0">
+              <a:buNone/>
+            </a:pPr>
+            <a:r>
+              <a:rPr lang="en-US" sz="1400" dirty="0">
                 <a:solidFill>
                   <a:srgbClr val="FBF5E6"/>
                 </a:solidFill>
@@ -15526,7 +15529,7 @@
               </a:rPr>
               <a:t>Almost all have refrains; suitable for dancing</a:t>
             </a:r>
-            <a:endParaRPr lang="en-US" sz="950" dirty="0"/>
+            <a:endParaRPr lang="en-US" sz="1400" dirty="0"/>
           </a:p>
         </p:txBody>
       </p:sp>
@@ -15548,14 +15551,14 @@
           <a:ln/>
         </p:spPr>
         <p:txBody>
-          <a:bodyPr wrap="square" rtlCol="0" anchor="ctr"/>
+          <a:bodyPr wrap="square" rtlCol="0" anchor="t"/>
           <a:lstStyle/>
           <a:p>
             <a:pPr algn="ctr" indent="0" marL="0">
               <a:buNone/>
             </a:pPr>
             <a:r>
-              <a:rPr lang="en-US" sz="1000" dirty="0">
+              <a:rPr lang="en-US" sz="1400" dirty="0">
                 <a:solidFill>
                   <a:srgbClr val="C8A020"/>
                 </a:solidFill>
@@ -15565,7 +15568,7 @@
               </a:rPr>
               <a:t>1208 起教皇 Innocent III 發動反 Albigensian 十字軍——導致南法貴族崩潰，troubadours 流散至義大利等地</a:t>
             </a:r>
-            <a:endParaRPr lang="en-US" sz="1000" dirty="0"/>
+            <a:endParaRPr lang="en-US" sz="1400" dirty="0"/>
           </a:p>
         </p:txBody>
       </p:sp>

--- a/Ch04_Song_and_Dance.pptx
+++ b/Ch04_Song_and_Dance.pptx
@@ -3481,7 +3481,7 @@
           <a:ln/>
         </p:spPr>
         <p:txBody>
-          <a:bodyPr wrap="square" rtlCol="0" anchor="t"/>
+          <a:bodyPr wrap="square" lIns="0" tIns="0" rIns="0" bIns="0" rtlCol="0" anchor="t"/>
           <a:lstStyle/>
           <a:p>
             <a:pPr indent="0" marL="0">
@@ -3496,7 +3496,7 @@
                 <a:ea typeface="Calibri" pitchFamily="34" charset="-122"/>
                 <a:cs typeface="Calibri" pitchFamily="34" charset="-120"/>
               </a:rPr>
-              <a:t>現存最常見的中世紀器樂舞曲形式 · 13–14 世紀 · 約 50 首現存（多為單音，少數有鍵盤複音設定）</a:t>
+              <a:t>現存最常見的中世紀器樂舞曲；13–14 世紀；約 50 首現存（多為單音）</a:t>
             </a:r>
             <a:endParaRPr lang="en-US" sz="1400" dirty="0"/>
           </a:p>
@@ -3513,14 +3513,8 @@
                 <a:ea typeface="Calibri" pitchFamily="34" charset="-122"/>
                 <a:cs typeface="Calibri" pitchFamily="34" charset="-120"/>
               </a:rPr>
-              <a:t>The most common surviving medieval dance; ca. 50 extant tunes (mostly monophonic)</a:t>
-            </a:r>
-            <a:endParaRPr lang="en-US" sz="1400" dirty="0"/>
-          </a:p>
-          <a:p>
-            <a:pPr indent="0" marL="0">
-              <a:buNone/>
-            </a:pPr>
+              <a:t>Most common surviving medieval dance; ca. 50 extant tunes (mostly monophonic)</a:t>
+            </a:r>
             <a:endParaRPr lang="en-US" sz="1400" dirty="0"/>
           </a:p>
           <a:p>
@@ -3536,7 +3530,7 @@
                 <a:ea typeface="Calibri" pitchFamily="34" charset="-122"/>
                 <a:cs typeface="Calibri" pitchFamily="34" charset="-120"/>
               </a:rPr>
-              <a:t>• 結構：數個樂段，每段演奏兩次，使用兩種不同結尾：</a:t>
+              <a:t>• 結構：數個樂段，每段演奏兩次，使用兩種結尾：</a:t>
             </a:r>
             <a:endParaRPr lang="en-US" sz="1400" dirty="0"/>
           </a:p>
@@ -3553,7 +3547,7 @@
                 <a:ea typeface="Calibri" pitchFamily="34" charset="-122"/>
                 <a:cs typeface="Calibri" pitchFamily="34" charset="-120"/>
               </a:rPr>
-              <a:t>  ① Ouvert 開放結尾（半終止）</a:t>
+              <a:t>  ① Ouvert 開放結尾（半終止）／② Clos 封閉結尾（完全終止）</a:t>
             </a:r>
             <a:endParaRPr lang="en-US" sz="1400" dirty="0"/>
           </a:p>
@@ -3570,7 +3564,7 @@
                 <a:ea typeface="Calibri" pitchFamily="34" charset="-122"/>
                 <a:cs typeface="Calibri" pitchFamily="34" charset="-120"/>
               </a:rPr>
-              <a:t>  ② Clos 封閉結尾（完全終止）</a:t>
+              <a:t>  Each section played twice: open + closed endings</a:t>
             </a:r>
             <a:endParaRPr lang="en-US" sz="1400" dirty="0"/>
           </a:p>
@@ -3587,7 +3581,7 @@
                 <a:ea typeface="Calibri" pitchFamily="34" charset="-122"/>
                 <a:cs typeface="Calibri" pitchFamily="34" charset="-120"/>
               </a:rPr>
-              <a:t>  Each section played twice: open (ouvert) + closed (clos) endings</a:t>
+              <a:t>• 法國 estampie 為三拍子；義大利 istampita 用二拍或複合拍</a:t>
             </a:r>
             <a:endParaRPr lang="en-US" sz="1400" dirty="0"/>
           </a:p>
@@ -3604,24 +3598,7 @@
                 <a:ea typeface="Calibri" pitchFamily="34" charset="-122"/>
                 <a:cs typeface="Calibri" pitchFamily="34" charset="-120"/>
               </a:rPr>
-              <a:t>• 法國 estampie 全部為三拍子 · 義大利 istampita 用二拍或複合拍，段落較長</a:t>
-            </a:r>
-            <a:endParaRPr lang="en-US" sz="1400" dirty="0"/>
-          </a:p>
-          <a:p>
-            <a:pPr indent="0" marL="0">
-              <a:buNone/>
-            </a:pPr>
-            <a:r>
-              <a:rPr lang="en-US" sz="1400" dirty="0">
-                <a:solidFill>
-                  <a:srgbClr val="E8D8A8"/>
-                </a:solidFill>
-                <a:latin typeface="Calibri" pitchFamily="34" charset="0"/>
-                <a:ea typeface="Calibri" pitchFamily="34" charset="-122"/>
-                <a:cs typeface="Calibri" pitchFamily="34" charset="-120"/>
-              </a:rPr>
-              <a:t>• 範例：Le manuscrit du roi（國王手稿）中的八首「皇家 estampies」（NAWM 13 為第四首）</a:t>
+              <a:t>• 範例：Le manuscrit du roi 中八首「皇家 estampies」（NAWM 13）</a:t>
             </a:r>
             <a:endParaRPr lang="en-US" sz="1400" dirty="0"/>
           </a:p>
@@ -3766,8 +3743,8 @@
         </p:nvSpPr>
         <p:spPr>
           <a:xfrm>
-            <a:off x="274320" y="822960"/>
-            <a:ext cx="8595360" cy="594360"/>
+            <a:off x="274320" y="786384"/>
+            <a:ext cx="8595360" cy="640080"/>
           </a:xfrm>
           <a:prstGeom prst="rect">
             <a:avLst/>
@@ -3786,7 +3763,7 @@
         </p:nvSpPr>
         <p:spPr>
           <a:xfrm>
-            <a:off x="365760" y="914400"/>
+            <a:off x="365760" y="896112"/>
             <a:ext cx="502920" cy="411480"/>
           </a:xfrm>
           <a:prstGeom prst="rect">
@@ -3822,7 +3799,7 @@
         </p:nvSpPr>
         <p:spPr>
           <a:xfrm>
-            <a:off x="914400" y="868680"/>
+            <a:off x="914400" y="832104"/>
             <a:ext cx="2834640" cy="274320"/>
           </a:xfrm>
           <a:prstGeom prst="rect">
@@ -3861,8 +3838,8 @@
         </p:nvSpPr>
         <p:spPr>
           <a:xfrm>
-            <a:off x="914400" y="1115568"/>
-            <a:ext cx="2834640" cy="256032"/>
+            <a:off x="914400" y="1097280"/>
+            <a:ext cx="2834640" cy="274320"/>
           </a:xfrm>
           <a:prstGeom prst="rect">
             <a:avLst/>
@@ -3900,8 +3877,8 @@
         </p:nvSpPr>
         <p:spPr>
           <a:xfrm>
-            <a:off x="3794760" y="914400"/>
-            <a:ext cx="22860" cy="411480"/>
+            <a:off x="3794760" y="877824"/>
+            <a:ext cx="22860" cy="457200"/>
           </a:xfrm>
           <a:prstGeom prst="rect">
             <a:avLst/>
@@ -3920,8 +3897,8 @@
         </p:nvSpPr>
         <p:spPr>
           <a:xfrm>
-            <a:off x="3886200" y="859536"/>
-            <a:ext cx="4937760" cy="530352"/>
+            <a:off x="3886200" y="822960"/>
+            <a:ext cx="4937760" cy="566928"/>
           </a:xfrm>
           <a:prstGeom prst="rect">
             <a:avLst/>
@@ -3945,7 +3922,7 @@
                 <a:ea typeface="Calibri" pitchFamily="34" charset="-122"/>
                 <a:cs typeface="Calibri" pitchFamily="34" charset="-120"/>
               </a:rPr>
-              <a:t>亞奎丹公爵、普瓦提埃伯爵；現存最早留名的 troubadour。貴族出身顯示這一藝術深植於上流社會。</a:t>
+              <a:t>亞奎丹公爵；現存最早留名的 troubadour；貴族出身顯示此藝術深植上流社會</a:t>
             </a:r>
             <a:endParaRPr lang="en-US" sz="1400" dirty="0"/>
           </a:p>
@@ -3959,8 +3936,8 @@
         </p:nvSpPr>
         <p:spPr>
           <a:xfrm>
-            <a:off x="274320" y="1517904"/>
-            <a:ext cx="8595360" cy="594360"/>
+            <a:off x="274320" y="1481328"/>
+            <a:ext cx="8595360" cy="640080"/>
           </a:xfrm>
           <a:prstGeom prst="rect">
             <a:avLst/>
@@ -3979,7 +3956,7 @@
         </p:nvSpPr>
         <p:spPr>
           <a:xfrm>
-            <a:off x="365760" y="1609344"/>
+            <a:off x="365760" y="1591056"/>
             <a:ext cx="502920" cy="411480"/>
           </a:xfrm>
           <a:prstGeom prst="rect">
@@ -4015,7 +3992,7 @@
         </p:nvSpPr>
         <p:spPr>
           <a:xfrm>
-            <a:off x="914400" y="1563624"/>
+            <a:off x="914400" y="1527048"/>
             <a:ext cx="2834640" cy="274320"/>
           </a:xfrm>
           <a:prstGeom prst="rect">
@@ -4054,8 +4031,8 @@
         </p:nvSpPr>
         <p:spPr>
           <a:xfrm>
-            <a:off x="914400" y="1810512"/>
-            <a:ext cx="2834640" cy="256032"/>
+            <a:off x="914400" y="1792224"/>
+            <a:ext cx="2834640" cy="274320"/>
           </a:xfrm>
           <a:prstGeom prst="rect">
             <a:avLst/>
@@ -4093,8 +4070,8 @@
         </p:nvSpPr>
         <p:spPr>
           <a:xfrm>
-            <a:off x="3794760" y="1609344"/>
-            <a:ext cx="22860" cy="411480"/>
+            <a:off x="3794760" y="1572768"/>
+            <a:ext cx="22860" cy="457200"/>
           </a:xfrm>
           <a:prstGeom prst="rect">
             <a:avLst/>
@@ -4113,8 +4090,8 @@
         </p:nvSpPr>
         <p:spPr>
           <a:xfrm>
-            <a:off x="3886200" y="1554480"/>
-            <a:ext cx="4937760" cy="530352"/>
+            <a:off x="3886200" y="1517904"/>
+            <a:ext cx="4937760" cy="566928"/>
           </a:xfrm>
           <a:prstGeom prst="rect">
             <a:avLst/>
@@ -4138,7 +4115,7 @@
                 <a:ea typeface="Calibri" pitchFamily="34" charset="-122"/>
                 <a:cs typeface="Calibri" pitchFamily="34" charset="-120"/>
               </a:rPr>
-              <a:t>最具影響力的 troubadour 之一；Ventadorn 城堡麵包師/僕役之子；後為 Eleanor of Aquitaine 服務，把 troubadour 傳統帶入北法，催生 trouvère 運動。代表作《Can vei la lauzeta mover》</a:t>
+              <a:t>最具影響力 troubadour 之一；僕役之子；服務 Eleanor 並將傳統帶入北法；代表作 Can vei la lauzeta mover</a:t>
             </a:r>
             <a:endParaRPr lang="en-US" sz="1400" dirty="0"/>
           </a:p>
@@ -4152,8 +4129,8 @@
         </p:nvSpPr>
         <p:spPr>
           <a:xfrm>
-            <a:off x="274320" y="2212848"/>
-            <a:ext cx="8595360" cy="594360"/>
+            <a:off x="274320" y="2176272"/>
+            <a:ext cx="8595360" cy="640080"/>
           </a:xfrm>
           <a:prstGeom prst="rect">
             <a:avLst/>
@@ -4172,7 +4149,7 @@
         </p:nvSpPr>
         <p:spPr>
           <a:xfrm>
-            <a:off x="365760" y="2304288"/>
+            <a:off x="365760" y="2286000"/>
             <a:ext cx="502920" cy="411480"/>
           </a:xfrm>
           <a:prstGeom prst="rect">
@@ -4208,7 +4185,7 @@
         </p:nvSpPr>
         <p:spPr>
           <a:xfrm>
-            <a:off x="914400" y="2258568"/>
+            <a:off x="914400" y="2221992"/>
             <a:ext cx="2834640" cy="274320"/>
           </a:xfrm>
           <a:prstGeom prst="rect">
@@ -4247,8 +4224,8 @@
         </p:nvSpPr>
         <p:spPr>
           <a:xfrm>
-            <a:off x="914400" y="2505456"/>
-            <a:ext cx="2834640" cy="256032"/>
+            <a:off x="914400" y="2487168"/>
+            <a:ext cx="2834640" cy="274320"/>
           </a:xfrm>
           <a:prstGeom prst="rect">
             <a:avLst/>
@@ -4286,8 +4263,8 @@
         </p:nvSpPr>
         <p:spPr>
           <a:xfrm>
-            <a:off x="3794760" y="2304288"/>
-            <a:ext cx="22860" cy="411480"/>
+            <a:off x="3794760" y="2267712"/>
+            <a:ext cx="22860" cy="457200"/>
           </a:xfrm>
           <a:prstGeom prst="rect">
             <a:avLst/>
@@ -4306,8 +4283,8 @@
         </p:nvSpPr>
         <p:spPr>
           <a:xfrm>
-            <a:off x="3886200" y="2249424"/>
-            <a:ext cx="4937760" cy="530352"/>
+            <a:off x="3886200" y="2212848"/>
+            <a:ext cx="4937760" cy="566928"/>
           </a:xfrm>
           <a:prstGeom prst="rect">
             <a:avLst/>
@@ -4331,7 +4308,7 @@
                 <a:ea typeface="Calibri" pitchFamily="34" charset="-122"/>
                 <a:cs typeface="Calibri" pitchFamily="34" charset="-120"/>
               </a:rPr>
-              <a:t>極少數留下音樂作品的 trobairitz（女性遊唱詩人）。《A chantar》是唯一有旋律保存下來的 trobairitz 歌曲（AAB 形式、mode 1）</a:t>
+              <a:t>極少數留下音樂作品的 trobairitz；A chantar 為唯一旋律保存的 trobairitz 歌曲（AAB、mode 1）</a:t>
             </a:r>
             <a:endParaRPr lang="en-US" sz="1400" dirty="0"/>
           </a:p>
@@ -4345,8 +4322,8 @@
         </p:nvSpPr>
         <p:spPr>
           <a:xfrm>
-            <a:off x="274320" y="2907792"/>
-            <a:ext cx="8595360" cy="594360"/>
+            <a:off x="274320" y="2871216"/>
+            <a:ext cx="8595360" cy="640080"/>
           </a:xfrm>
           <a:prstGeom prst="rect">
             <a:avLst/>
@@ -4365,7 +4342,7 @@
         </p:nvSpPr>
         <p:spPr>
           <a:xfrm>
-            <a:off x="365760" y="2999232"/>
+            <a:off x="365760" y="2980944"/>
             <a:ext cx="502920" cy="411480"/>
           </a:xfrm>
           <a:prstGeom prst="rect">
@@ -4401,7 +4378,7 @@
         </p:nvSpPr>
         <p:spPr>
           <a:xfrm>
-            <a:off x="914400" y="2953512"/>
+            <a:off x="914400" y="2916936"/>
             <a:ext cx="2834640" cy="274320"/>
           </a:xfrm>
           <a:prstGeom prst="rect">
@@ -4440,8 +4417,8 @@
         </p:nvSpPr>
         <p:spPr>
           <a:xfrm>
-            <a:off x="914400" y="3200400"/>
-            <a:ext cx="2834640" cy="256032"/>
+            <a:off x="914400" y="3182112"/>
+            <a:ext cx="2834640" cy="274320"/>
           </a:xfrm>
           <a:prstGeom prst="rect">
             <a:avLst/>
@@ -4479,8 +4456,8 @@
         </p:nvSpPr>
         <p:spPr>
           <a:xfrm>
-            <a:off x="3794760" y="2999232"/>
-            <a:ext cx="22860" cy="411480"/>
+            <a:off x="3794760" y="2962656"/>
+            <a:ext cx="22860" cy="457200"/>
           </a:xfrm>
           <a:prstGeom prst="rect">
             <a:avLst/>
@@ -4499,8 +4476,8 @@
         </p:nvSpPr>
         <p:spPr>
           <a:xfrm>
-            <a:off x="3886200" y="2944368"/>
-            <a:ext cx="4937760" cy="530352"/>
+            <a:off x="3886200" y="2907792"/>
+            <a:ext cx="4937760" cy="566928"/>
           </a:xfrm>
           <a:prstGeom prst="rect">
             <a:avLst/>
@@ -4524,7 +4501,7 @@
                 <a:ea typeface="Calibri" pitchFamily="34" charset="-122"/>
                 <a:cs typeface="Calibri" pitchFamily="34" charset="-120"/>
               </a:rPr>
-              <a:t>最著名的 Minnesinger；以宮廷詩歌與政治詩聞名；代表作《Palästinalied》（十字軍歌）仍被當代「中世紀搖滾」樂團改編演奏</a:t>
+              <a:t>最著名 Minnesinger；以宮廷詩與政治詩聞名；代表作 Palästinalied（十字軍歌）</a:t>
             </a:r>
             <a:endParaRPr lang="en-US" sz="1400" dirty="0"/>
           </a:p>
@@ -4538,8 +4515,8 @@
         </p:nvSpPr>
         <p:spPr>
           <a:xfrm>
-            <a:off x="274320" y="3602736"/>
-            <a:ext cx="8595360" cy="594360"/>
+            <a:off x="274320" y="3566160"/>
+            <a:ext cx="8595360" cy="640080"/>
           </a:xfrm>
           <a:prstGeom prst="rect">
             <a:avLst/>
@@ -4558,7 +4535,7 @@
         </p:nvSpPr>
         <p:spPr>
           <a:xfrm>
-            <a:off x="365760" y="3694176"/>
+            <a:off x="365760" y="3675888"/>
             <a:ext cx="502920" cy="411480"/>
           </a:xfrm>
           <a:prstGeom prst="rect">
@@ -4594,7 +4571,7 @@
         </p:nvSpPr>
         <p:spPr>
           <a:xfrm>
-            <a:off x="914400" y="3648456"/>
+            <a:off x="914400" y="3611880"/>
             <a:ext cx="2834640" cy="274320"/>
           </a:xfrm>
           <a:prstGeom prst="rect">
@@ -4633,8 +4610,8 @@
         </p:nvSpPr>
         <p:spPr>
           <a:xfrm>
-            <a:off x="914400" y="3895344"/>
-            <a:ext cx="2834640" cy="256032"/>
+            <a:off x="914400" y="3877056"/>
+            <a:ext cx="2834640" cy="274320"/>
           </a:xfrm>
           <a:prstGeom prst="rect">
             <a:avLst/>
@@ -4672,8 +4649,8 @@
         </p:nvSpPr>
         <p:spPr>
           <a:xfrm>
-            <a:off x="3794760" y="3694176"/>
-            <a:ext cx="22860" cy="411480"/>
+            <a:off x="3794760" y="3657600"/>
+            <a:ext cx="22860" cy="457200"/>
           </a:xfrm>
           <a:prstGeom prst="rect">
             <a:avLst/>
@@ -4692,8 +4669,8 @@
         </p:nvSpPr>
         <p:spPr>
           <a:xfrm>
-            <a:off x="3886200" y="3639312"/>
-            <a:ext cx="4937760" cy="530352"/>
+            <a:off x="3886200" y="3602736"/>
+            <a:ext cx="4937760" cy="566928"/>
           </a:xfrm>
           <a:prstGeom prst="rect">
             <a:avLst/>
@@ -4717,7 +4694,7 @@
                 <a:ea typeface="Calibri" pitchFamily="34" charset="-122"/>
                 <a:cs typeface="Calibri" pitchFamily="34" charset="-120"/>
               </a:rPr>
-              <a:t>Arras 的 trouvère；第一位完整作品被集結為手稿的方言詩人；《Jeu de Robin et de Marion》（ca. 1284）是最早的世俗音樂劇之一；《Robins m'aime》為 rondeau 形式</a:t>
+              <a:t>Arras 的 trouvère；第一位完整作品集結手稿的方言詩人；Jeu de Robin et de Marion（ca. 1284）</a:t>
             </a:r>
             <a:endParaRPr lang="en-US" sz="1400" dirty="0"/>
           </a:p>
@@ -4731,8 +4708,8 @@
         </p:nvSpPr>
         <p:spPr>
           <a:xfrm>
-            <a:off x="274320" y="4297680"/>
-            <a:ext cx="8595360" cy="594360"/>
+            <a:off x="274320" y="4261104"/>
+            <a:ext cx="8595360" cy="640080"/>
           </a:xfrm>
           <a:prstGeom prst="rect">
             <a:avLst/>
@@ -4751,7 +4728,7 @@
         </p:nvSpPr>
         <p:spPr>
           <a:xfrm>
-            <a:off x="365760" y="4389120"/>
+            <a:off x="365760" y="4370832"/>
             <a:ext cx="502920" cy="411480"/>
           </a:xfrm>
           <a:prstGeom prst="rect">
@@ -4787,7 +4764,7 @@
         </p:nvSpPr>
         <p:spPr>
           <a:xfrm>
-            <a:off x="914400" y="4343400"/>
+            <a:off x="914400" y="4306824"/>
             <a:ext cx="2834640" cy="274320"/>
           </a:xfrm>
           <a:prstGeom prst="rect">
@@ -4826,8 +4803,8 @@
         </p:nvSpPr>
         <p:spPr>
           <a:xfrm>
-            <a:off x="914400" y="4590288"/>
-            <a:ext cx="2834640" cy="256032"/>
+            <a:off x="914400" y="4572000"/>
+            <a:ext cx="2834640" cy="274320"/>
           </a:xfrm>
           <a:prstGeom prst="rect">
             <a:avLst/>
@@ -4865,8 +4842,8 @@
         </p:nvSpPr>
         <p:spPr>
           <a:xfrm>
-            <a:off x="3794760" y="4389120"/>
-            <a:ext cx="22860" cy="411480"/>
+            <a:off x="3794760" y="4352544"/>
+            <a:ext cx="22860" cy="457200"/>
           </a:xfrm>
           <a:prstGeom prst="rect">
             <a:avLst/>
@@ -4885,8 +4862,8 @@
         </p:nvSpPr>
         <p:spPr>
           <a:xfrm>
-            <a:off x="3886200" y="4334256"/>
-            <a:ext cx="4937760" cy="530352"/>
+            <a:off x="3886200" y="4297680"/>
+            <a:ext cx="4937760" cy="566928"/>
           </a:xfrm>
           <a:prstGeom prst="rect">
             <a:avLst/>
@@ -4910,7 +4887,7 @@
                 <a:ea typeface="Calibri" pitchFamily="34" charset="-122"/>
                 <a:cs typeface="Calibri" pitchFamily="34" charset="-120"/>
               </a:rPr>
-              <a:t>卡斯提爾與萊昂國王「智者阿方索」；監督編纂《Cantigas de Santa María》——400+ 首讚美聖母的歌，收錄於四部華麗的插圖手稿中</a:t>
+              <a:t>「智者阿方索」；監督編纂 Cantigas de Santa María——400+ 首讚美聖母歌，四部插圖手稿</a:t>
             </a:r>
             <a:endParaRPr lang="en-US" sz="1400" dirty="0"/>
           </a:p>
@@ -7206,8 +7183,8 @@
         </p:nvSpPr>
         <p:spPr>
           <a:xfrm>
-            <a:off x="274320" y="2907792"/>
-            <a:ext cx="8595360" cy="1828800"/>
+            <a:off x="274320" y="2880360"/>
+            <a:ext cx="8595360" cy="2103120"/>
           </a:xfrm>
           <a:prstGeom prst="rect">
             <a:avLst/>
@@ -7226,17 +7203,17 @@
         </p:nvSpPr>
         <p:spPr>
           <a:xfrm>
-            <a:off x="411480" y="2980944"/>
-            <a:ext cx="8321040" cy="320040"/>
-          </a:xfrm>
-          <a:prstGeom prst="rect">
-            <a:avLst/>
-          </a:prstGeom>
-          <a:noFill/>
-          <a:ln/>
-        </p:spPr>
-        <p:txBody>
-          <a:bodyPr wrap="square" rtlCol="0" anchor="ctr"/>
+            <a:off x="411480" y="2944368"/>
+            <a:ext cx="8321040" cy="292608"/>
+          </a:xfrm>
+          <a:prstGeom prst="rect">
+            <a:avLst/>
+          </a:prstGeom>
+          <a:noFill/>
+          <a:ln/>
+        </p:spPr>
+        <p:txBody>
+          <a:bodyPr wrap="square" lIns="0" tIns="0" rIns="0" bIns="0" rtlCol="0" anchor="ctr"/>
           <a:lstStyle/>
           <a:p>
             <a:pPr indent="0" marL="0">
@@ -7265,17 +7242,17 @@
         </p:nvSpPr>
         <p:spPr>
           <a:xfrm>
-            <a:off x="457200" y="3310128"/>
-            <a:ext cx="8229600" cy="1417320"/>
-          </a:xfrm>
-          <a:prstGeom prst="rect">
-            <a:avLst/>
-          </a:prstGeom>
-          <a:noFill/>
-          <a:ln/>
-        </p:spPr>
-        <p:txBody>
-          <a:bodyPr wrap="square" rtlCol="0" anchor="t"/>
+            <a:off x="457200" y="3255264"/>
+            <a:ext cx="8229600" cy="1691640"/>
+          </a:xfrm>
+          <a:prstGeom prst="rect">
+            <a:avLst/>
+          </a:prstGeom>
+          <a:noFill/>
+          <a:ln/>
+        </p:spPr>
+        <p:txBody>
+          <a:bodyPr wrap="square" lIns="0" tIns="0" rIns="0" bIns="0" rtlCol="0" anchor="t"/>
           <a:lstStyle/>
           <a:p>
             <a:pPr indent="0" marL="0">
@@ -7290,7 +7267,7 @@
                 <a:ea typeface="Calibri" pitchFamily="34" charset="-122"/>
                 <a:cs typeface="Calibri" pitchFamily="34" charset="-120"/>
               </a:rPr>
-              <a:t>• 18–19 世紀：民族文化復興 → 對中世紀的興趣重燃 · 收集整理 trouvère 歌曲配鋼琴伴奏出版</a:t>
+              <a:t>• 18–19 世紀：民族文化復興，對中世紀興趣重燃；trouvère 歌曲配鋼琴伴奏出版</a:t>
             </a:r>
             <a:endParaRPr lang="en-US" sz="1400" dirty="0"/>
           </a:p>
@@ -7307,7 +7284,7 @@
                 <a:ea typeface="Calibri" pitchFamily="34" charset="-122"/>
                 <a:cs typeface="Calibri" pitchFamily="34" charset="-120"/>
               </a:rPr>
-              <a:t>  18th–19th c.: nationalism revives interest in the Middle Ages</a:t>
+              <a:t>  18th–19th c.: nationalism revives medieval interest</a:t>
             </a:r>
             <a:endParaRPr lang="en-US" sz="1400" dirty="0"/>
           </a:p>
@@ -7341,7 +7318,7 @@
                 <a:ea typeface="Calibri" pitchFamily="34" charset="-122"/>
                 <a:cs typeface="Calibri" pitchFamily="34" charset="-120"/>
               </a:rPr>
-              <a:t>  1872: Adam de la Halle's works transcribed and published</a:t>
+              <a:t>• 近幾十年：中世紀世俗歌曲與器樂舞曲復興——音樂會與錄音</a:t>
             </a:r>
             <a:endParaRPr lang="en-US" sz="1400" dirty="0"/>
           </a:p>
@@ -7358,7 +7335,7 @@
                 <a:ea typeface="Calibri" pitchFamily="34" charset="-122"/>
                 <a:cs typeface="Calibri" pitchFamily="34" charset="-120"/>
               </a:rPr>
-              <a:t>• 20 世紀：更多中世紀曲目版本陸續問世</a:t>
+              <a:t>  Recent decades: concert and recording revival</a:t>
             </a:r>
             <a:endParaRPr lang="en-US" sz="1400" dirty="0"/>
           </a:p>
@@ -7375,41 +7352,7 @@
                 <a:ea typeface="Calibri" pitchFamily="34" charset="-122"/>
                 <a:cs typeface="Calibri" pitchFamily="34" charset="-120"/>
               </a:rPr>
-              <a:t>• 近幾十年：中世紀世俗歌曲與器樂舞曲復興——音樂會與錄音</a:t>
-            </a:r>
-            <a:endParaRPr lang="en-US" sz="1400" dirty="0"/>
-          </a:p>
-          <a:p>
-            <a:pPr indent="0" marL="0">
-              <a:buNone/>
-            </a:pPr>
-            <a:r>
-              <a:rPr lang="en-US" sz="1400" dirty="0">
-                <a:solidFill>
-                  <a:srgbClr val="FBF5E6"/>
-                </a:solidFill>
-                <a:latin typeface="Calibri" pitchFamily="34" charset="0"/>
-                <a:ea typeface="Calibri" pitchFamily="34" charset="-122"/>
-                <a:cs typeface="Calibri" pitchFamily="34" charset="-120"/>
-              </a:rPr>
-              <a:t>  Recent decades: revival in concerts and recordings</a:t>
-            </a:r>
-            <a:endParaRPr lang="en-US" sz="1400" dirty="0"/>
-          </a:p>
-          <a:p>
-            <a:pPr indent="0" marL="0">
-              <a:buNone/>
-            </a:pPr>
-            <a:r>
-              <a:rPr lang="en-US" sz="1400" dirty="0">
-                <a:solidFill>
-                  <a:srgbClr val="FBF5E6"/>
-                </a:solidFill>
-                <a:latin typeface="Calibri" pitchFamily="34" charset="0"/>
-                <a:ea typeface="Calibri" pitchFamily="34" charset="-122"/>
-                <a:cs typeface="Calibri" pitchFamily="34" charset="-120"/>
-              </a:rPr>
-              <a:t>• 當代「中世紀搖滾」改編如 Walther von der Vogelweide《Palästinalied》（被多支歐洲樂團錄製）</a:t>
+              <a:t>• 當代「中世紀搖滾」改編如 Palästinalied</a:t>
             </a:r>
             <a:endParaRPr lang="en-US" sz="1400" dirty="0"/>
           </a:p>
@@ -12009,17 +11952,17 @@
         </p:nvSpPr>
         <p:spPr>
           <a:xfrm>
-            <a:off x="365760" y="4434840"/>
-            <a:ext cx="8412480" cy="274320"/>
-          </a:xfrm>
-          <a:prstGeom prst="rect">
-            <a:avLst/>
-          </a:prstGeom>
-          <a:noFill/>
-          <a:ln/>
-        </p:spPr>
-        <p:txBody>
-          <a:bodyPr wrap="square" rtlCol="0" anchor="t"/>
+            <a:off x="365760" y="4370832"/>
+            <a:ext cx="8412480" cy="621792"/>
+          </a:xfrm>
+          <a:prstGeom prst="rect">
+            <a:avLst/>
+          </a:prstGeom>
+          <a:noFill/>
+          <a:ln/>
+        </p:spPr>
+        <p:txBody>
+          <a:bodyPr wrap="square" lIns="0" tIns="0" rIns="0" bIns="0" rtlCol="0" anchor="t"/>
           <a:lstStyle/>
           <a:p>
             <a:pPr algn="ctr" indent="0" marL="0">
@@ -12034,32 +11977,10 @@
                 <a:ea typeface="Calibri" pitchFamily="34" charset="-122"/>
                 <a:cs typeface="Calibri" pitchFamily="34" charset="-120"/>
               </a:rPr>
-              <a:t>■ 里程碑：1321 年巴黎的 Confrérie de St.-Julien des Menestriers 成立，37 位男女樂師共同簽署章程</a:t>
-            </a:r>
-            <a:endParaRPr lang="en-US" sz="1400" dirty="0"/>
-          </a:p>
-        </p:txBody>
-      </p:sp>
-      <p:sp>
-        <p:nvSpPr>
-          <p:cNvPr id="28" name="Text 26"/>
-          <p:cNvSpPr/>
-          <p:nvPr/>
-        </p:nvSpPr>
-        <p:spPr>
-          <a:xfrm>
-            <a:off x="365760" y="4663440"/>
-            <a:ext cx="8412480" cy="274320"/>
-          </a:xfrm>
-          <a:prstGeom prst="rect">
-            <a:avLst/>
-          </a:prstGeom>
-          <a:noFill/>
-          <a:ln/>
-        </p:spPr>
-        <p:txBody>
-          <a:bodyPr wrap="square" rtlCol="0" anchor="t"/>
-          <a:lstStyle/>
+              <a:t>■ 里程碑：1321 年巴黎 Confrérie de St.-Julien des Menestriers 成立，37 位男女樂師共同簽署章程</a:t>
+            </a:r>
+            <a:endParaRPr lang="en-US" sz="1400" dirty="0"/>
+          </a:p>
           <a:p>
             <a:pPr algn="ctr" indent="0" marL="0">
               <a:buNone/>
@@ -12067,13 +11988,13 @@
             <a:r>
               <a:rPr lang="en-US" sz="1400" i="1" dirty="0">
                 <a:solidFill>
-                  <a:srgbClr val="E8D8A8"/>
-                </a:solidFill>
-                <a:latin typeface="Calibri" pitchFamily="34" charset="0"/>
-                <a:ea typeface="Calibri" pitchFamily="34" charset="-122"/>
-                <a:cs typeface="Calibri" pitchFamily="34" charset="-120"/>
-              </a:rPr>
-              <a:t>Milestone: In 1321 Paris musicians formed the Confrérie de St.-Julien des Menestriers — 37 men and women signatories</a:t>
+                  <a:srgbClr val="C8A020"/>
+                </a:solidFill>
+                <a:latin typeface="Calibri" pitchFamily="34" charset="0"/>
+                <a:ea typeface="Calibri" pitchFamily="34" charset="-122"/>
+                <a:cs typeface="Calibri" pitchFamily="34" charset="-120"/>
+              </a:rPr>
+              <a:t>Milestone: 1321 Paris Confrérie de St.-Julien des Menestriers — 37 signatories</a:t>
             </a:r>
             <a:endParaRPr lang="en-US" sz="1400" dirty="0"/>
           </a:p>
@@ -12385,7 +12306,7 @@
           <a:ln/>
         </p:spPr>
         <p:txBody>
-          <a:bodyPr wrap="square" rtlCol="0" anchor="t"/>
+          <a:bodyPr wrap="square" lIns="0" tIns="0" rIns="0" bIns="0" rtlCol="0" anchor="t"/>
           <a:lstStyle/>
           <a:p>
             <a:pPr indent="0" marL="0">
@@ -12417,7 +12338,7 @@
                 <a:ea typeface="Calibri" pitchFamily="34" charset="-122"/>
                 <a:cs typeface="Calibri" pitchFamily="34" charset="-120"/>
               </a:rPr>
-              <a:t>• Trobar = 「創作歌曲」→「找到」「發明」</a:t>
+              <a:t>• Trobar =「創作」→「找到」「發明」</a:t>
             </a:r>
             <a:endParaRPr lang="en-US" sz="1400" dirty="0"/>
           </a:p>
@@ -12434,7 +12355,7 @@
                 <a:ea typeface="Calibri" pitchFamily="34" charset="-122"/>
                 <a:cs typeface="Calibri" pitchFamily="34" charset="-120"/>
               </a:rPr>
-              <a:t>• 存 ca. 2,600 首詩 · 約 1/10 有旋律</a:t>
+              <a:t>• 存 ca. 2,600 首詩；約 1/10 有旋律</a:t>
             </a:r>
             <a:endParaRPr lang="en-US" sz="1400" dirty="0"/>
           </a:p>
@@ -12457,7 +12378,7 @@
                 <a:ea typeface="Calibri" pitchFamily="34" charset="-122"/>
                 <a:cs typeface="Calibri" pitchFamily="34" charset="-120"/>
               </a:rPr>
-              <a:t>重要人物:</a:t>
+              <a:t>重要人物：</a:t>
             </a:r>
             <a:endParaRPr lang="en-US" sz="1400" dirty="0"/>
           </a:p>
@@ -12474,7 +12395,7 @@
                 <a:ea typeface="Calibri" pitchFamily="34" charset="-122"/>
                 <a:cs typeface="Calibri" pitchFamily="34" charset="-120"/>
               </a:rPr>
-              <a:t>◆ Guillaume IX（亞奎丹公爵，1071–1126）</a:t>
+              <a:t>◆ Guillaume IX（1071–1126）</a:t>
             </a:r>
             <a:endParaRPr lang="en-US" sz="1400" dirty="0"/>
           </a:p>
@@ -12491,7 +12412,7 @@
                 <a:ea typeface="Calibri" pitchFamily="34" charset="-122"/>
                 <a:cs typeface="Calibri" pitchFamily="34" charset="-120"/>
               </a:rPr>
-              <a:t>   現存最早留名的 troubadour</a:t>
+              <a:t>   亞奎丹公爵；最早留名者</a:t>
             </a:r>
             <a:endParaRPr lang="en-US" sz="1400" dirty="0"/>
           </a:p>
@@ -12508,7 +12429,7 @@
                 <a:ea typeface="Calibri" pitchFamily="34" charset="-122"/>
                 <a:cs typeface="Calibri" pitchFamily="34" charset="-120"/>
               </a:rPr>
-              <a:t>◆ Bernart de Ventadorn (ca. 1130–1200)</a:t>
+              <a:t>◆ Bernart de Ventadorn</a:t>
             </a:r>
             <a:endParaRPr lang="en-US" sz="1400" dirty="0"/>
           </a:p>
@@ -12525,7 +12446,7 @@
                 <a:ea typeface="Calibri" pitchFamily="34" charset="-122"/>
                 <a:cs typeface="Calibri" pitchFamily="34" charset="-120"/>
               </a:rPr>
-              <a:t>   最具影響力之一 · 城堡僕役之子</a:t>
+              <a:t>   ca. 1130–1200；最具影響力</a:t>
             </a:r>
             <a:endParaRPr lang="en-US" sz="1400" dirty="0"/>
           </a:p>
@@ -12542,7 +12463,7 @@
                 <a:ea typeface="Calibri" pitchFamily="34" charset="-122"/>
                 <a:cs typeface="Calibri" pitchFamily="34" charset="-120"/>
               </a:rPr>
-              <a:t>◆ Comtessa de Dia（12 世紀末 / 13 世紀初）</a:t>
+              <a:t>◆ Comtessa de Dia（12–13 世紀）</a:t>
             </a:r>
             <a:endParaRPr lang="en-US" sz="1400" dirty="0"/>
           </a:p>
@@ -12559,7 +12480,7 @@
                 <a:ea typeface="Calibri" pitchFamily="34" charset="-122"/>
                 <a:cs typeface="Calibri" pitchFamily="34" charset="-120"/>
               </a:rPr>
-              <a:t>   唯一有音樂留存的女性遊唱詩人 trobairitz</a:t>
+              <a:t>   唯一音樂留存的 trobairitz</a:t>
             </a:r>
             <a:endParaRPr lang="en-US" sz="1400" dirty="0"/>
           </a:p>
@@ -12701,7 +12622,7 @@
           <a:ln/>
         </p:spPr>
         <p:txBody>
-          <a:bodyPr wrap="square" rtlCol="0" anchor="t"/>
+          <a:bodyPr wrap="square" lIns="0" tIns="0" rIns="0" bIns="0" rtlCol="0" anchor="t"/>
           <a:lstStyle/>
           <a:p>
             <a:pPr indent="0" marL="0">
@@ -12716,7 +12637,7 @@
                 <a:ea typeface="Calibri" pitchFamily="34" charset="-122"/>
                 <a:cs typeface="Calibri" pitchFamily="34" charset="-120"/>
               </a:rPr>
-              <a:t>• Trover 也意為「創作歌曲」</a:t>
+              <a:t>• Trover 亦意「創作歌曲」</a:t>
             </a:r>
             <a:endParaRPr lang="en-US" sz="1400" dirty="0"/>
           </a:p>
@@ -12733,7 +12654,7 @@
                 <a:ea typeface="Calibri" pitchFamily="34" charset="-122"/>
                 <a:cs typeface="Calibri" pitchFamily="34" charset="-120"/>
               </a:rPr>
-              <a:t>• 存 ca. 2,100 首詩 · 2/3 有旋律（遠高於 troubadour）</a:t>
+              <a:t>• 存 ca. 2,100 首詩；2/3 有旋律</a:t>
             </a:r>
             <a:endParaRPr lang="en-US" sz="1400" dirty="0"/>
           </a:p>
@@ -12750,7 +12671,7 @@
                 <a:ea typeface="Calibri" pitchFamily="34" charset="-122"/>
                 <a:cs typeface="Calibri" pitchFamily="34" charset="-120"/>
               </a:rPr>
-              <a:t>• 由南法北傳 · Bernart de Ventadorn 功不可沒</a:t>
+              <a:t>• 由南法北傳；Bernart 功不可沒</a:t>
             </a:r>
             <a:endParaRPr lang="en-US" sz="1400" dirty="0"/>
           </a:p>
@@ -12773,7 +12694,7 @@
                 <a:ea typeface="Calibri" pitchFamily="34" charset="-122"/>
                 <a:cs typeface="Calibri" pitchFamily="34" charset="-120"/>
               </a:rPr>
-              <a:t>重要人物:</a:t>
+              <a:t>重要人物：</a:t>
             </a:r>
             <a:endParaRPr lang="en-US" sz="1400" dirty="0"/>
           </a:p>
@@ -12790,7 +12711,7 @@
                 <a:ea typeface="Calibri" pitchFamily="34" charset="-122"/>
                 <a:cs typeface="Calibri" pitchFamily="34" charset="-120"/>
               </a:rPr>
-              <a:t>◆ Eleanor of Aquitaine (1122–1204)</a:t>
+              <a:t>◆ Eleanor of Aquitaine</a:t>
             </a:r>
             <a:endParaRPr lang="en-US" sz="1400" dirty="0"/>
           </a:p>
@@ -12807,7 +12728,7 @@
                 <a:ea typeface="Calibri" pitchFamily="34" charset="-122"/>
                 <a:cs typeface="Calibri" pitchFamily="34" charset="-120"/>
               </a:rPr>
-              <a:t>   亞奎丹女公爵、法國與英國王后 · 贊助 Bernart</a:t>
+              <a:t>   1122–1204；英法王后，贊助 Bernart</a:t>
             </a:r>
             <a:endParaRPr lang="en-US" sz="1400" dirty="0"/>
           </a:p>
@@ -12824,7 +12745,7 @@
                 <a:ea typeface="Calibri" pitchFamily="34" charset="-122"/>
                 <a:cs typeface="Calibri" pitchFamily="34" charset="-120"/>
               </a:rPr>
-              <a:t>◆ Richard I（獅心王，1157–1199）</a:t>
+              <a:t>◆ Richard I（獅心王）</a:t>
             </a:r>
             <a:endParaRPr lang="en-US" sz="1400" dirty="0"/>
           </a:p>
@@ -12841,7 +12762,7 @@
                 <a:ea typeface="Calibri" pitchFamily="34" charset="-122"/>
                 <a:cs typeface="Calibri" pitchFamily="34" charset="-120"/>
               </a:rPr>
-              <a:t>   Eleanor 之子，本人就是 trouvère，以法文作詞</a:t>
+              <a:t>   1157–1199；本人即 trouvère</a:t>
             </a:r>
             <a:endParaRPr lang="en-US" sz="1400" dirty="0"/>
           </a:p>
@@ -12858,7 +12779,7 @@
                 <a:ea typeface="Calibri" pitchFamily="34" charset="-122"/>
                 <a:cs typeface="Calibri" pitchFamily="34" charset="-120"/>
               </a:rPr>
-              <a:t>◆ Adam de la Halle (ca. 1240–1288)</a:t>
+              <a:t>◆ Adam de la Halle</a:t>
             </a:r>
             <a:endParaRPr lang="en-US" sz="1400" dirty="0"/>
           </a:p>
@@ -12875,24 +12796,7 @@
                 <a:ea typeface="Calibri" pitchFamily="34" charset="-122"/>
                 <a:cs typeface="Calibri" pitchFamily="34" charset="-120"/>
               </a:rPr>
-              <a:t>   第一位完整作品被集結手稿的方言詩人</a:t>
-            </a:r>
-            <a:endParaRPr lang="en-US" sz="1400" dirty="0"/>
-          </a:p>
-          <a:p>
-            <a:pPr indent="0" marL="0">
-              <a:buNone/>
-            </a:pPr>
-            <a:r>
-              <a:rPr lang="en-US" sz="1400" dirty="0">
-                <a:solidFill>
-                  <a:srgbClr val="FBF5E6"/>
-                </a:solidFill>
-                <a:latin typeface="Calibri" pitchFamily="34" charset="0"/>
-                <a:ea typeface="Calibri" pitchFamily="34" charset="-122"/>
-                <a:cs typeface="Calibri" pitchFamily="34" charset="-120"/>
-              </a:rPr>
-              <a:t>   代表作：Jeu de Robin et de Marion</a:t>
+              <a:t>   ca. 1240–1288；Jeu de Robin et de Marion</a:t>
             </a:r>
             <a:endParaRPr lang="en-US" sz="1400" dirty="0"/>
           </a:p>
@@ -12906,17 +12810,17 @@
         </p:nvSpPr>
         <p:spPr>
           <a:xfrm>
-            <a:off x="365760" y="4800600"/>
-            <a:ext cx="8412480" cy="201168"/>
-          </a:xfrm>
-          <a:prstGeom prst="rect">
-            <a:avLst/>
-          </a:prstGeom>
-          <a:noFill/>
-          <a:ln/>
-        </p:spPr>
-        <p:txBody>
-          <a:bodyPr wrap="square" rtlCol="0" anchor="t"/>
+            <a:off x="365760" y="4773168"/>
+            <a:ext cx="8412480" cy="256032"/>
+          </a:xfrm>
+          <a:prstGeom prst="rect">
+            <a:avLst/>
+          </a:prstGeom>
+          <a:noFill/>
+          <a:ln/>
+        </p:spPr>
+        <p:txBody>
+          <a:bodyPr wrap="square" lIns="0" tIns="0" rIns="0" bIns="0" rtlCol="0" anchor="t"/>
           <a:lstStyle/>
           <a:p>
             <a:pPr algn="ctr" indent="0" marL="0">
@@ -14101,7 +14005,7 @@
           <a:ln/>
         </p:spPr>
         <p:txBody>
-          <a:bodyPr wrap="square" rtlCol="0" anchor="t"/>
+          <a:bodyPr wrap="square" lIns="0" tIns="0" rIns="0" bIns="0" rtlCol="0" anchor="t"/>
           <a:lstStyle/>
           <a:p>
             <a:pPr indent="0" marL="0">
@@ -14141,12 +14045,6 @@
             <a:pPr indent="0" marL="0">
               <a:buNone/>
             </a:pPr>
-            <a:endParaRPr lang="en-US" sz="1400" dirty="0"/>
-          </a:p>
-          <a:p>
-            <a:pPr indent="0" marL="0">
-              <a:buNone/>
-            </a:pPr>
             <a:r>
               <a:rPr lang="en-US" sz="1400" dirty="0">
                 <a:solidFill>
@@ -14181,12 +14079,6 @@
             <a:pPr indent="0" marL="0">
               <a:buNone/>
             </a:pPr>
-            <a:endParaRPr lang="en-US" sz="1400" dirty="0"/>
-          </a:p>
-          <a:p>
-            <a:pPr indent="0" marL="0">
-              <a:buNone/>
-            </a:pPr>
             <a:r>
               <a:rPr lang="en-US" sz="1400" dirty="0">
                 <a:solidFill>
@@ -14221,12 +14113,6 @@
             <a:pPr indent="0" marL="0">
               <a:buNone/>
             </a:pPr>
-            <a:endParaRPr lang="en-US" sz="1400" dirty="0"/>
-          </a:p>
-          <a:p>
-            <a:pPr indent="0" marL="0">
-              <a:buNone/>
-            </a:pPr>
             <a:r>
               <a:rPr lang="en-US" sz="1400" dirty="0">
                 <a:solidFill>
@@ -14244,12 +14130,6 @@
             <a:pPr indent="0" marL="0">
               <a:buNone/>
             </a:pPr>
-            <a:endParaRPr lang="en-US" sz="1400" dirty="0"/>
-          </a:p>
-          <a:p>
-            <a:pPr indent="0" marL="0">
-              <a:buNone/>
-            </a:pPr>
             <a:r>
               <a:rPr lang="en-US" sz="1400" dirty="0">
                 <a:solidFill>
@@ -14278,12 +14158,6 @@
               </a:rPr>
               <a:t>  Phrases arch-shaped</a:t>
             </a:r>
-            <a:endParaRPr lang="en-US" sz="1400" dirty="0"/>
-          </a:p>
-          <a:p>
-            <a:pPr indent="0" marL="0">
-              <a:buNone/>
-            </a:pPr>
             <a:endParaRPr lang="en-US" sz="1400" dirty="0"/>
           </a:p>
           <a:p>
@@ -14402,7 +14276,7 @@
           <a:ln/>
         </p:spPr>
         <p:txBody>
-          <a:bodyPr wrap="square" rtlCol="0" anchor="t"/>
+          <a:bodyPr wrap="square" lIns="0" tIns="0" rIns="0" bIns="0" rtlCol="0" anchor="t"/>
           <a:lstStyle/>
           <a:p>
             <a:pPr indent="0" marL="0">
@@ -14417,7 +14291,7 @@
                 <a:ea typeface="Calibri" pitchFamily="34" charset="-122"/>
                 <a:cs typeface="Calibri" pitchFamily="34" charset="-120"/>
               </a:rPr>
-              <a:t>• 一段樂句群唱兩次（第二次填新詞）+ 對比段</a:t>
+              <a:t>• 一段樂句群唱兩次（新詞）+ 對比段</a:t>
             </a:r>
             <a:endParaRPr lang="en-US" sz="1400" dirty="0"/>
           </a:p>
@@ -14434,14 +14308,8 @@
                 <a:ea typeface="Calibri" pitchFamily="34" charset="-122"/>
                 <a:cs typeface="Calibri" pitchFamily="34" charset="-120"/>
               </a:rPr>
-              <a:t>  Section sung twice (new text) + contrasting section</a:t>
-            </a:r>
-            <a:endParaRPr lang="en-US" sz="1400" dirty="0"/>
-          </a:p>
-          <a:p>
-            <a:pPr indent="0" marL="0">
-              <a:buNone/>
-            </a:pPr>
+              <a:t>  Section sung twice (new text) + contrasting</a:t>
+            </a:r>
             <a:endParaRPr lang="en-US" sz="1400" dirty="0"/>
           </a:p>
           <a:p>
@@ -14482,12 +14350,6 @@
             <a:pPr indent="0" marL="0">
               <a:buNone/>
             </a:pPr>
-            <a:endParaRPr lang="en-US" sz="1400" dirty="0"/>
-          </a:p>
-          <a:p>
-            <a:pPr indent="0" marL="0">
-              <a:buNone/>
-            </a:pPr>
             <a:r>
               <a:rPr lang="en-US" sz="1400" dirty="0">
                 <a:solidFill>
@@ -14514,7 +14376,7 @@
                 <a:ea typeface="Calibri" pitchFamily="34" charset="-122"/>
                 <a:cs typeface="Calibri" pitchFamily="34" charset="-120"/>
               </a:rPr>
-              <a:t>  A 段 = Stollen（下唇）</a:t>
+              <a:t>  A = Stollen / B = Abgesang</a:t>
             </a:r>
             <a:endParaRPr lang="en-US" sz="1400" dirty="0"/>
           </a:p>
@@ -14531,14 +14393,8 @@
                 <a:ea typeface="Calibri" pitchFamily="34" charset="-122"/>
                 <a:cs typeface="Calibri" pitchFamily="34" charset="-120"/>
               </a:rPr>
-              <a:t>  B 段 = Abgesang（末唱）</a:t>
-            </a:r>
-            <a:endParaRPr lang="en-US" sz="1400" dirty="0"/>
-          </a:p>
-          <a:p>
-            <a:pPr indent="0" marL="0">
-              <a:buNone/>
-            </a:pPr>
+              <a:t>• NAWM 範例：</a:t>
+            </a:r>
             <a:endParaRPr lang="en-US" sz="1400" dirty="0"/>
           </a:p>
           <a:p>
@@ -14554,7 +14410,7 @@
                 <a:ea typeface="Calibri" pitchFamily="34" charset="-122"/>
                 <a:cs typeface="Calibri" pitchFamily="34" charset="-120"/>
               </a:rPr>
-              <a:t>• 四首 NAWM 範例:</a:t>
+              <a:t>  A chantar（Comtessa de Dia）</a:t>
             </a:r>
             <a:endParaRPr lang="en-US" sz="1400" dirty="0"/>
           </a:p>
@@ -14571,7 +14427,7 @@
                 <a:ea typeface="Calibri" pitchFamily="34" charset="-122"/>
                 <a:cs typeface="Calibri" pitchFamily="34" charset="-120"/>
               </a:rPr>
-              <a:t>  A chantar（Comtessa de Dia）</a:t>
+              <a:t>  Palästinalied（Walther）</a:t>
             </a:r>
             <a:endParaRPr lang="en-US" sz="1400" dirty="0"/>
           </a:p>
@@ -14588,7 +14444,7 @@
                 <a:ea typeface="Calibri" pitchFamily="34" charset="-122"/>
                 <a:cs typeface="Calibri" pitchFamily="34" charset="-120"/>
               </a:rPr>
-              <a:t>  Palästinalied（Walther）</a:t>
+              <a:t>  Robins m'aime（Adam de la Halle）</a:t>
             </a:r>
             <a:endParaRPr lang="en-US" sz="1400" dirty="0"/>
           </a:p>
@@ -14605,23 +14461,6 @@
                 <a:ea typeface="Calibri" pitchFamily="34" charset="-122"/>
                 <a:cs typeface="Calibri" pitchFamily="34" charset="-120"/>
               </a:rPr>
-              <a:t>  Robins m'aime（Adam de la Halle）</a:t>
-            </a:r>
-            <a:endParaRPr lang="en-US" sz="1400" dirty="0"/>
-          </a:p>
-          <a:p>
-            <a:pPr indent="0" marL="0">
-              <a:buNone/>
-            </a:pPr>
-            <a:r>
-              <a:rPr lang="en-US" sz="1400" dirty="0">
-                <a:solidFill>
-                  <a:srgbClr val="FBF5E6"/>
-                </a:solidFill>
-                <a:latin typeface="Calibri" pitchFamily="34" charset="0"/>
-                <a:ea typeface="Calibri" pitchFamily="34" charset="-122"/>
-                <a:cs typeface="Calibri" pitchFamily="34" charset="-120"/>
-              </a:rPr>
               <a:t>  Non sofre Santa María（Cantiga 159）</a:t>
             </a:r>
             <a:endParaRPr lang="en-US" sz="1400" dirty="0"/>
@@ -14636,17 +14475,17 @@
         </p:nvSpPr>
         <p:spPr>
           <a:xfrm>
-            <a:off x="365760" y="4809744"/>
-            <a:ext cx="8412480" cy="201168"/>
-          </a:xfrm>
-          <a:prstGeom prst="rect">
-            <a:avLst/>
-          </a:prstGeom>
-          <a:noFill/>
-          <a:ln/>
-        </p:spPr>
-        <p:txBody>
-          <a:bodyPr wrap="square" rtlCol="0" anchor="t"/>
+            <a:off x="365760" y="4773168"/>
+            <a:ext cx="8412480" cy="256032"/>
+          </a:xfrm>
+          <a:prstGeom prst="rect">
+            <a:avLst/>
+          </a:prstGeom>
+          <a:noFill/>
+          <a:ln/>
+        </p:spPr>
+        <p:txBody>
+          <a:bodyPr wrap="square" lIns="0" tIns="0" rIns="0" bIns="0" rtlCol="0" anchor="t"/>
           <a:lstStyle/>
           <a:p>
             <a:pPr algn="ctr" indent="0" marL="0">
